--- a/AI-EBike-Fleet-Manager-Workshop.pptx
+++ b/AI-EBike-Fleet-Manager-Workshop.pptx
@@ -4,6 +4,9 @@
   <p:sldMasterIdLst>
     <p:sldMasterId id="2147483648" r:id="rId1"/>
   </p:sldMasterIdLst>
+  <p:notesMasterIdLst>
+    <p:notesMasterId r:id="rId22"/>
+  </p:notesMasterIdLst>
   <p:sldIdLst>
     <p:sldId id="256" r:id="rId2"/>
     <p:sldId id="257" r:id="rId3"/>
@@ -26,9 +29,6 @@
     <p:sldId id="274" r:id="rId20"/>
     <p:sldId id="275" r:id="rId21"/>
   </p:sldIdLst>
-  <p:notesMasterIdLst>
-    <p:notesMasterId r:id="rId22"/>
-  </p:notesMasterIdLst>
   <p:sldSz cx="12192000" cy="6858000"/>
   <p:notesSz cx="6858000" cy="12192000"/>
   <p:defaultTextStyle>
@@ -123,6 +123,11 @@
       </a:defRPr>
     </a:lvl9pPr>
   </p:defaultTextStyle>
+  <p:extLst>
+    <p:ext uri="{EFAFB233-063F-42B5-8137-9DF3F51BA10A}">
+      <p15:sldGuideLst xmlns:p15="http://schemas.microsoft.com/office/powerpoint/2012/main"/>
+    </p:ext>
+  </p:extLst>
 </p:presentation>
 </file>
 
@@ -148,234 +153,10 @@
           <a:chExt cx="0" cy="0"/>
         </a:xfrm>
       </p:grpSpPr>
-      <p:sp>
-        <p:nvSpPr>
-          <p:cNvPr id="2" name="Header Placeholder 1"/>
-          <p:cNvSpPr>
-            <a:spLocks noGrp="1"/>
-          </p:cNvSpPr>
-          <p:nvPr>
-            <p:ph type="hdr" sz="quarter"/>
-          </p:nvPr>
-        </p:nvSpPr>
-        <p:spPr>
-          <a:xfrm>
-            <a:off x="0" y="0"/>
-            <a:ext cx="2971800" cy="458788"/>
-          </a:xfrm>
-          <a:prstGeom prst="rect">
-            <a:avLst/>
-          </a:prstGeom>
-        </p:spPr>
-        <p:txBody>
-          <a:bodyPr vert="horz" lIns="91440" tIns="45720" rIns="91440" bIns="45720" rtlCol="0"/>
-          <a:lstStyle>
-            <a:lvl1pPr algn="l">
-              <a:defRPr sz="1200"/>
-            </a:lvl1pPr>
-          </a:lstStyle>
-          <a:p>
-            <a:endParaRPr lang="en-US"/>
-          </a:p>
-        </p:txBody>
-      </p:sp>
-      <p:sp>
-        <p:nvSpPr>
-          <p:cNvPr id="3" name="Date Placeholder 2"/>
-          <p:cNvSpPr>
-            <a:spLocks noGrp="1"/>
-          </p:cNvSpPr>
-          <p:nvPr>
-            <p:ph type="dt" idx="1"/>
-          </p:nvPr>
-        </p:nvSpPr>
-        <p:spPr>
-          <a:xfrm>
-            <a:off x="3884613" y="0"/>
-            <a:ext cx="2971800" cy="458788"/>
-          </a:xfrm>
-          <a:prstGeom prst="rect">
-            <a:avLst/>
-          </a:prstGeom>
-        </p:spPr>
-        <p:txBody>
-          <a:bodyPr vert="horz" lIns="91440" tIns="45720" rIns="91440" bIns="45720" rtlCol="0"/>
-          <a:lstStyle>
-            <a:lvl1pPr algn="r">
-              <a:defRPr sz="1200"/>
-            </a:lvl1pPr>
-          </a:lstStyle>
-          <a:p>
-            <a:fld id="{5282F153-3F37-0F45-9E97-73ACFA13230C}" type="datetimeFigureOut">
-              <a:rPr lang="en-US"/>
-              <a:t>7/23/19</a:t>
-            </a:fld>
-            <a:endParaRPr lang="en-US"/>
-          </a:p>
-        </p:txBody>
-      </p:sp>
-      <p:sp>
-        <p:nvSpPr>
-          <p:cNvPr id="4" name="Slide Image Placeholder 3"/>
-          <p:cNvSpPr>
-            <a:spLocks noGrp="1" noRot="1" noChangeAspect="1"/>
-          </p:cNvSpPr>
-          <p:nvPr>
-            <p:ph type="sldImg" idx="2"/>
-          </p:nvPr>
-        </p:nvSpPr>
-        <p:spPr>
-          <a:xfrm>
-            <a:off x="685800" y="1143000"/>
-            <a:ext cx="5486400" cy="3086100"/>
-          </a:xfrm>
-          <a:prstGeom prst="rect">
-            <a:avLst/>
-          </a:prstGeom>
-          <a:noFill/>
-          <a:ln w="12700">
-            <a:solidFill>
-              <a:prstClr val="black"/>
-            </a:solidFill>
-          </a:ln>
-        </p:spPr>
-        <p:txBody>
-          <a:bodyPr vert="horz" lIns="91440" tIns="45720" rIns="91440" bIns="45720" rtlCol="0" anchor="ctr"/>
-          <a:lstStyle/>
-          <a:p>
-            <a:endParaRPr lang="en-US"/>
-          </a:p>
-        </p:txBody>
-      </p:sp>
-      <p:sp>
-        <p:nvSpPr>
-          <p:cNvPr id="5" name="Notes Placeholder 4"/>
-          <p:cNvSpPr>
-            <a:spLocks noGrp="1"/>
-          </p:cNvSpPr>
-          <p:nvPr>
-            <p:ph type="body" sz="quarter" idx="3"/>
-          </p:nvPr>
-        </p:nvSpPr>
-        <p:spPr>
-          <a:xfrm>
-            <a:off x="685800" y="4400550"/>
-            <a:ext cx="5486400" cy="3600450"/>
-          </a:xfrm>
-          <a:prstGeom prst="rect">
-            <a:avLst/>
-          </a:prstGeom>
-        </p:spPr>
-        <p:txBody>
-          <a:bodyPr vert="horz" lIns="91440" tIns="45720" rIns="91440" bIns="45720" rtlCol="0"/>
-          <a:lstStyle/>
-          <a:p>
-            <a:pPr lvl="0"/>
-            <a:r>
-              <a:rPr lang="en-US"/>
-              <a:t>Click to edit Master text styles</a:t>
-            </a:r>
-          </a:p>
-          <a:p>
-            <a:pPr lvl="1"/>
-            <a:r>
-              <a:rPr lang="en-US"/>
-              <a:t>Second level</a:t>
-            </a:r>
-          </a:p>
-          <a:p>
-            <a:pPr lvl="2"/>
-            <a:r>
-              <a:rPr lang="en-US"/>
-              <a:t>Third level</a:t>
-            </a:r>
-          </a:p>
-          <a:p>
-            <a:pPr lvl="3"/>
-            <a:r>
-              <a:rPr lang="en-US"/>
-              <a:t>Fourth level</a:t>
-            </a:r>
-          </a:p>
-          <a:p>
-            <a:pPr lvl="4"/>
-            <a:r>
-              <a:rPr lang="en-US"/>
-              <a:t>Fifth level</a:t>
-            </a:r>
-          </a:p>
-        </p:txBody>
-      </p:sp>
-      <p:sp>
-        <p:nvSpPr>
-          <p:cNvPr id="6" name="Footer Placeholder 5"/>
-          <p:cNvSpPr>
-            <a:spLocks noGrp="1"/>
-          </p:cNvSpPr>
-          <p:nvPr>
-            <p:ph type="ftr" sz="quarter" idx="4"/>
-          </p:nvPr>
-        </p:nvSpPr>
-        <p:spPr>
-          <a:xfrm>
-            <a:off x="0" y="8685213"/>
-            <a:ext cx="2971800" cy="458787"/>
-          </a:xfrm>
-          <a:prstGeom prst="rect">
-            <a:avLst/>
-          </a:prstGeom>
-        </p:spPr>
-        <p:txBody>
-          <a:bodyPr vert="horz" lIns="91440" tIns="45720" rIns="91440" bIns="45720" rtlCol="0" anchor="b"/>
-          <a:lstStyle>
-            <a:lvl1pPr algn="l">
-              <a:defRPr sz="1200"/>
-            </a:lvl1pPr>
-          </a:lstStyle>
-          <a:p>
-            <a:endParaRPr lang="en-US"/>
-          </a:p>
-        </p:txBody>
-      </p:sp>
-      <p:sp>
-        <p:nvSpPr>
-          <p:cNvPr id="7" name="Slide Number Placeholder 6"/>
-          <p:cNvSpPr>
-            <a:spLocks noGrp="1"/>
-          </p:cNvSpPr>
-          <p:nvPr>
-            <p:ph type="sldNum" sz="quarter" idx="5"/>
-          </p:nvPr>
-        </p:nvSpPr>
-        <p:spPr>
-          <a:xfrm>
-            <a:off x="3884613" y="8685213"/>
-            <a:ext cx="2971800" cy="458787"/>
-          </a:xfrm>
-          <a:prstGeom prst="rect">
-            <a:avLst/>
-          </a:prstGeom>
-        </p:spPr>
-        <p:txBody>
-          <a:bodyPr vert="horz" lIns="91440" tIns="45720" rIns="91440" bIns="45720" rtlCol="0" anchor="b"/>
-          <a:lstStyle>
-            <a:lvl1pPr algn="r">
-              <a:defRPr sz="1200"/>
-            </a:lvl1pPr>
-          </a:lstStyle>
-          <a:p>
-            <a:fld id="{CE5E9CC1-C706-0F49-92D6-E571CC5EEA8F}" type="slidenum">
-              <a:rPr lang="en-US"/>
-              <a:t>‹#›</a:t>
-            </a:fld>
-            <a:endParaRPr lang="en-US"/>
-          </a:p>
-        </p:txBody>
-      </p:sp>
     </p:spTree>
     <p:extLst>
       <p:ext uri="{BB962C8B-B14F-4D97-AF65-F5344CB8AC3E}">
-        <p14:creationId xmlns:p14="http://schemas.microsoft.com/office/powerpoint/2010/main" val="1024086991"/>
+        <p14:creationId xmlns:p14="http://schemas.microsoft.com/office/powerpoint/2010/main" val="2867299370"/>
       </p:ext>
     </p:extLst>
   </p:cSld>
@@ -523,7 +304,6 @@
               <a:rPr lang="en-US" dirty="0"/>
               <a:t>Bienvenida. Presentarse en una frase. Mensaje clave: "no vengo a dar teoría; vais a gobernar un agente de IA real dentro de la app OpenCode, con modelos gratis — sin cuentas, sin keys, sin compilar nada". La app gestiona una flota de bicis eléctricas. Preguntar a mano alzada: ¿quién ha usado ChatGPT? ¿quién un agente de código?</a:t>
             </a:r>
-            <a:endParaRPr lang="en-US" dirty="0"/>
           </a:p>
         </p:txBody>
       </p:sp>
@@ -611,7 +391,6 @@
               <a:rPr lang="en-US" dirty="0"/>
               <a:t>Analogía: pensar despacio antes de hablar vs responder de corrido. En la app se puede ajustar el nivel de esfuerzo de razonamiento; para el taller el nivel por defecto va sobrado — mencionarlo como herramienta cuando un modelo falle en una tarea retorcida (y recordar que más esfuerzo = más tokens = más coste). (~2 min)</a:t>
             </a:r>
-            <a:endParaRPr lang="en-US" dirty="0"/>
           </a:p>
         </p:txBody>
       </p:sp>
@@ -699,7 +478,6 @@
               <a:rPr lang="en-US" dirty="0"/>
               <a:t>Mapa del módulo (2 min, sin código): sesiones, `/compact`, `/init` → AGENTS.md. A continuación la demo grabada M1; después ellos hacen los experimentos con el tutor `/module-1` (nombre → nueva sesión → amnesia → volver → contador de tokens → /compact → /init).</a:t>
             </a:r>
-            <a:endParaRPr lang="en-US" dirty="0"/>
           </a:p>
         </p:txBody>
       </p:sp>
@@ -787,7 +565,6 @@
               <a:rPr lang="en-US" dirty="0"/>
               <a:t>Coreografía: abrir la carpeta `demos/m1-bare` en OpenCode, abrir la sesión grabada `DEMO M1…` (instalada con `import_demo_sessions.py`). Recorrer prompt y salida: informe seguro de sí mismo — flota de 200 bicis, 10 averiadas, buckets de batería ordenados — TODO fabricado; la flota real tiene 8 bicis. Palabra del día: **hallucination**. Preguntar a la sala: "¿cómo sabríais que miente?". Después: `/module-1` (15').</a:t>
             </a:r>
-            <a:endParaRPr lang="en-US" dirty="0"/>
           </a:p>
         </p:txBody>
       </p:sp>
@@ -875,7 +652,6 @@
               <a:rPr lang="en-US" dirty="0"/>
               <a:t>Las dos defensas contra lo visto en M1 (2 min): (1) grounding — una regla en AGENTS.md obliga a llamar a las tools de lectura antes de responder, RAG en su versión mínima; (2) un hook (`tool.execute.before`) que inspecciona cada llamada a tool y puede bloquearla — no depende del humor del modelo.</a:t>
             </a:r>
-            <a:endParaRPr lang="en-US" dirty="0"/>
           </a:p>
         </p:txBody>
       </p:sp>
@@ -963,7 +739,6 @@
               <a:rPr lang="en-US" dirty="0"/>
               <a:t>EL MONEY SHOT: abrir `demos/m2-grounded`, sesión `DEMO M2…` — es EXACTAMENTE la misma prompt que en M1, pero la salida cita la llamada a `fleet_get_fleet_status` y los datos reales (8 bicis, #3 y #7 averiadas, #5 en mantenimiento). Poner M1 y M2 una al lado de la otra. Después, demo EN VIVO del guard (es determinista): pedirle que ejecute `rm -rf /tmp/whatever` y ver el bloqueo del plugin. Ellos: `/module-2` (15').</a:t>
             </a:r>
-            <a:endParaRPr lang="en-US" dirty="0"/>
           </a:p>
         </p:txBody>
       </p:sp>
@@ -1051,7 +826,6 @@
               <a:rPr lang="en-US" dirty="0"/>
               <a:t>Anatomía de una tool (2 min): `.opencode/tools/fleet.ts`; cada export se convierte en una tool `&lt;fichero&gt;_&lt;export&gt;`; el modelo ve la descripción y el esquema y decide cuándo llamarla y con qué argumentos; quien ejecuta el SQL es NUESTRO código. Seguridad: permisos ask/allow de la app + el guard del Módulo 2.</a:t>
             </a:r>
-            <a:endParaRPr lang="en-US" dirty="0"/>
           </a:p>
         </p:txBody>
       </p:sp>
@@ -1139,7 +913,6 @@
               <a:rPr lang="en-US" dirty="0"/>
               <a:t>Abrir `demos/m3-tools`, sesión `DEMO M3…`. Señalar: el modelo eligió la tool Y el argumento por sí solo; una frase en inglés se convirtió en un UPDATE real (la BD de la demo está reseteada a pristine — la sesión grabada es la prueba). Ellos implementan las dos tools de escritura con el tutor `/module-3` (15').</a:t>
             </a:r>
-            <a:endParaRPr lang="en-US" dirty="0"/>
           </a:p>
         </p:txBody>
       </p:sp>
@@ -1227,7 +1000,6 @@
               <a:rPr lang="en-US" dirty="0"/>
               <a:t>El salto conceptual (2 min): el bucle deja de ser humano↔IA y pasa a ser IA↔tools. El agente `fleet-manager` tiene SOLO las tools `fleet_*` (sin bash/write/edit) y un tope de 20 pasos como fusible contra bucles infinitos. Los permisos de la app son la otra puerta de seguridad.</a:t>
             </a:r>
-            <a:endParaRPr lang="en-US" dirty="0"/>
           </a:p>
         </p:txBody>
       </p:sp>
@@ -1315,7 +1087,6 @@
               <a:rPr lang="en-US" dirty="0"/>
               <a:t>Abrir `demos/m4-agent`, sesión `DEMO M4…`. Recorrer el bucle: `fleet_list_pending_tickets` → `fleet_assign_mechanic` → `fleet_mark_bike_fixed`, tres veces (tickets #1-#3; el #4 se cierra solo al arreglar la bici #3), y se DETIENE SOLO con un resumen. Mostrar después el archivo `.opencode/agents/fleet-manager.md`. Ellos completan el agente con `/module-4` (15').</a:t>
             </a:r>
-            <a:endParaRPr lang="en-US" dirty="0"/>
           </a:p>
         </p:txBody>
       </p:sp>
@@ -1403,7 +1174,6 @@
               <a:rPr lang="en-US" dirty="0"/>
               <a:t>Recap: los 4 conceptos de hoy son los mismos que usan ChatGPT, Copilot y cualquier agente serio. Ideas para casa: añadir una tool nueva (¿`order_parts`?), endurecer el guard con más patrones o probar otro modelo gratis. Q&amp;A y despedida (5 min).</a:t>
             </a:r>
-            <a:endParaRPr lang="en-US" dirty="0"/>
           </a:p>
         </p:txBody>
       </p:sp>
@@ -1491,7 +1261,6 @@
               <a:rPr lang="en-US" dirty="0"/>
               <a:t>Vender el formato: taller MUY práctico. Ritmo de cada módulo: (1) mini-teoría de 2 minutos, (2) yo proyecto una demo GRABADA — cero riesgo de que el modelo falle en vivo, (3) vosotros lo hacéis con un tutor IA (`/module-N`) que guía paso a paso con pistas, sin hacer el trabajo por vosotros. Recalcar: no vamos a compilar nada en 90 minutos; la app es la única herramienta.</a:t>
             </a:r>
-            <a:endParaRPr lang="en-US" dirty="0"/>
           </a:p>
         </p:txBody>
       </p:sp>
@@ -1579,7 +1348,6 @@
               <a:rPr lang="en-US" dirty="0"/>
               <a:t>Slide de cierre. Abrir turno de preguntas y recordar dónde están los materiales: el repo del taller y opencode.ai para seguir practicando en casa (gratis, sin cuenta).</a:t>
             </a:r>
-            <a:endParaRPr lang="en-US" dirty="0"/>
           </a:p>
         </p:txBody>
       </p:sp>
@@ -1667,7 +1435,6 @@
               <a:rPr lang="en-US" dirty="0"/>
               <a:t>Enseñar los tiempos: 4 módulos de 15 minutos, cada uno con su concepto, su demo grabada y su hands-on con tutor. Avisar: "los que terminéis antes, ayudáis al de al lado — enseñar es la mejor forma de aprender".</a:t>
             </a:r>
-            <a:endParaRPr lang="en-US" dirty="0"/>
           </a:p>
         </p:txBody>
       </p:sp>
@@ -1755,7 +1522,6 @@
               <a:rPr lang="en-US" dirty="0"/>
               <a:t>Todos los equipos son Windows: "OpenCode Desktop — Windows (x64)" desde opencode.ai/download; tener los instaladores en USB por si el WiFi del aula va lento. El repo: `git clone` en PowerShell (Git for Windows) o el botón "Code → Download ZIP" y descomprimir. Leer la lista de NO en voz alta: no se compila nada en todo el taller — el agente es la única herramienta. Aviso: la primera apertura del proyecto auto-instala las dependencias del plugin (internet solo esa vez).</a:t>
             </a:r>
-            <a:endParaRPr lang="en-US" dirty="0"/>
           </a:p>
         </p:txBody>
       </p:sp>
@@ -1843,7 +1609,6 @@
               <a:rPr lang="en-US" dirty="0"/>
               <a:t>Checkpoint: todo el mundo abre `starter/` (File → Open Folder), elige Big Pickle en el selector y recibe respuesta a un "Hello". Troubleshooting: la primera apertura auto-instala dependencias (internet una vez); si sale "No provider available" es rate limit del free tier — esperar ~30 s y reintentar, o cambiar a otro modelo gratis. Presentar los comandos tutor: guían paso a paso, dan pistas, no soluciones. Los `demos/` son solo del instructor. Fin del Setup (~10').</a:t>
             </a:r>
-            <a:endParaRPr lang="en-US" dirty="0"/>
           </a:p>
         </p:txBody>
       </p:sp>
@@ -1931,7 +1696,6 @@
               <a:rPr lang="en-US" dirty="0"/>
               <a:t>El concepto más importante del taller (~2 min). El modelo es una función matemática gigante: `f(texto) → texto`. Cuando parezca que "recuerda", "consulta" o "actúa", en realidad es el software que lo rodea — hoy, OpenCode.</a:t>
             </a:r>
-            <a:endParaRPr lang="en-US" dirty="0"/>
           </a:p>
         </p:txBody>
       </p:sp>
@@ -2019,7 +1783,6 @@
               <a:rPr lang="en-US" dirty="0"/>
               <a:t>Los tres ejes sin entrar en benchmarks: tamaño, velocidad, coste — todo es un trade-off. Hoy usamos los modelos gratuitos integrados en OpenCode. Enseñar el selector en la parte inferior de la ventana. Fallbacks si uno falla: `nemotron-3-ultra-free` · `deepseek-v4-flash-free`. (~2 min)</a:t>
             </a:r>
-            <a:endParaRPr lang="en-US" dirty="0"/>
           </a:p>
         </p:txBody>
       </p:sp>
@@ -2107,7 +1870,6 @@
               <a:rPr lang="en-US" dirty="0"/>
               <a:t>Trocear la frase de ejemplo en la pizarra si hace falta. Los tokens son la unidad de TODO: de lo que envías y de lo que recibes — por eso las conversaciones largas cuestan más y por eso existe el presupuesto de la ventana (siguiente slide) y el comando `/compact` (Módulo 1). (~2 min)</a:t>
             </a:r>
-            <a:endParaRPr lang="en-US" dirty="0"/>
           </a:p>
         </p:txBody>
       </p:sp>
@@ -2195,7 +1957,6 @@
               <a:rPr lang="en-US" dirty="0"/>
               <a:t>La analogía de la amnesia: hablar con alguien a quien hay que pasarle la transcripción completa de la conversación en cada frase. Esto ES el Módulo 1 que experimentarán en media hora. La "memoria" del chat es software (la sesión), no magia. (~2 min)</a:t>
             </a:r>
-            <a:endParaRPr lang="en-US" dirty="0"/>
           </a:p>
         </p:txBody>
       </p:sp>
@@ -2273,6 +2034,7 @@
         <a:solidFill>
           <a:srgbClr val="0F172A"/>
         </a:solidFill>
+        <a:effectLst/>
       </p:bgPr>
     </p:bg>
     <p:spTree>
@@ -2308,6 +2070,13 @@
           </a:solidFill>
           <a:ln/>
         </p:spPr>
+        <p:txBody>
+          <a:bodyPr/>
+          <a:lstStyle/>
+          <a:p>
+            <a:endParaRPr lang="en-US"/>
+          </a:p>
+        </p:txBody>
       </p:sp>
     </p:spTree>
   </p:cSld>
@@ -2325,6 +2094,7 @@
         <a:solidFill>
           <a:srgbClr val="0F172A"/>
         </a:solidFill>
+        <a:effectLst/>
       </p:bgPr>
     </p:bg>
     <p:spTree>
@@ -2377,6 +2147,7 @@
         <a:solidFill>
           <a:srgbClr val="FFFFFF"/>
         </a:solidFill>
+        <a:effectLst/>
       </p:bgPr>
     </p:bg>
     <p:spTree>
@@ -2454,7 +2225,7 @@
           <a:bodyPr wrap="square" rtlCol="0" anchor="ctr"/>
           <a:lstStyle/>
           <a:p>
-            <a:pPr indent="0" marL="0">
+            <a:pPr marL="0" indent="0">
               <a:buNone/>
             </a:pPr>
             <a:r>
@@ -2492,7 +2263,7 @@
           </a:prstGeom>
           <a:extLst>
             <a:ext uri="{C572A759-6A51-4108-AA02-DFA0A04FC94B}">
-              <ma14:wrappingTextBoxFlag xmlns:ma14="http://schemas.microsoft.com/office/mac/drawingml/2011/main" val="0"/>
+              <ma14:wrappingTextBoxFlag xmlns="" xmlns:ma14="http://schemas.microsoft.com/office/mac/drawingml/2011/main" val="0"/>
             </a:ext>
           </a:extLst>
         </p:spPr>
@@ -2510,8 +2281,8 @@
           <a:p>
             <a:pPr algn="l"/>
             <a:fld id="{F7021451-1387-4CA6-816F-3879F97B5CBC}" type="slidenum">
-              <a:rPr b="0" lang="en-US"/>
-              <a:t>1004</a:t>
+              <a:rPr lang="en-US" b="0"/>
+              <a:t>‹#›</a:t>
             </a:fld>
             <a:endParaRPr lang="en-US"/>
           </a:p>
@@ -2533,6 +2304,7 @@
         <a:solidFill>
           <a:srgbClr val="FFFFFF"/>
         </a:solidFill>
+        <a:effectLst/>
       </p:bgPr>
     </p:bg>
     <p:spTree>
@@ -2610,7 +2382,7 @@
           <a:bodyPr wrap="square" rtlCol="0" anchor="ctr"/>
           <a:lstStyle/>
           <a:p>
-            <a:pPr indent="0" marL="0">
+            <a:pPr marL="0" indent="0">
               <a:buNone/>
             </a:pPr>
             <a:r>
@@ -2648,7 +2420,7 @@
           </a:prstGeom>
           <a:extLst>
             <a:ext uri="{C572A759-6A51-4108-AA02-DFA0A04FC94B}">
-              <ma14:wrappingTextBoxFlag xmlns:ma14="http://schemas.microsoft.com/office/mac/drawingml/2011/main" val="0"/>
+              <ma14:wrappingTextBoxFlag xmlns="" xmlns:ma14="http://schemas.microsoft.com/office/mac/drawingml/2011/main" val="0"/>
             </a:ext>
           </a:extLst>
         </p:spPr>
@@ -2666,8 +2438,8 @@
           <a:p>
             <a:pPr algn="l"/>
             <a:fld id="{F7021451-1387-4CA6-816F-3879F97B5CBC}" type="slidenum">
-              <a:rPr b="0" lang="en-US"/>
-              <a:t>1005</a:t>
+              <a:rPr lang="en-US" b="0"/>
+              <a:t>‹#›</a:t>
             </a:fld>
             <a:endParaRPr lang="en-US"/>
           </a:p>
@@ -2689,6 +2461,7 @@
         <a:solidFill>
           <a:srgbClr val="FFFFFF"/>
         </a:solidFill>
+        <a:effectLst/>
       </p:bgPr>
     </p:bg>
     <p:spTree>
@@ -2766,7 +2539,7 @@
           <a:bodyPr wrap="square" rtlCol="0" anchor="ctr"/>
           <a:lstStyle/>
           <a:p>
-            <a:pPr indent="0" marL="0">
+            <a:pPr marL="0" indent="0">
               <a:buNone/>
             </a:pPr>
             <a:r>
@@ -2804,7 +2577,7 @@
           </a:prstGeom>
           <a:extLst>
             <a:ext uri="{C572A759-6A51-4108-AA02-DFA0A04FC94B}">
-              <ma14:wrappingTextBoxFlag xmlns:ma14="http://schemas.microsoft.com/office/mac/drawingml/2011/main" val="0"/>
+              <ma14:wrappingTextBoxFlag xmlns="" xmlns:ma14="http://schemas.microsoft.com/office/mac/drawingml/2011/main" val="0"/>
             </a:ext>
           </a:extLst>
         </p:spPr>
@@ -2822,8 +2595,8 @@
           <a:p>
             <a:pPr algn="l"/>
             <a:fld id="{F7021451-1387-4CA6-816F-3879F97B5CBC}" type="slidenum">
-              <a:rPr b="0" lang="en-US"/>
-              <a:t>1006</a:t>
+              <a:rPr lang="en-US" b="0"/>
+              <a:t>‹#›</a:t>
             </a:fld>
             <a:endParaRPr lang="en-US"/>
           </a:p>
@@ -2845,6 +2618,7 @@
         <a:solidFill>
           <a:srgbClr val="1E293B"/>
         </a:solidFill>
+        <a:effectLst/>
       </p:bgPr>
     </p:bg>
     <p:spTree>
@@ -2897,6 +2671,7 @@
         <a:solidFill>
           <a:srgbClr val="FFFFFF"/>
         </a:solidFill>
+        <a:effectLst/>
       </p:bgPr>
     </p:bg>
     <p:spTree>
@@ -2924,6 +2699,11 @@
 <file path=ppt/slideMasters/slideMaster1.xml><?xml version="1.0" encoding="utf-8"?>
 <p:sldMaster xmlns:a="http://schemas.openxmlformats.org/drawingml/2006/main" xmlns:r="http://schemas.openxmlformats.org/officeDocument/2006/relationships" xmlns:p="http://schemas.openxmlformats.org/presentationml/2006/main">
   <p:cSld>
+    <p:bg>
+      <p:bgRef idx="1001">
+        <a:schemeClr val="bg1"/>
+      </p:bgRef>
+    </p:bg>
     <p:spTree>
       <p:nvGrpSpPr>
         <p:cNvPr id="1" name=""/>
@@ -2958,7 +2738,7 @@
           </a:prstGeom>
           <a:extLst>
             <a:ext uri="{C572A759-6A51-4108-AA02-DFA0A04FC94B}">
-              <ma14:wrappingTextBoxFlag xmlns:ma14="http://schemas.microsoft.com/office/mac/drawingml/2011/main" val="0"/>
+              <ma14:wrappingTextBoxFlag xmlns="" xmlns:ma14="http://schemas.microsoft.com/office/mac/drawingml/2011/main" val="0"/>
             </a:ext>
           </a:extLst>
         </p:spPr>
@@ -2976,8 +2756,8 @@
           <a:p>
             <a:pPr algn="l"/>
             <a:fld id="{F7021451-1387-4CA6-816F-3879F97B5CBC}" type="slidenum">
-              <a:rPr b="0" lang="en-US"/>
-              <a:t>null</a:t>
+              <a:rPr lang="en-US" b="0"/>
+              <a:t>‹#›</a:t>
             </a:fld>
             <a:endParaRPr lang="en-US"/>
           </a:p>
@@ -3288,7 +3068,7 @@
           <a:bodyPr wrap="square" rtlCol="0" anchor="ctr"/>
           <a:lstStyle/>
           <a:p>
-            <a:pPr algn="r" indent="0" marL="0">
+            <a:pPr marL="0" indent="0" algn="r">
               <a:buNone/>
             </a:pPr>
             <a:r>
@@ -3302,9 +3082,6 @@
               </a:rPr>
               <a:t>x</a:t>
             </a:r>
-            <a:pPr algn="r" indent="0" marL="0">
-              <a:buNone/>
-            </a:pPr>
             <a:r>
               <a:rPr lang="en-US" sz="3300" b="1" dirty="0">
                 <a:solidFill>
@@ -3316,9 +3093,6 @@
               </a:rPr>
               <a:t>P</a:t>
             </a:r>
-            <a:pPr algn="r" indent="0" marL="0">
-              <a:buNone/>
-            </a:pPr>
             <a:r>
               <a:rPr lang="en-US" sz="3300" b="1" dirty="0">
                 <a:solidFill>
@@ -3355,7 +3129,7 @@
           <a:bodyPr wrap="square" rtlCol="0" anchor="ctr"/>
           <a:lstStyle/>
           <a:p>
-            <a:pPr algn="r" indent="0" marL="0">
+            <a:pPr marL="0" indent="0" algn="r">
               <a:buNone/>
             </a:pPr>
             <a:r>
@@ -3369,9 +3143,6 @@
               </a:rPr>
               <a:t>x</a:t>
             </a:r>
-            <a:pPr algn="r" indent="0" marL="0">
-              <a:buNone/>
-            </a:pPr>
             <a:r>
               <a:rPr lang="en-US" sz="900" b="1" dirty="0">
                 <a:solidFill>
@@ -3383,9 +3154,6 @@
               </a:rPr>
               <a:t>P</a:t>
             </a:r>
-            <a:pPr algn="r" indent="0" marL="0">
-              <a:buNone/>
-            </a:pPr>
             <a:r>
               <a:rPr lang="en-US" sz="900" b="1" dirty="0">
                 <a:solidFill>
@@ -3422,7 +3190,7 @@
           <a:bodyPr wrap="square" rtlCol="0" anchor="ctr"/>
           <a:lstStyle/>
           <a:p>
-            <a:pPr algn="l" indent="0" marL="0">
+            <a:pPr marL="0" indent="0" algn="l">
               <a:buNone/>
             </a:pPr>
             <a:r>
@@ -3461,7 +3229,7 @@
           <a:bodyPr wrap="square" rtlCol="0" anchor="ctr"/>
           <a:lstStyle/>
           <a:p>
-            <a:pPr algn="l" indent="0" marL="0">
+            <a:pPr marL="0" indent="0" algn="l">
               <a:buNone/>
             </a:pPr>
             <a:r>
@@ -3473,7 +3241,7 @@
                 <a:ea typeface="Arial Black" pitchFamily="34" charset="-122"/>
                 <a:cs typeface="Arial Black" pitchFamily="34" charset="-120"/>
               </a:rPr>
-              <a:t>A 90-minute hands-on AI workshop</a:t>
+              <a:t>A hands-on AI workshop</a:t>
             </a:r>
             <a:endParaRPr lang="en-US" sz="4200" dirty="0"/>
           </a:p>
@@ -3500,20 +3268,9 @@
           <a:bodyPr wrap="square" rtlCol="0" anchor="ctr"/>
           <a:lstStyle/>
           <a:p>
-            <a:pPr algn="l" indent="0" marL="0">
+            <a:pPr marL="0" indent="0" algn="l">
               <a:buNone/>
             </a:pPr>
-            <a:r>
-              <a:rPr lang="en-US" sz="1400" dirty="0">
-                <a:solidFill>
-                  <a:srgbClr val="FFFFFF"/>
-                </a:solidFill>
-                <a:latin typeface="Arial" pitchFamily="34" charset="0"/>
-                <a:ea typeface="Arial" pitchFamily="34" charset="-122"/>
-                <a:cs typeface="Arial" pitchFamily="34" charset="-120"/>
-              </a:rPr>
-              <a:t>Naiden Gerov Secondary School · Varna</a:t>
-            </a:r>
             <a:endParaRPr lang="en-US" sz="1400" dirty="0"/>
           </a:p>
         </p:txBody>
@@ -3539,7 +3296,7 @@
           <a:bodyPr wrap="square" rtlCol="0" anchor="ctr"/>
           <a:lstStyle/>
           <a:p>
-            <a:pPr algn="r" indent="0" marL="0">
+            <a:pPr marL="0" indent="0" algn="r">
               <a:buNone/>
             </a:pPr>
             <a:r>
@@ -3603,7 +3360,7 @@
           <a:bodyPr wrap="square" rtlCol="0" anchor="ctr"/>
           <a:lstStyle/>
           <a:p>
-            <a:pPr algn="r" indent="0" marL="0">
+            <a:pPr marL="0" indent="0" algn="r">
               <a:buNone/>
             </a:pPr>
             <a:r>
@@ -3617,9 +3374,6 @@
               </a:rPr>
               <a:t>x</a:t>
             </a:r>
-            <a:pPr algn="r" indent="0" marL="0">
-              <a:buNone/>
-            </a:pPr>
             <a:r>
               <a:rPr lang="en-US" sz="900" b="1" dirty="0">
                 <a:solidFill>
@@ -3631,9 +3385,6 @@
               </a:rPr>
               <a:t>P</a:t>
             </a:r>
-            <a:pPr algn="r" indent="0" marL="0">
-              <a:buNone/>
-            </a:pPr>
             <a:r>
               <a:rPr lang="en-US" sz="900" b="1" dirty="0">
                 <a:solidFill>
@@ -3670,7 +3421,7 @@
           <a:bodyPr wrap="square" rtlCol="0" anchor="ctr"/>
           <a:lstStyle/>
           <a:p>
-            <a:pPr algn="l" indent="0" marL="0">
+            <a:pPr marL="0" indent="0" algn="l">
               <a:buNone/>
             </a:pPr>
             <a:r>
@@ -3707,6 +3458,13 @@
           </a:solidFill>
           <a:ln/>
         </p:spPr>
+        <p:txBody>
+          <a:bodyPr/>
+          <a:lstStyle/>
+          <a:p>
+            <a:endParaRPr lang="en-US"/>
+          </a:p>
+        </p:txBody>
       </p:sp>
       <p:sp>
         <p:nvSpPr>
@@ -3729,7 +3487,7 @@
           <a:bodyPr wrap="square" rtlCol="0" anchor="t"/>
           <a:lstStyle/>
           <a:p>
-            <a:pPr indent="0" marL="0">
+            <a:pPr marL="0" indent="0">
               <a:lnSpc>
                 <a:spcPct val="140000"/>
               </a:lnSpc>
@@ -3749,6 +3507,17 @@
               </a:rPr>
               <a:t>Models can "think longer" before answering</a:t>
             </a:r>
+          </a:p>
+          <a:p>
+            <a:pPr marL="0" indent="0">
+              <a:lnSpc>
+                <a:spcPct val="140000"/>
+              </a:lnSpc>
+              <a:spcAft>
+                <a:spcPts val="1200"/>
+              </a:spcAft>
+              <a:buNone/>
+            </a:pPr>
             <a:endParaRPr lang="en-US" sz="1700" dirty="0"/>
           </a:p>
           <a:p>
@@ -3773,6 +3542,17 @@
               </a:rPr>
               <a:t>More effort</a:t>
             </a:r>
+            <a:r>
+              <a:rPr lang="en-US" sz="1600" dirty="0">
+                <a:solidFill>
+                  <a:srgbClr val="1F2937"/>
+                </a:solidFill>
+                <a:latin typeface="Arial" pitchFamily="34" charset="0"/>
+                <a:ea typeface="Arial" pitchFamily="34" charset="-122"/>
+                <a:cs typeface="Arial" pitchFamily="34" charset="-120"/>
+              </a:rPr>
+              <a:t> → better reasoning… slower, more tokens</a:t>
+            </a:r>
             <a:endParaRPr lang="en-US" sz="1700" dirty="0"/>
           </a:p>
           <a:p>
@@ -3787,6 +3567,21 @@
               <a:buChar char="•"/>
             </a:pPr>
             <a:r>
+              <a:rPr lang="en-US" sz="1600" b="1" dirty="0">
+                <a:solidFill>
+                  <a:srgbClr val="16A34A"/>
+                </a:solidFill>
+                <a:latin typeface="Arial" pitchFamily="34" charset="0"/>
+                <a:ea typeface="Arial" pitchFamily="34" charset="-122"/>
+                <a:cs typeface="Arial" pitchFamily="34" charset="-120"/>
+              </a:rPr>
+              <a:t>Less effort</a:t>
+            </a:r>
+            <a:r>
+              <a:rPr lang="en-US" sz="1700" b="1" dirty="0"/>
+              <a:t> </a:t>
+            </a:r>
+            <a:r>
               <a:rPr lang="en-US" sz="1600" dirty="0">
                 <a:solidFill>
                   <a:srgbClr val="1F2937"/>
@@ -3795,9 +3590,8 @@
                 <a:ea typeface="Arial" pitchFamily="34" charset="-122"/>
                 <a:cs typeface="Arial" pitchFamily="34" charset="-120"/>
               </a:rPr>
-              <a:t> → better reasoning… slower, more tokens</a:t>
-            </a:r>
-            <a:endParaRPr lang="en-US" sz="1700" dirty="0"/>
+              <a:t>→ fast and cheap… more mistakes</a:t>
+            </a:r>
           </a:p>
           <a:p>
             <a:pPr marL="342900" indent="-342900">
@@ -3810,17 +3604,6 @@
               <a:buSzPct val="100000"/>
               <a:buChar char="•"/>
             </a:pPr>
-            <a:r>
-              <a:rPr lang="en-US" sz="1600" b="1" dirty="0">
-                <a:solidFill>
-                  <a:srgbClr val="16A34A"/>
-                </a:solidFill>
-                <a:latin typeface="Arial" pitchFamily="34" charset="0"/>
-                <a:ea typeface="Arial" pitchFamily="34" charset="-122"/>
-                <a:cs typeface="Arial" pitchFamily="34" charset="-120"/>
-              </a:rPr>
-              <a:t>Less effort</a:t>
-            </a:r>
             <a:endParaRPr lang="en-US" sz="1700" dirty="0"/>
           </a:p>
           <a:p>
@@ -3843,30 +3626,6 @@
                 <a:ea typeface="Arial" pitchFamily="34" charset="-122"/>
                 <a:cs typeface="Arial" pitchFamily="34" charset="-120"/>
               </a:rPr>
-              <a:t> → fast and cheap… more mistakes</a:t>
-            </a:r>
-            <a:endParaRPr lang="en-US" sz="1700" dirty="0"/>
-          </a:p>
-          <a:p>
-            <a:pPr marL="342900" indent="-342900">
-              <a:lnSpc>
-                <a:spcPct val="140000"/>
-              </a:lnSpc>
-              <a:spcAft>
-                <a:spcPts val="800"/>
-              </a:spcAft>
-              <a:buSzPct val="100000"/>
-              <a:buChar char="•"/>
-            </a:pPr>
-            <a:r>
-              <a:rPr lang="en-US" sz="1600" dirty="0">
-                <a:solidFill>
-                  <a:srgbClr val="1F2937"/>
-                </a:solidFill>
-                <a:latin typeface="Arial" pitchFamily="34" charset="0"/>
-                <a:ea typeface="Arial" pitchFamily="34" charset="-122"/>
-                <a:cs typeface="Arial" pitchFamily="34" charset="-120"/>
-              </a:rPr>
               <a:t>Crank it up for hard problems; keep it fast for chat</a:t>
             </a:r>
             <a:endParaRPr lang="en-US" sz="1700" dirty="0"/>
@@ -3893,7 +3652,7 @@
           </a:prstGeom>
           <a:extLst>
             <a:ext uri="{C572A759-6A51-4108-AA02-DFA0A04FC94B}">
-              <ma14:wrappingTextBoxFlag xmlns:ma14="http://schemas.microsoft.com/office/mac/drawingml/2011/main" val="0"/>
+              <ma14:wrappingTextBoxFlag xmlns="" xmlns:ma14="http://schemas.microsoft.com/office/mac/drawingml/2011/main" val="0"/>
             </a:ext>
           </a:extLst>
         </p:spPr>
@@ -3911,7 +3670,7 @@
           <a:p>
             <a:pPr algn="l"/>
             <a:fld id="{F7021451-1387-4CA6-816F-3879F97B5CBC}" type="slidenum">
-              <a:rPr b="0" lang="en-US"/>
+              <a:rPr lang="en-US" b="0"/>
               <a:t>10</a:t>
             </a:fld>
             <a:endParaRPr lang="en-US"/>
@@ -3964,7 +3723,7 @@
           <a:bodyPr wrap="square" rtlCol="0" anchor="ctr"/>
           <a:lstStyle/>
           <a:p>
-            <a:pPr algn="r" indent="0" marL="0">
+            <a:pPr marL="0" indent="0" algn="r">
               <a:buNone/>
             </a:pPr>
             <a:r>
@@ -3978,9 +3737,6 @@
               </a:rPr>
               <a:t>x</a:t>
             </a:r>
-            <a:pPr algn="r" indent="0" marL="0">
-              <a:buNone/>
-            </a:pPr>
             <a:r>
               <a:rPr lang="en-US" sz="900" b="1" dirty="0">
                 <a:solidFill>
@@ -3992,9 +3748,6 @@
               </a:rPr>
               <a:t>P</a:t>
             </a:r>
-            <a:pPr algn="r" indent="0" marL="0">
-              <a:buNone/>
-            </a:pPr>
             <a:r>
               <a:rPr lang="en-US" sz="900" b="1" dirty="0">
                 <a:solidFill>
@@ -4031,7 +3784,7 @@
           <a:bodyPr wrap="square" rtlCol="0" anchor="ctr"/>
           <a:lstStyle/>
           <a:p>
-            <a:pPr algn="l" indent="0" marL="0">
+            <a:pPr marL="0" indent="0" algn="l">
               <a:buNone/>
             </a:pPr>
             <a:r>
@@ -4068,6 +3821,13 @@
           </a:solidFill>
           <a:ln/>
         </p:spPr>
+        <p:txBody>
+          <a:bodyPr/>
+          <a:lstStyle/>
+          <a:p>
+            <a:endParaRPr lang="en-US"/>
+          </a:p>
+        </p:txBody>
       </p:sp>
       <p:sp>
         <p:nvSpPr>
@@ -4111,7 +3871,32 @@
               </a:rPr>
               <a:t>A </a:t>
             </a:r>
-            <a:endParaRPr lang="en-US" sz="1600" dirty="0"/>
+            <a:r>
+              <a:rPr lang="en-US" sz="1600" b="1" dirty="0">
+                <a:solidFill>
+                  <a:srgbClr val="16A34A"/>
+                </a:solidFill>
+                <a:latin typeface="Arial" pitchFamily="34" charset="0"/>
+                <a:ea typeface="Arial" pitchFamily="34" charset="-122"/>
+                <a:cs typeface="Arial" pitchFamily="34" charset="-120"/>
+              </a:rPr>
+              <a:t>session</a:t>
+            </a:r>
+            <a:r>
+              <a:rPr lang="en-US" sz="1600" b="1" dirty="0"/>
+              <a:t> </a:t>
+            </a:r>
+            <a:r>
+              <a:rPr lang="en-US" sz="1600" dirty="0">
+                <a:solidFill>
+                  <a:srgbClr val="1F2937"/>
+                </a:solidFill>
+                <a:latin typeface="Arial" pitchFamily="34" charset="0"/>
+                <a:ea typeface="Arial" pitchFamily="34" charset="-122"/>
+                <a:cs typeface="Arial" pitchFamily="34" charset="-120"/>
+              </a:rPr>
+              <a:t>IS the context window — its "memory”</a:t>
+            </a:r>
           </a:p>
           <a:p>
             <a:pPr marL="342900" indent="-342900">
@@ -4124,17 +3909,6 @@
               <a:buSzPct val="100000"/>
               <a:buChar char="•"/>
             </a:pPr>
-            <a:r>
-              <a:rPr lang="en-US" sz="1600" b="1" dirty="0">
-                <a:solidFill>
-                  <a:srgbClr val="16A34A"/>
-                </a:solidFill>
-                <a:latin typeface="Arial" pitchFamily="34" charset="0"/>
-                <a:ea typeface="Arial" pitchFamily="34" charset="-122"/>
-                <a:cs typeface="Arial" pitchFamily="34" charset="-120"/>
-              </a:rPr>
-              <a:t>session</a:t>
-            </a:r>
             <a:endParaRPr lang="en-US" sz="1600" dirty="0"/>
           </a:p>
           <a:p>
@@ -4157,12 +3931,23 @@
                 <a:ea typeface="Arial" pitchFamily="34" charset="-122"/>
                 <a:cs typeface="Arial" pitchFamily="34" charset="-120"/>
               </a:rPr>
-              <a:t> IS the context window — its "memory"</a:t>
+              <a:t>New session = </a:t>
+            </a:r>
+            <a:r>
+              <a:rPr lang="en-US" sz="1600" b="1" dirty="0">
+                <a:solidFill>
+                  <a:srgbClr val="16A34A"/>
+                </a:solidFill>
+                <a:latin typeface="Arial" pitchFamily="34" charset="0"/>
+                <a:ea typeface="Arial" pitchFamily="34" charset="-122"/>
+                <a:cs typeface="Arial" pitchFamily="34" charset="-120"/>
+              </a:rPr>
+              <a:t>total amnesia</a:t>
             </a:r>
             <a:endParaRPr lang="en-US" sz="1600" dirty="0"/>
           </a:p>
           <a:p>
-            <a:pPr marL="342900" indent="-342900">
+            <a:pPr>
               <a:lnSpc>
                 <a:spcPct val="140000"/>
               </a:lnSpc>
@@ -4170,8 +3955,18 @@
                 <a:spcPts val="800"/>
               </a:spcAft>
               <a:buSzPct val="100000"/>
-              <a:buChar char="•"/>
-            </a:pPr>
+            </a:pPr>
+            <a:r>
+              <a:rPr lang="en-US" sz="1600" b="1" dirty="0">
+                <a:solidFill>
+                  <a:srgbClr val="16A34A"/>
+                </a:solidFill>
+                <a:latin typeface="Courier New" pitchFamily="34" charset="0"/>
+                <a:ea typeface="Courier New" pitchFamily="34" charset="-122"/>
+                <a:cs typeface="Courier New" pitchFamily="34" charset="-120"/>
+              </a:rPr>
+              <a:t>	/compact </a:t>
+            </a:r>
             <a:r>
               <a:rPr lang="en-US" sz="1600" dirty="0">
                 <a:solidFill>
@@ -4181,12 +3976,27 @@
                 <a:ea typeface="Arial" pitchFamily="34" charset="-122"/>
                 <a:cs typeface="Arial" pitchFamily="34" charset="-120"/>
               </a:rPr>
-              <a:t>New session = </a:t>
+              <a:t>—</a:t>
+            </a:r>
+            <a:r>
+              <a:rPr lang="en-US" sz="1600" b="1" dirty="0"/>
+              <a:t> </a:t>
+            </a:r>
+            <a:r>
+              <a:rPr lang="en-US" sz="1600" dirty="0">
+                <a:solidFill>
+                  <a:srgbClr val="1F2937"/>
+                </a:solidFill>
+                <a:latin typeface="Arial" pitchFamily="34" charset="0"/>
+                <a:ea typeface="Arial" pitchFamily="34" charset="-122"/>
+                <a:cs typeface="Arial" pitchFamily="34" charset="-120"/>
+              </a:rPr>
+              <a:t>summarizes long history so it fits</a:t>
             </a:r>
             <a:endParaRPr lang="en-US" sz="1600" dirty="0"/>
           </a:p>
           <a:p>
-            <a:pPr marL="342900" indent="-342900">
+            <a:pPr>
               <a:lnSpc>
                 <a:spcPct val="140000"/>
               </a:lnSpc>
@@ -4194,31 +4004,6 @@
                 <a:spcPts val="800"/>
               </a:spcAft>
               <a:buSzPct val="100000"/>
-              <a:buChar char="•"/>
-            </a:pPr>
-            <a:r>
-              <a:rPr lang="en-US" sz="1600" b="1" dirty="0">
-                <a:solidFill>
-                  <a:srgbClr val="16A34A"/>
-                </a:solidFill>
-                <a:latin typeface="Arial" pitchFamily="34" charset="0"/>
-                <a:ea typeface="Arial" pitchFamily="34" charset="-122"/>
-                <a:cs typeface="Arial" pitchFamily="34" charset="-120"/>
-              </a:rPr>
-              <a:t>total amnesia</a:t>
-            </a:r>
-            <a:endParaRPr lang="en-US" sz="1600" dirty="0"/>
-          </a:p>
-          <a:p>
-            <a:pPr marL="342900" indent="-342900">
-              <a:lnSpc>
-                <a:spcPct val="140000"/>
-              </a:lnSpc>
-              <a:spcAft>
-                <a:spcPts val="800"/>
-              </a:spcAft>
-              <a:buSzPct val="100000"/>
-              <a:buChar char="•"/>
             </a:pPr>
             <a:r>
               <a:rPr lang="en-US" sz="1600" b="1" dirty="0">
@@ -4229,47 +4014,10 @@
                 <a:ea typeface="Courier New" pitchFamily="34" charset="-122"/>
                 <a:cs typeface="Courier New" pitchFamily="34" charset="-120"/>
               </a:rPr>
-              <a:t>/compact</a:t>
-            </a:r>
-            <a:endParaRPr lang="en-US" sz="1600" dirty="0"/>
-          </a:p>
-          <a:p>
-            <a:pPr marL="342900" indent="-342900">
-              <a:lnSpc>
-                <a:spcPct val="140000"/>
-              </a:lnSpc>
-              <a:spcAft>
-                <a:spcPts val="800"/>
-              </a:spcAft>
-              <a:buSzPct val="100000"/>
-              <a:buChar char="•"/>
-            </a:pPr>
-            <a:r>
-              <a:rPr lang="en-US" sz="1600" dirty="0">
-                <a:solidFill>
-                  <a:srgbClr val="1F2937"/>
-                </a:solidFill>
-                <a:latin typeface="Arial" pitchFamily="34" charset="0"/>
-                <a:ea typeface="Arial" pitchFamily="34" charset="-122"/>
-                <a:cs typeface="Arial" pitchFamily="34" charset="-120"/>
-              </a:rPr>
-              <a:t> summarizes long history so it fits</a:t>
-            </a:r>
-            <a:endParaRPr lang="en-US" sz="1600" dirty="0"/>
-          </a:p>
-          <a:p>
-            <a:pPr marL="342900" indent="-342900">
-              <a:lnSpc>
-                <a:spcPct val="140000"/>
-              </a:lnSpc>
-              <a:spcAft>
-                <a:spcPts val="800"/>
-              </a:spcAft>
-              <a:buSzPct val="100000"/>
-              <a:buChar char="•"/>
-            </a:pPr>
-            <a:r>
-              <a:rPr lang="en-US" sz="1600" b="1" dirty="0">
+              <a:t>	</a:t>
+            </a:r>
+            <a:r>
+              <a:rPr lang="en-US" sz="1600" b="1" dirty="0" err="1">
                 <a:solidFill>
                   <a:srgbClr val="16A34A"/>
                 </a:solidFill>
@@ -4279,19 +4027,10 @@
               </a:rPr>
               <a:t>AGENTS.md</a:t>
             </a:r>
-            <a:endParaRPr lang="en-US" sz="1600" dirty="0"/>
-          </a:p>
-          <a:p>
-            <a:pPr marL="342900" indent="-342900">
-              <a:lnSpc>
-                <a:spcPct val="140000"/>
-              </a:lnSpc>
-              <a:spcAft>
-                <a:spcPts val="800"/>
-              </a:spcAft>
-              <a:buSzPct val="100000"/>
-              <a:buChar char="•"/>
-            </a:pPr>
+            <a:r>
+              <a:rPr lang="en-US" sz="1600" b="1" dirty="0"/>
+              <a:t> </a:t>
+            </a:r>
             <a:r>
               <a:rPr lang="en-US" sz="1600" dirty="0">
                 <a:solidFill>
@@ -4301,7 +4040,7 @@
                 <a:ea typeface="Arial" pitchFamily="34" charset="-122"/>
                 <a:cs typeface="Arial" pitchFamily="34" charset="-120"/>
               </a:rPr>
-              <a:t> = the project's persistent memory (read every session)</a:t>
+              <a:t>= the project's persistent memory (read every session)</a:t>
             </a:r>
             <a:endParaRPr lang="en-US" sz="1600" dirty="0"/>
           </a:p>
@@ -4327,7 +4066,7 @@
           </a:prstGeom>
           <a:extLst>
             <a:ext uri="{C572A759-6A51-4108-AA02-DFA0A04FC94B}">
-              <ma14:wrappingTextBoxFlag xmlns:ma14="http://schemas.microsoft.com/office/mac/drawingml/2011/main" val="0"/>
+              <ma14:wrappingTextBoxFlag xmlns="" xmlns:ma14="http://schemas.microsoft.com/office/mac/drawingml/2011/main" val="0"/>
             </a:ext>
           </a:extLst>
         </p:spPr>
@@ -4345,7 +4084,7 @@
           <a:p>
             <a:pPr algn="l"/>
             <a:fld id="{F7021451-1387-4CA6-816F-3879F97B5CBC}" type="slidenum">
-              <a:rPr b="0" lang="en-US"/>
+              <a:rPr lang="en-US" b="0"/>
               <a:t>11</a:t>
             </a:fld>
             <a:endParaRPr lang="en-US"/>
@@ -4398,7 +4137,7 @@
           <a:bodyPr wrap="square" rtlCol="0" anchor="ctr"/>
           <a:lstStyle/>
           <a:p>
-            <a:pPr algn="r" indent="0" marL="0">
+            <a:pPr marL="0" indent="0" algn="r">
               <a:buNone/>
             </a:pPr>
             <a:r>
@@ -4412,9 +4151,6 @@
               </a:rPr>
               <a:t>x</a:t>
             </a:r>
-            <a:pPr algn="r" indent="0" marL="0">
-              <a:buNone/>
-            </a:pPr>
             <a:r>
               <a:rPr lang="en-US" sz="900" b="1" dirty="0">
                 <a:solidFill>
@@ -4426,9 +4162,6 @@
               </a:rPr>
               <a:t>P</a:t>
             </a:r>
-            <a:pPr algn="r" indent="0" marL="0">
-              <a:buNone/>
-            </a:pPr>
             <a:r>
               <a:rPr lang="en-US" sz="900" b="1" dirty="0">
                 <a:solidFill>
@@ -4465,7 +4198,7 @@
           <a:bodyPr wrap="square" rtlCol="0" anchor="ctr"/>
           <a:lstStyle/>
           <a:p>
-            <a:pPr algn="l" indent="0" marL="0">
+            <a:pPr marL="0" indent="0" algn="l">
               <a:buNone/>
             </a:pPr>
             <a:r>
@@ -4502,6 +4235,13 @@
           </a:solidFill>
           <a:ln/>
         </p:spPr>
+        <p:txBody>
+          <a:bodyPr/>
+          <a:lstStyle/>
+          <a:p>
+            <a:endParaRPr lang="en-US"/>
+          </a:p>
+        </p:txBody>
       </p:sp>
       <p:sp>
         <p:nvSpPr>
@@ -4524,21 +4264,7 @@
           <a:bodyPr wrap="square" rtlCol="0" anchor="t"/>
           <a:lstStyle/>
           <a:p>
-            <a:pPr indent="0" marL="0">
-              <a:buNone/>
-            </a:pPr>
-            <a:r>
-              <a:rPr lang="en-US" sz="1400" dirty="0">
-                <a:solidFill>
-                  <a:srgbClr val="1F2937"/>
-                </a:solidFill>
-                <a:latin typeface="Arial" pitchFamily="34" charset="0"/>
-                <a:ea typeface="Arial" pitchFamily="34" charset="-122"/>
-                <a:cs typeface="Arial" pitchFamily="34" charset="-120"/>
-              </a:rPr>
-              <a:t>Open </a:t>
-            </a:r>
-            <a:pPr indent="0" marL="0">
+            <a:pPr marL="0" indent="0">
               <a:buNone/>
             </a:pPr>
             <a:r>
@@ -4552,9 +4278,6 @@
               </a:rPr>
               <a:t>demos/m1-bare</a:t>
             </a:r>
-            <a:pPr indent="0" marL="0">
-              <a:buNone/>
-            </a:pPr>
             <a:r>
               <a:rPr lang="en-US" sz="1400" dirty="0">
                 <a:solidFill>
@@ -4566,9 +4289,6 @@
               </a:rPr>
               <a:t>  →  session  </a:t>
             </a:r>
-            <a:pPr indent="0" marL="0">
-              <a:buNone/>
-            </a:pPr>
             <a:r>
               <a:rPr lang="en-US" sz="1400" b="1" dirty="0">
                 <a:solidFill>
@@ -4610,6 +4330,13 @@
             <a:prstDash val="solid"/>
           </a:ln>
         </p:spPr>
+        <p:txBody>
+          <a:bodyPr/>
+          <a:lstStyle/>
+          <a:p>
+            <a:endParaRPr lang="en-US"/>
+          </a:p>
+        </p:txBody>
       </p:sp>
       <p:sp>
         <p:nvSpPr>
@@ -4632,7 +4359,7 @@
           <a:bodyPr wrap="square" rtlCol="0" anchor="ctr"/>
           <a:lstStyle/>
           <a:p>
-            <a:pPr algn="l" indent="0" marL="0">
+            <a:pPr marL="0" indent="0" algn="l">
               <a:lnSpc>
                 <a:spcPct val="115000"/>
               </a:lnSpc>
@@ -4652,7 +4379,7 @@
             <a:endParaRPr lang="en-US" sz="1300" dirty="0"/>
           </a:p>
           <a:p>
-            <a:pPr algn="l" indent="0" marL="0">
+            <a:pPr marL="0" indent="0" algn="l">
               <a:lnSpc>
                 <a:spcPct val="115000"/>
               </a:lnSpc>
@@ -4681,8 +4408,8 @@
         </p:nvSpPr>
         <p:spPr>
           <a:xfrm>
-            <a:off x="457200" y="3337560"/>
-            <a:ext cx="11274552" cy="2240280"/>
+            <a:off x="457200" y="4166579"/>
+            <a:ext cx="11274552" cy="1091221"/>
           </a:xfrm>
           <a:prstGeom prst="rect">
             <a:avLst/>
@@ -4715,19 +4442,6 @@
               </a:rPr>
               <a:t>Confident, detailed… and </a:t>
             </a:r>
-            <a:endParaRPr lang="en-US" sz="1500" dirty="0"/>
-          </a:p>
-          <a:p>
-            <a:pPr marL="342900" indent="-342900">
-              <a:lnSpc>
-                <a:spcPct val="135000"/>
-              </a:lnSpc>
-              <a:spcAft>
-                <a:spcPts val="800"/>
-              </a:spcAft>
-              <a:buSzPct val="100000"/>
-              <a:buChar char="•"/>
-            </a:pPr>
             <a:r>
               <a:rPr lang="en-US" sz="1500" b="1" dirty="0">
                 <a:solidFill>
@@ -4739,19 +4453,10 @@
               </a:rPr>
               <a:t>100% invented</a:t>
             </a:r>
-            <a:endParaRPr lang="en-US" sz="1500" dirty="0"/>
-          </a:p>
-          <a:p>
-            <a:pPr marL="342900" indent="-342900">
-              <a:lnSpc>
-                <a:spcPct val="135000"/>
-              </a:lnSpc>
-              <a:spcAft>
-                <a:spcPts val="800"/>
-              </a:spcAft>
-              <a:buSzPct val="100000"/>
-              <a:buChar char="•"/>
-            </a:pPr>
+            <a:r>
+              <a:rPr lang="en-US" sz="1500" b="1" dirty="0"/>
+              <a:t> </a:t>
+            </a:r>
             <a:r>
               <a:rPr lang="en-US" sz="1500" dirty="0">
                 <a:solidFill>
@@ -4761,45 +4466,12 @@
                 <a:ea typeface="Arial" pitchFamily="34" charset="-122"/>
                 <a:cs typeface="Arial" pitchFamily="34" charset="-120"/>
               </a:rPr>
-              <a:t> (200 bikes?! the real fleet has 8)</a:t>
-            </a:r>
-            <a:endParaRPr lang="en-US" sz="1500" dirty="0"/>
-          </a:p>
-          <a:p>
-            <a:pPr marL="342900" indent="-342900">
-              <a:lnSpc>
-                <a:spcPct val="135000"/>
-              </a:lnSpc>
-              <a:spcAft>
-                <a:spcPts val="800"/>
-              </a:spcAft>
-              <a:buSzPct val="100000"/>
-              <a:buChar char="•"/>
-            </a:pPr>
-            <a:r>
-              <a:rPr lang="en-US" sz="1500" dirty="0">
-                <a:solidFill>
-                  <a:srgbClr val="1F2937"/>
-                </a:solidFill>
-                <a:latin typeface="Arial" pitchFamily="34" charset="0"/>
-                <a:ea typeface="Arial" pitchFamily="34" charset="-122"/>
-                <a:cs typeface="Arial" pitchFamily="34" charset="-120"/>
-              </a:rPr>
-              <a:t>Ask the room: </a:t>
-            </a:r>
-            <a:endParaRPr lang="en-US" sz="1500" dirty="0"/>
-          </a:p>
-          <a:p>
-            <a:pPr marL="342900" indent="-342900">
-              <a:lnSpc>
-                <a:spcPct val="135000"/>
-              </a:lnSpc>
-              <a:spcAft>
-                <a:spcPts val="800"/>
-              </a:spcAft>
-              <a:buSzPct val="100000"/>
-              <a:buChar char="•"/>
-            </a:pPr>
+              <a:t>(200 bikes?! the real fleet has 8)</a:t>
+            </a:r>
+            <a:r>
+              <a:rPr lang="en-US" sz="1500" dirty="0"/>
+              <a:t> </a:t>
+            </a:r>
             <a:r>
               <a:rPr lang="en-US" sz="1500" b="1" dirty="0">
                 <a:solidFill>
@@ -4836,7 +4508,7 @@
           <a:bodyPr wrap="square" rtlCol="0" anchor="ctr"/>
           <a:lstStyle/>
           <a:p>
-            <a:pPr indent="0" marL="0">
+            <a:pPr marL="0" indent="0">
               <a:buNone/>
             </a:pPr>
             <a:r>
@@ -4850,9 +4522,6 @@
               </a:rPr>
               <a:t>Then YOU:  </a:t>
             </a:r>
-            <a:pPr indent="0" marL="0">
-              <a:buNone/>
-            </a:pPr>
             <a:r>
               <a:rPr lang="en-US" sz="1600" b="1" dirty="0">
                 <a:solidFill>
@@ -4888,7 +4557,7 @@
           </a:prstGeom>
           <a:extLst>
             <a:ext uri="{C572A759-6A51-4108-AA02-DFA0A04FC94B}">
-              <ma14:wrappingTextBoxFlag xmlns:ma14="http://schemas.microsoft.com/office/mac/drawingml/2011/main" val="0"/>
+              <ma14:wrappingTextBoxFlag xmlns="" xmlns:ma14="http://schemas.microsoft.com/office/mac/drawingml/2011/main" val="0"/>
             </a:ext>
           </a:extLst>
         </p:spPr>
@@ -4906,7 +4575,7 @@
           <a:p>
             <a:pPr algn="l"/>
             <a:fld id="{F7021451-1387-4CA6-816F-3879F97B5CBC}" type="slidenum">
-              <a:rPr b="0" lang="en-US"/>
+              <a:rPr lang="en-US" b="0"/>
               <a:t>12</a:t>
             </a:fld>
             <a:endParaRPr lang="en-US"/>
@@ -4959,7 +4628,7 @@
           <a:bodyPr wrap="square" rtlCol="0" anchor="ctr"/>
           <a:lstStyle/>
           <a:p>
-            <a:pPr algn="r" indent="0" marL="0">
+            <a:pPr marL="0" indent="0" algn="r">
               <a:buNone/>
             </a:pPr>
             <a:r>
@@ -4973,9 +4642,6 @@
               </a:rPr>
               <a:t>x</a:t>
             </a:r>
-            <a:pPr algn="r" indent="0" marL="0">
-              <a:buNone/>
-            </a:pPr>
             <a:r>
               <a:rPr lang="en-US" sz="900" b="1" dirty="0">
                 <a:solidFill>
@@ -4987,9 +4653,6 @@
               </a:rPr>
               <a:t>P</a:t>
             </a:r>
-            <a:pPr algn="r" indent="0" marL="0">
-              <a:buNone/>
-            </a:pPr>
             <a:r>
               <a:rPr lang="en-US" sz="900" b="1" dirty="0">
                 <a:solidFill>
@@ -5026,7 +4689,7 @@
           <a:bodyPr wrap="square" rtlCol="0" anchor="ctr"/>
           <a:lstStyle/>
           <a:p>
-            <a:pPr algn="l" indent="0" marL="0">
+            <a:pPr marL="0" indent="0" algn="l">
               <a:buNone/>
             </a:pPr>
             <a:r>
@@ -5063,6 +4726,13 @@
           </a:solidFill>
           <a:ln/>
         </p:spPr>
+        <p:txBody>
+          <a:bodyPr/>
+          <a:lstStyle/>
+          <a:p>
+            <a:endParaRPr lang="en-US"/>
+          </a:p>
+        </p:txBody>
       </p:sp>
       <p:sp>
         <p:nvSpPr>
@@ -5106,6 +4776,80 @@
               </a:rPr>
               <a:t>Grounding:</a:t>
             </a:r>
+            <a:r>
+              <a:rPr lang="en-US" sz="1600" b="1" dirty="0"/>
+              <a:t> </a:t>
+            </a:r>
+            <a:r>
+              <a:rPr lang="en-US" sz="1600" dirty="0">
+                <a:solidFill>
+                  <a:srgbClr val="1F2937"/>
+                </a:solidFill>
+                <a:latin typeface="Arial" pitchFamily="34" charset="0"/>
+                <a:ea typeface="Arial" pitchFamily="34" charset="-122"/>
+                <a:cs typeface="Arial" pitchFamily="34" charset="-120"/>
+              </a:rPr>
+              <a:t>give the model the FACTS — </a:t>
+            </a:r>
+          </a:p>
+          <a:p>
+            <a:pPr>
+              <a:lnSpc>
+                <a:spcPct val="140000"/>
+              </a:lnSpc>
+              <a:spcAft>
+                <a:spcPts val="800"/>
+              </a:spcAft>
+              <a:buSzPct val="100000"/>
+            </a:pPr>
+            <a:r>
+              <a:rPr lang="en-US" sz="1600" dirty="0">
+                <a:solidFill>
+                  <a:srgbClr val="1F2937"/>
+                </a:solidFill>
+                <a:latin typeface="Arial" pitchFamily="34" charset="0"/>
+                <a:ea typeface="Courier New" pitchFamily="34" charset="-122"/>
+                <a:cs typeface="Arial" pitchFamily="34" charset="-120"/>
+              </a:rPr>
+              <a:t>	</a:t>
+            </a:r>
+            <a:r>
+              <a:rPr lang="en-US" sz="1600" dirty="0" err="1">
+                <a:solidFill>
+                  <a:srgbClr val="1F2937"/>
+                </a:solidFill>
+                <a:latin typeface="Courier New" pitchFamily="34" charset="0"/>
+                <a:ea typeface="Courier New" pitchFamily="34" charset="-122"/>
+                <a:cs typeface="Courier New" pitchFamily="34" charset="-120"/>
+              </a:rPr>
+              <a:t>AGENTS.md</a:t>
+            </a:r>
+            <a:r>
+              <a:rPr lang="en-US" sz="1600" dirty="0"/>
+              <a:t> </a:t>
+            </a:r>
+            <a:r>
+              <a:rPr lang="en-US" sz="1600" dirty="0">
+                <a:solidFill>
+                  <a:srgbClr val="1F2937"/>
+                </a:solidFill>
+                <a:latin typeface="Arial" pitchFamily="34" charset="0"/>
+                <a:ea typeface="Arial" pitchFamily="34" charset="-122"/>
+                <a:cs typeface="Arial" pitchFamily="34" charset="-120"/>
+              </a:rPr>
+              <a:t>rule + read tools = the simplest RAG</a:t>
+            </a:r>
+          </a:p>
+          <a:p>
+            <a:pPr>
+              <a:lnSpc>
+                <a:spcPct val="140000"/>
+              </a:lnSpc>
+              <a:spcAft>
+                <a:spcPts val="800"/>
+              </a:spcAft>
+              <a:buSzPct val="100000"/>
+            </a:pPr>
             <a:endParaRPr lang="en-US" sz="1600" dirty="0"/>
           </a:p>
           <a:p>
@@ -5120,6 +4864,21 @@
               <a:buChar char="•"/>
             </a:pPr>
             <a:r>
+              <a:rPr lang="en-US" sz="1600" b="1" dirty="0">
+                <a:solidFill>
+                  <a:srgbClr val="16A34A"/>
+                </a:solidFill>
+                <a:latin typeface="Arial" pitchFamily="34" charset="0"/>
+                <a:ea typeface="Arial" pitchFamily="34" charset="-122"/>
+                <a:cs typeface="Arial" pitchFamily="34" charset="-120"/>
+              </a:rPr>
+              <a:t>Hooks:</a:t>
+            </a:r>
+            <a:r>
+              <a:rPr lang="en-US" sz="1600" b="1" dirty="0"/>
+              <a:t> </a:t>
+            </a:r>
+            <a:r>
               <a:rPr lang="en-US" sz="1600" dirty="0">
                 <a:solidFill>
                   <a:srgbClr val="1F2937"/>
@@ -5128,12 +4887,12 @@
                 <a:ea typeface="Arial" pitchFamily="34" charset="-122"/>
                 <a:cs typeface="Arial" pitchFamily="34" charset="-120"/>
               </a:rPr>
-              <a:t> give the model the FACTS — </a:t>
+              <a:t>middleware that intercepts tool calls BEFORE they run</a:t>
             </a:r>
             <a:endParaRPr lang="en-US" sz="1600" dirty="0"/>
           </a:p>
           <a:p>
-            <a:pPr marL="342900" indent="-342900">
+            <a:pPr>
               <a:lnSpc>
                 <a:spcPct val="140000"/>
               </a:lnSpc>
@@ -5141,128 +4900,18 @@
                 <a:spcPts val="800"/>
               </a:spcAft>
               <a:buSzPct val="100000"/>
-              <a:buChar char="•"/>
             </a:pPr>
             <a:r>
               <a:rPr lang="en-US" sz="1600" dirty="0">
                 <a:solidFill>
                   <a:srgbClr val="1F2937"/>
                 </a:solidFill>
-                <a:latin typeface="Courier New" pitchFamily="34" charset="0"/>
-                <a:ea typeface="Courier New" pitchFamily="34" charset="-122"/>
-                <a:cs typeface="Courier New" pitchFamily="34" charset="-120"/>
-              </a:rPr>
-              <a:t>AGENTS.md</a:t>
-            </a:r>
-            <a:endParaRPr lang="en-US" sz="1600" dirty="0"/>
-          </a:p>
-          <a:p>
-            <a:pPr marL="342900" indent="-342900">
-              <a:lnSpc>
-                <a:spcPct val="140000"/>
-              </a:lnSpc>
-              <a:spcAft>
-                <a:spcPts val="800"/>
-              </a:spcAft>
-              <a:buSzPct val="100000"/>
-              <a:buChar char="•"/>
-            </a:pPr>
-            <a:r>
-              <a:rPr lang="en-US" sz="1600" dirty="0">
-                <a:solidFill>
-                  <a:srgbClr val="1F2937"/>
-                </a:solidFill>
-                <a:latin typeface="Arial" pitchFamily="34" charset="0"/>
-                <a:ea typeface="Arial" pitchFamily="34" charset="-122"/>
-                <a:cs typeface="Arial" pitchFamily="34" charset="-120"/>
-              </a:rPr>
-              <a:t> rule + read tools = the simplest RAG</a:t>
-            </a:r>
-            <a:endParaRPr lang="en-US" sz="1600" dirty="0"/>
-          </a:p>
-          <a:p>
-            <a:pPr marL="342900" indent="-342900">
-              <a:lnSpc>
-                <a:spcPct val="140000"/>
-              </a:lnSpc>
-              <a:spcAft>
-                <a:spcPts val="800"/>
-              </a:spcAft>
-              <a:buSzPct val="100000"/>
-              <a:buChar char="•"/>
-            </a:pPr>
-            <a:r>
-              <a:rPr lang="en-US" sz="1600" b="1" dirty="0">
-                <a:solidFill>
-                  <a:srgbClr val="16A34A"/>
-                </a:solidFill>
-                <a:latin typeface="Arial" pitchFamily="34" charset="0"/>
-                <a:ea typeface="Arial" pitchFamily="34" charset="-122"/>
-                <a:cs typeface="Arial" pitchFamily="34" charset="-120"/>
-              </a:rPr>
-              <a:t>Hooks:</a:t>
-            </a:r>
-            <a:endParaRPr lang="en-US" sz="1600" dirty="0"/>
-          </a:p>
-          <a:p>
-            <a:pPr marL="342900" indent="-342900">
-              <a:lnSpc>
-                <a:spcPct val="140000"/>
-              </a:lnSpc>
-              <a:spcAft>
-                <a:spcPts val="800"/>
-              </a:spcAft>
-              <a:buSzPct val="100000"/>
-              <a:buChar char="•"/>
-            </a:pPr>
-            <a:r>
-              <a:rPr lang="en-US" sz="1600" dirty="0">
-                <a:solidFill>
-                  <a:srgbClr val="1F2937"/>
-                </a:solidFill>
-                <a:latin typeface="Arial" pitchFamily="34" charset="0"/>
-                <a:ea typeface="Arial" pitchFamily="34" charset="-122"/>
-                <a:cs typeface="Arial" pitchFamily="34" charset="-120"/>
-              </a:rPr>
-              <a:t> middleware that intercepts tool calls BEFORE they run</a:t>
-            </a:r>
-            <a:endParaRPr lang="en-US" sz="1600" dirty="0"/>
-          </a:p>
-          <a:p>
-            <a:pPr marL="342900" indent="-342900">
-              <a:lnSpc>
-                <a:spcPct val="140000"/>
-              </a:lnSpc>
-              <a:spcAft>
-                <a:spcPts val="800"/>
-              </a:spcAft>
-              <a:buSzPct val="100000"/>
-              <a:buChar char="•"/>
-            </a:pPr>
-            <a:r>
-              <a:rPr lang="en-US" sz="1600" dirty="0">
-                <a:solidFill>
-                  <a:srgbClr val="1F2937"/>
-                </a:solidFill>
-                <a:latin typeface="Arial" pitchFamily="34" charset="0"/>
-                <a:ea typeface="Arial" pitchFamily="34" charset="-122"/>
-                <a:cs typeface="Arial" pitchFamily="34" charset="-120"/>
-              </a:rPr>
-              <a:t>Our guard </a:t>
-            </a:r>
-            <a:endParaRPr lang="en-US" sz="1600" dirty="0"/>
-          </a:p>
-          <a:p>
-            <a:pPr marL="342900" indent="-342900">
-              <a:lnSpc>
-                <a:spcPct val="140000"/>
-              </a:lnSpc>
-              <a:spcAft>
-                <a:spcPts val="800"/>
-              </a:spcAft>
-              <a:buSzPct val="100000"/>
-              <a:buChar char="•"/>
-            </a:pPr>
+                <a:latin typeface="Arial" pitchFamily="34" charset="0"/>
+                <a:ea typeface="Arial" pitchFamily="34" charset="-122"/>
+                <a:cs typeface="Arial" pitchFamily="34" charset="-120"/>
+              </a:rPr>
+              <a:t>	Our guard </a:t>
+            </a:r>
             <a:r>
               <a:rPr lang="en-US" sz="1600" b="1" dirty="0">
                 <a:solidFill>
@@ -5298,7 +4947,7 @@
           </a:prstGeom>
           <a:extLst>
             <a:ext uri="{C572A759-6A51-4108-AA02-DFA0A04FC94B}">
-              <ma14:wrappingTextBoxFlag xmlns:ma14="http://schemas.microsoft.com/office/mac/drawingml/2011/main" val="0"/>
+              <ma14:wrappingTextBoxFlag xmlns="" xmlns:ma14="http://schemas.microsoft.com/office/mac/drawingml/2011/main" val="0"/>
             </a:ext>
           </a:extLst>
         </p:spPr>
@@ -5316,7 +4965,7 @@
           <a:p>
             <a:pPr algn="l"/>
             <a:fld id="{F7021451-1387-4CA6-816F-3879F97B5CBC}" type="slidenum">
-              <a:rPr b="0" lang="en-US"/>
+              <a:rPr lang="en-US" b="0"/>
               <a:t>13</a:t>
             </a:fld>
             <a:endParaRPr lang="en-US"/>
@@ -5369,7 +5018,7 @@
           <a:bodyPr wrap="square" rtlCol="0" anchor="ctr"/>
           <a:lstStyle/>
           <a:p>
-            <a:pPr algn="r" indent="0" marL="0">
+            <a:pPr marL="0" indent="0" algn="r">
               <a:buNone/>
             </a:pPr>
             <a:r>
@@ -5383,9 +5032,6 @@
               </a:rPr>
               <a:t>x</a:t>
             </a:r>
-            <a:pPr algn="r" indent="0" marL="0">
-              <a:buNone/>
-            </a:pPr>
             <a:r>
               <a:rPr lang="en-US" sz="900" b="1" dirty="0">
                 <a:solidFill>
@@ -5397,9 +5043,6 @@
               </a:rPr>
               <a:t>P</a:t>
             </a:r>
-            <a:pPr algn="r" indent="0" marL="0">
-              <a:buNone/>
-            </a:pPr>
             <a:r>
               <a:rPr lang="en-US" sz="900" b="1" dirty="0">
                 <a:solidFill>
@@ -5436,7 +5079,7 @@
           <a:bodyPr wrap="square" rtlCol="0" anchor="ctr"/>
           <a:lstStyle/>
           <a:p>
-            <a:pPr algn="l" indent="0" marL="0">
+            <a:pPr marL="0" indent="0" algn="l">
               <a:buNone/>
             </a:pPr>
             <a:r>
@@ -5473,6 +5116,13 @@
           </a:solidFill>
           <a:ln/>
         </p:spPr>
+        <p:txBody>
+          <a:bodyPr/>
+          <a:lstStyle/>
+          <a:p>
+            <a:endParaRPr lang="en-US"/>
+          </a:p>
+        </p:txBody>
       </p:sp>
       <p:sp>
         <p:nvSpPr>
@@ -5495,21 +5145,7 @@
           <a:bodyPr wrap="square" rtlCol="0" anchor="t"/>
           <a:lstStyle/>
           <a:p>
-            <a:pPr indent="0" marL="0">
-              <a:buNone/>
-            </a:pPr>
-            <a:r>
-              <a:rPr lang="en-US" sz="1400" dirty="0">
-                <a:solidFill>
-                  <a:srgbClr val="1F2937"/>
-                </a:solidFill>
-                <a:latin typeface="Arial" pitchFamily="34" charset="0"/>
-                <a:ea typeface="Arial" pitchFamily="34" charset="-122"/>
-                <a:cs typeface="Arial" pitchFamily="34" charset="-120"/>
-              </a:rPr>
-              <a:t>Open </a:t>
-            </a:r>
-            <a:pPr indent="0" marL="0">
+            <a:pPr marL="0" indent="0">
               <a:buNone/>
             </a:pPr>
             <a:r>
@@ -5523,9 +5159,6 @@
               </a:rPr>
               <a:t>demos/m2-grounded</a:t>
             </a:r>
-            <a:pPr indent="0" marL="0">
-              <a:buNone/>
-            </a:pPr>
             <a:r>
               <a:rPr lang="en-US" sz="1400" dirty="0">
                 <a:solidFill>
@@ -5537,9 +5170,6 @@
               </a:rPr>
               <a:t>  →  session  </a:t>
             </a:r>
-            <a:pPr indent="0" marL="0">
-              <a:buNone/>
-            </a:pPr>
             <a:r>
               <a:rPr lang="en-US" sz="1400" b="1" dirty="0">
                 <a:solidFill>
@@ -5576,7 +5206,7 @@
           <a:bodyPr wrap="square" rtlCol="0" anchor="t"/>
           <a:lstStyle/>
           <a:p>
-            <a:pPr marL="342900" indent="-342900">
+            <a:pPr>
               <a:lnSpc>
                 <a:spcPct val="135000"/>
               </a:lnSpc>
@@ -5584,7 +5214,6 @@
                 <a:spcPts val="800"/>
               </a:spcAft>
               <a:buSzPct val="100000"/>
-              <a:buChar char="•"/>
             </a:pPr>
             <a:r>
               <a:rPr lang="en-US" sz="1500" dirty="0">
@@ -5597,10 +5226,47 @@
               </a:rPr>
               <a:t>The SAME prompt as M1 → </a:t>
             </a:r>
+            <a:r>
+              <a:rPr lang="en-US" sz="1500" dirty="0" err="1">
+                <a:solidFill>
+                  <a:srgbClr val="1F2937"/>
+                </a:solidFill>
+                <a:latin typeface="Courier New" pitchFamily="34" charset="0"/>
+                <a:ea typeface="Courier New" pitchFamily="34" charset="-122"/>
+                <a:cs typeface="Courier New" pitchFamily="34" charset="-120"/>
+              </a:rPr>
+              <a:t>fleet_get_fleet_status</a:t>
+            </a:r>
+            <a:r>
+              <a:rPr lang="en-US" sz="1500" dirty="0"/>
+              <a:t> </a:t>
+            </a:r>
+            <a:r>
+              <a:rPr lang="en-US" sz="1500" dirty="0">
+                <a:solidFill>
+                  <a:srgbClr val="1F2937"/>
+                </a:solidFill>
+                <a:latin typeface="Arial" pitchFamily="34" charset="0"/>
+                <a:ea typeface="Arial" pitchFamily="34" charset="-122"/>
+                <a:cs typeface="Arial" pitchFamily="34" charset="-120"/>
+              </a:rPr>
+              <a:t>→ </a:t>
+            </a:r>
+            <a:r>
+              <a:rPr lang="en-US" sz="1500" b="1" dirty="0">
+                <a:solidFill>
+                  <a:srgbClr val="16A34A"/>
+                </a:solidFill>
+                <a:latin typeface="Arial" pitchFamily="34" charset="0"/>
+                <a:ea typeface="Arial" pitchFamily="34" charset="-122"/>
+                <a:cs typeface="Arial" pitchFamily="34" charset="-120"/>
+              </a:rPr>
+              <a:t>real data: 8 bikes · #3, #7 broken · #5 maintenance</a:t>
+            </a:r>
             <a:endParaRPr lang="en-US" sz="1500" dirty="0"/>
           </a:p>
           <a:p>
-            <a:pPr marL="342900" indent="-342900">
+            <a:pPr>
               <a:lnSpc>
                 <a:spcPct val="135000"/>
               </a:lnSpc>
@@ -5608,23 +5274,18 @@
                 <a:spcPts val="800"/>
               </a:spcAft>
               <a:buSzPct val="100000"/>
-              <a:buChar char="•"/>
-            </a:pPr>
-            <a:r>
-              <a:rPr lang="en-US" sz="1500" dirty="0">
-                <a:solidFill>
-                  <a:srgbClr val="1F2937"/>
-                </a:solidFill>
-                <a:latin typeface="Courier New" pitchFamily="34" charset="0"/>
-                <a:ea typeface="Courier New" pitchFamily="34" charset="-122"/>
-                <a:cs typeface="Courier New" pitchFamily="34" charset="-120"/>
-              </a:rPr>
-              <a:t>fleet_get_fleet_status</a:t>
-            </a:r>
-            <a:endParaRPr lang="en-US" sz="1500" dirty="0"/>
-          </a:p>
-          <a:p>
-            <a:pPr marL="342900" indent="-342900">
+            </a:pPr>
+            <a:endParaRPr lang="en-US" sz="1500" dirty="0">
+              <a:solidFill>
+                <a:srgbClr val="1F2937"/>
+              </a:solidFill>
+              <a:latin typeface="Arial" pitchFamily="34" charset="0"/>
+              <a:ea typeface="Arial" pitchFamily="34" charset="-122"/>
+              <a:cs typeface="Arial" pitchFamily="34" charset="-120"/>
+            </a:endParaRPr>
+          </a:p>
+          <a:p>
+            <a:pPr>
               <a:lnSpc>
                 <a:spcPct val="135000"/>
               </a:lnSpc>
@@ -5632,7 +5293,6 @@
                 <a:spcPts val="800"/>
               </a:spcAft>
               <a:buSzPct val="100000"/>
-              <a:buChar char="•"/>
             </a:pPr>
             <a:r>
               <a:rPr lang="en-US" sz="1500" dirty="0">
@@ -5643,12 +5303,23 @@
                 <a:ea typeface="Arial" pitchFamily="34" charset="-122"/>
                 <a:cs typeface="Arial" pitchFamily="34" charset="-120"/>
               </a:rPr>
-              <a:t> → </a:t>
+              <a:t>Same prompt, different output — </a:t>
+            </a:r>
+            <a:r>
+              <a:rPr lang="en-US" sz="1500" b="1" dirty="0">
+                <a:solidFill>
+                  <a:srgbClr val="111827"/>
+                </a:solidFill>
+                <a:latin typeface="Arial" pitchFamily="34" charset="0"/>
+                <a:ea typeface="Arial" pitchFamily="34" charset="-122"/>
+                <a:cs typeface="Arial" pitchFamily="34" charset="-120"/>
+              </a:rPr>
+              <a:t>grounding, not a smarter model</a:t>
             </a:r>
             <a:endParaRPr lang="en-US" sz="1500" dirty="0"/>
           </a:p>
           <a:p>
-            <a:pPr marL="342900" indent="-342900">
+            <a:pPr>
               <a:lnSpc>
                 <a:spcPct val="135000"/>
               </a:lnSpc>
@@ -5656,23 +5327,18 @@
                 <a:spcPts val="800"/>
               </a:spcAft>
               <a:buSzPct val="100000"/>
-              <a:buChar char="•"/>
-            </a:pPr>
-            <a:r>
-              <a:rPr lang="en-US" sz="1500" b="1" dirty="0">
-                <a:solidFill>
-                  <a:srgbClr val="16A34A"/>
-                </a:solidFill>
-                <a:latin typeface="Arial" pitchFamily="34" charset="0"/>
-                <a:ea typeface="Arial" pitchFamily="34" charset="-122"/>
-                <a:cs typeface="Arial" pitchFamily="34" charset="-120"/>
-              </a:rPr>
-              <a:t>real data: 8 bikes · #3, #7 broken · #5 maintenance</a:t>
-            </a:r>
-            <a:endParaRPr lang="en-US" sz="1500" dirty="0"/>
-          </a:p>
-          <a:p>
-            <a:pPr marL="342900" indent="-342900">
+            </a:pPr>
+            <a:endParaRPr lang="en-US" sz="1500" b="1" dirty="0">
+              <a:solidFill>
+                <a:srgbClr val="111827"/>
+              </a:solidFill>
+              <a:latin typeface="Arial" pitchFamily="34" charset="0"/>
+              <a:ea typeface="Arial" pitchFamily="34" charset="-122"/>
+              <a:cs typeface="Arial" pitchFamily="34" charset="-120"/>
+            </a:endParaRPr>
+          </a:p>
+          <a:p>
+            <a:pPr>
               <a:lnSpc>
                 <a:spcPct val="135000"/>
               </a:lnSpc>
@@ -5680,23 +5346,22 @@
                 <a:spcPts val="800"/>
               </a:spcAft>
               <a:buSzPct val="100000"/>
-              <a:buChar char="•"/>
-            </a:pPr>
-            <a:r>
-              <a:rPr lang="en-US" sz="1500" dirty="0">
-                <a:solidFill>
-                  <a:srgbClr val="1F2937"/>
-                </a:solidFill>
-                <a:latin typeface="Arial" pitchFamily="34" charset="0"/>
-                <a:ea typeface="Arial" pitchFamily="34" charset="-122"/>
-                <a:cs typeface="Arial" pitchFamily="34" charset="-120"/>
-              </a:rPr>
-              <a:t>Same prompt, different output — </a:t>
+            </a:pPr>
+            <a:r>
+              <a:rPr lang="en-US" sz="1500" b="1" dirty="0">
+                <a:solidFill>
+                  <a:srgbClr val="111827"/>
+                </a:solidFill>
+                <a:latin typeface="Arial" pitchFamily="34" charset="0"/>
+                <a:ea typeface="Arial" pitchFamily="34" charset="-122"/>
+                <a:cs typeface="Arial" pitchFamily="34" charset="-120"/>
+              </a:rPr>
+              <a:t>	LIVE: </a:t>
             </a:r>
             <a:endParaRPr lang="en-US" sz="1500" dirty="0"/>
           </a:p>
           <a:p>
-            <a:pPr marL="342900" indent="-342900">
+            <a:pPr>
               <a:lnSpc>
                 <a:spcPct val="135000"/>
               </a:lnSpc>
@@ -5704,55 +5369,6 @@
                 <a:spcPts val="800"/>
               </a:spcAft>
               <a:buSzPct val="100000"/>
-              <a:buChar char="•"/>
-            </a:pPr>
-            <a:r>
-              <a:rPr lang="en-US" sz="1500" b="1" dirty="0">
-                <a:solidFill>
-                  <a:srgbClr val="111827"/>
-                </a:solidFill>
-                <a:latin typeface="Arial" pitchFamily="34" charset="0"/>
-                <a:ea typeface="Arial" pitchFamily="34" charset="-122"/>
-                <a:cs typeface="Arial" pitchFamily="34" charset="-120"/>
-              </a:rPr>
-              <a:t>grounding, not a smarter model</a:t>
-            </a:r>
-            <a:endParaRPr lang="en-US" sz="1500" dirty="0"/>
-          </a:p>
-          <a:p>
-            <a:pPr marL="342900" indent="-342900">
-              <a:lnSpc>
-                <a:spcPct val="135000"/>
-              </a:lnSpc>
-              <a:spcAft>
-                <a:spcPts val="800"/>
-              </a:spcAft>
-              <a:buSzPct val="100000"/>
-              <a:buChar char="•"/>
-            </a:pPr>
-            <a:r>
-              <a:rPr lang="en-US" sz="1500" b="1" dirty="0">
-                <a:solidFill>
-                  <a:srgbClr val="111827"/>
-                </a:solidFill>
-                <a:latin typeface="Arial" pitchFamily="34" charset="0"/>
-                <a:ea typeface="Arial" pitchFamily="34" charset="-122"/>
-                <a:cs typeface="Arial" pitchFamily="34" charset="-120"/>
-              </a:rPr>
-              <a:t>LIVE: </a:t>
-            </a:r>
-            <a:endParaRPr lang="en-US" sz="1500" dirty="0"/>
-          </a:p>
-          <a:p>
-            <a:pPr marL="342900" indent="-342900">
-              <a:lnSpc>
-                <a:spcPct val="135000"/>
-              </a:lnSpc>
-              <a:spcAft>
-                <a:spcPts val="800"/>
-              </a:spcAft>
-              <a:buSzPct val="100000"/>
-              <a:buChar char="•"/>
             </a:pPr>
             <a:r>
               <a:rPr lang="en-US" sz="1500" dirty="0">
@@ -5763,21 +5379,12 @@
                 <a:ea typeface="Courier New" pitchFamily="34" charset="-122"/>
                 <a:cs typeface="Courier New" pitchFamily="34" charset="-120"/>
               </a:rPr>
-              <a:t>run rm -rf /tmp/whatever</a:t>
-            </a:r>
-            <a:endParaRPr lang="en-US" sz="1500" dirty="0"/>
-          </a:p>
-          <a:p>
-            <a:pPr marL="342900" indent="-342900">
-              <a:lnSpc>
-                <a:spcPct val="135000"/>
-              </a:lnSpc>
-              <a:spcAft>
-                <a:spcPts val="800"/>
-              </a:spcAft>
-              <a:buSzPct val="100000"/>
-              <a:buChar char="•"/>
-            </a:pPr>
+              <a:t>		run rm -rf /tmp/whatever</a:t>
+            </a:r>
+            <a:r>
+              <a:rPr lang="en-US" sz="1500" dirty="0"/>
+              <a:t> </a:t>
+            </a:r>
             <a:r>
               <a:rPr lang="en-US" sz="1500" dirty="0">
                 <a:solidFill>
@@ -5787,21 +5394,8 @@
                 <a:ea typeface="Arial" pitchFamily="34" charset="-122"/>
                 <a:cs typeface="Arial" pitchFamily="34" charset="-120"/>
               </a:rPr>
-              <a:t> → the guard </a:t>
-            </a:r>
-            <a:endParaRPr lang="en-US" sz="1500" dirty="0"/>
-          </a:p>
-          <a:p>
-            <a:pPr marL="342900" indent="-342900">
-              <a:lnSpc>
-                <a:spcPct val="135000"/>
-              </a:lnSpc>
-              <a:spcAft>
-                <a:spcPts val="800"/>
-              </a:spcAft>
-              <a:buSzPct val="100000"/>
-              <a:buChar char="•"/>
-            </a:pPr>
+              <a:t>→ the guard </a:t>
+            </a:r>
             <a:r>
               <a:rPr lang="en-US" sz="1500" b="1" dirty="0">
                 <a:solidFill>
@@ -5813,19 +5407,10 @@
               </a:rPr>
               <a:t>blocks it</a:t>
             </a:r>
-            <a:endParaRPr lang="en-US" sz="1500" dirty="0"/>
-          </a:p>
-          <a:p>
-            <a:pPr marL="342900" indent="-342900">
-              <a:lnSpc>
-                <a:spcPct val="135000"/>
-              </a:lnSpc>
-              <a:spcAft>
-                <a:spcPts val="800"/>
-              </a:spcAft>
-              <a:buSzPct val="100000"/>
-              <a:buChar char="•"/>
-            </a:pPr>
+            <a:r>
+              <a:rPr lang="en-US" sz="1500" b="1" dirty="0"/>
+              <a:t> </a:t>
+            </a:r>
             <a:r>
               <a:rPr lang="en-US" sz="1500" dirty="0">
                 <a:solidFill>
@@ -5862,7 +5447,7 @@
           <a:bodyPr wrap="square" rtlCol="0" anchor="ctr"/>
           <a:lstStyle/>
           <a:p>
-            <a:pPr indent="0" marL="0">
+            <a:pPr marL="0" indent="0">
               <a:buNone/>
             </a:pPr>
             <a:r>
@@ -5876,9 +5461,6 @@
               </a:rPr>
               <a:t>Then YOU:  </a:t>
             </a:r>
-            <a:pPr indent="0" marL="0">
-              <a:buNone/>
-            </a:pPr>
             <a:r>
               <a:rPr lang="en-US" sz="1600" b="1" dirty="0">
                 <a:solidFill>
@@ -5914,7 +5496,7 @@
           </a:prstGeom>
           <a:extLst>
             <a:ext uri="{C572A759-6A51-4108-AA02-DFA0A04FC94B}">
-              <ma14:wrappingTextBoxFlag xmlns:ma14="http://schemas.microsoft.com/office/mac/drawingml/2011/main" val="0"/>
+              <ma14:wrappingTextBoxFlag xmlns="" xmlns:ma14="http://schemas.microsoft.com/office/mac/drawingml/2011/main" val="0"/>
             </a:ext>
           </a:extLst>
         </p:spPr>
@@ -5932,7 +5514,7 @@
           <a:p>
             <a:pPr algn="l"/>
             <a:fld id="{F7021451-1387-4CA6-816F-3879F97B5CBC}" type="slidenum">
-              <a:rPr b="0" lang="en-US"/>
+              <a:rPr lang="en-US" b="0"/>
               <a:t>14</a:t>
             </a:fld>
             <a:endParaRPr lang="en-US"/>
@@ -5985,7 +5567,7 @@
           <a:bodyPr wrap="square" rtlCol="0" anchor="ctr"/>
           <a:lstStyle/>
           <a:p>
-            <a:pPr algn="r" indent="0" marL="0">
+            <a:pPr marL="0" indent="0" algn="r">
               <a:buNone/>
             </a:pPr>
             <a:r>
@@ -5999,9 +5581,6 @@
               </a:rPr>
               <a:t>x</a:t>
             </a:r>
-            <a:pPr algn="r" indent="0" marL="0">
-              <a:buNone/>
-            </a:pPr>
             <a:r>
               <a:rPr lang="en-US" sz="900" b="1" dirty="0">
                 <a:solidFill>
@@ -6013,9 +5592,6 @@
               </a:rPr>
               <a:t>P</a:t>
             </a:r>
-            <a:pPr algn="r" indent="0" marL="0">
-              <a:buNone/>
-            </a:pPr>
             <a:r>
               <a:rPr lang="en-US" sz="900" b="1" dirty="0">
                 <a:solidFill>
@@ -6052,7 +5628,7 @@
           <a:bodyPr wrap="square" rtlCol="0" anchor="ctr"/>
           <a:lstStyle/>
           <a:p>
-            <a:pPr algn="l" indent="0" marL="0">
+            <a:pPr marL="0" indent="0" algn="l">
               <a:buNone/>
             </a:pPr>
             <a:r>
@@ -6089,6 +5665,13 @@
           </a:solidFill>
           <a:ln/>
         </p:spPr>
+        <p:txBody>
+          <a:bodyPr/>
+          <a:lstStyle/>
+          <a:p>
+            <a:endParaRPr lang="en-US"/>
+          </a:p>
+        </p:txBody>
       </p:sp>
       <p:sp>
         <p:nvSpPr>
@@ -6132,7 +5715,32 @@
               </a:rPr>
               <a:t>A </a:t>
             </a:r>
-            <a:endParaRPr lang="en-US" sz="1600" dirty="0"/>
+            <a:r>
+              <a:rPr lang="en-US" sz="1600" b="1" dirty="0">
+                <a:solidFill>
+                  <a:srgbClr val="16A34A"/>
+                </a:solidFill>
+                <a:latin typeface="Arial" pitchFamily="34" charset="0"/>
+                <a:ea typeface="Arial" pitchFamily="34" charset="-122"/>
+                <a:cs typeface="Arial" pitchFamily="34" charset="-120"/>
+              </a:rPr>
+              <a:t>tool</a:t>
+            </a:r>
+            <a:r>
+              <a:rPr lang="en-US" sz="1600" b="1" dirty="0"/>
+              <a:t> </a:t>
+            </a:r>
+            <a:r>
+              <a:rPr lang="en-US" sz="1600" dirty="0">
+                <a:solidFill>
+                  <a:srgbClr val="1F2937"/>
+                </a:solidFill>
+                <a:latin typeface="Arial" pitchFamily="34" charset="0"/>
+                <a:ea typeface="Arial" pitchFamily="34" charset="-122"/>
+                <a:cs typeface="Arial" pitchFamily="34" charset="-120"/>
+              </a:rPr>
+              <a:t>= YOUR function, described to the model (name + Zod schema = the contract)</a:t>
+            </a:r>
           </a:p>
           <a:p>
             <a:pPr marL="342900" indent="-342900">
@@ -6145,17 +5753,6 @@
               <a:buSzPct val="100000"/>
               <a:buChar char="•"/>
             </a:pPr>
-            <a:r>
-              <a:rPr lang="en-US" sz="1600" b="1" dirty="0">
-                <a:solidFill>
-                  <a:srgbClr val="16A34A"/>
-                </a:solidFill>
-                <a:latin typeface="Arial" pitchFamily="34" charset="0"/>
-                <a:ea typeface="Arial" pitchFamily="34" charset="-122"/>
-                <a:cs typeface="Arial" pitchFamily="34" charset="-120"/>
-              </a:rPr>
-              <a:t>tool</a:t>
-            </a:r>
             <a:endParaRPr lang="en-US" sz="1600" dirty="0"/>
           </a:p>
           <a:p>
@@ -6178,8 +5775,90 @@
                 <a:ea typeface="Arial" pitchFamily="34" charset="-122"/>
                 <a:cs typeface="Arial" pitchFamily="34" charset="-120"/>
               </a:rPr>
-              <a:t> = YOUR function, described to the model (name + Zod schema = the contract)</a:t>
-            </a:r>
+              <a:t>The model </a:t>
+            </a:r>
+            <a:r>
+              <a:rPr lang="en-US" sz="1600" b="1" dirty="0">
+                <a:solidFill>
+                  <a:srgbClr val="16A34A"/>
+                </a:solidFill>
+                <a:latin typeface="Arial" pitchFamily="34" charset="0"/>
+                <a:ea typeface="Arial" pitchFamily="34" charset="-122"/>
+                <a:cs typeface="Arial" pitchFamily="34" charset="-120"/>
+              </a:rPr>
+              <a:t>PROPOSES</a:t>
+            </a:r>
+            <a:r>
+              <a:rPr lang="en-US" sz="1600" b="1" dirty="0"/>
+              <a:t> </a:t>
+            </a:r>
+            <a:r>
+              <a:rPr lang="en-US" sz="1600" dirty="0">
+                <a:solidFill>
+                  <a:srgbClr val="1F2937"/>
+                </a:solidFill>
+                <a:latin typeface="Arial" pitchFamily="34" charset="0"/>
+                <a:ea typeface="Arial" pitchFamily="34" charset="-122"/>
+                <a:cs typeface="Arial" pitchFamily="34" charset="-120"/>
+              </a:rPr>
+              <a:t>the call: </a:t>
+            </a:r>
+            <a:endParaRPr lang="en-US" sz="1600" dirty="0"/>
+          </a:p>
+          <a:p>
+            <a:pPr>
+              <a:lnSpc>
+                <a:spcPct val="140000"/>
+              </a:lnSpc>
+              <a:spcAft>
+                <a:spcPts val="800"/>
+              </a:spcAft>
+              <a:buSzPct val="100000"/>
+            </a:pPr>
+            <a:r>
+              <a:rPr lang="en-US" sz="1600" dirty="0">
+                <a:solidFill>
+                  <a:srgbClr val="1F2937"/>
+                </a:solidFill>
+                <a:latin typeface="Courier New" pitchFamily="34" charset="0"/>
+                <a:ea typeface="Courier New" pitchFamily="34" charset="-122"/>
+                <a:cs typeface="Courier New" pitchFamily="34" charset="-120"/>
+              </a:rPr>
+              <a:t>	</a:t>
+            </a:r>
+            <a:r>
+              <a:rPr lang="en-US" sz="1600" dirty="0" err="1">
+                <a:solidFill>
+                  <a:srgbClr val="1F2937"/>
+                </a:solidFill>
+                <a:latin typeface="Courier New" pitchFamily="34" charset="0"/>
+                <a:ea typeface="Courier New" pitchFamily="34" charset="-122"/>
+                <a:cs typeface="Courier New" pitchFamily="34" charset="-120"/>
+              </a:rPr>
+              <a:t>fleet_mark_bike_fixed</a:t>
+            </a:r>
+            <a:r>
+              <a:rPr lang="en-US" sz="1600" dirty="0">
+                <a:solidFill>
+                  <a:srgbClr val="1F2937"/>
+                </a:solidFill>
+                <a:latin typeface="Courier New" pitchFamily="34" charset="0"/>
+                <a:ea typeface="Courier New" pitchFamily="34" charset="-122"/>
+                <a:cs typeface="Courier New" pitchFamily="34" charset="-120"/>
+              </a:rPr>
+              <a:t> {"bike_id": 3}</a:t>
+            </a:r>
+          </a:p>
+          <a:p>
+            <a:pPr>
+              <a:lnSpc>
+                <a:spcPct val="140000"/>
+              </a:lnSpc>
+              <a:spcAft>
+                <a:spcPts val="800"/>
+              </a:spcAft>
+              <a:buSzPct val="100000"/>
+            </a:pPr>
             <a:endParaRPr lang="en-US" sz="1600" dirty="0"/>
           </a:p>
           <a:p>
@@ -6202,9 +5881,75 @@
                 <a:ea typeface="Arial" pitchFamily="34" charset="-122"/>
                 <a:cs typeface="Arial" pitchFamily="34" charset="-120"/>
               </a:rPr>
-              <a:t>The model </a:t>
-            </a:r>
-            <a:endParaRPr lang="en-US" sz="1600" dirty="0"/>
+              <a:t>YOUR code </a:t>
+            </a:r>
+            <a:r>
+              <a:rPr lang="en-US" sz="1600" b="1" dirty="0">
+                <a:solidFill>
+                  <a:srgbClr val="16A34A"/>
+                </a:solidFill>
+                <a:latin typeface="Arial" pitchFamily="34" charset="0"/>
+                <a:ea typeface="Arial" pitchFamily="34" charset="-122"/>
+                <a:cs typeface="Arial" pitchFamily="34" charset="-120"/>
+              </a:rPr>
+              <a:t>executes</a:t>
+            </a:r>
+            <a:r>
+              <a:rPr lang="en-US" sz="1600" b="1" dirty="0"/>
+              <a:t> </a:t>
+            </a:r>
+            <a:r>
+              <a:rPr lang="en-US" sz="1600" dirty="0">
+                <a:solidFill>
+                  <a:srgbClr val="1F2937"/>
+                </a:solidFill>
+                <a:latin typeface="Arial" pitchFamily="34" charset="0"/>
+                <a:ea typeface="Arial" pitchFamily="34" charset="-122"/>
+                <a:cs typeface="Arial" pitchFamily="34" charset="-120"/>
+              </a:rPr>
+              <a:t>it — a real </a:t>
+            </a:r>
+            <a:r>
+              <a:rPr lang="en-US" sz="1600" dirty="0">
+                <a:solidFill>
+                  <a:srgbClr val="1F2937"/>
+                </a:solidFill>
+                <a:latin typeface="Courier New" pitchFamily="34" charset="0"/>
+                <a:ea typeface="Courier New" pitchFamily="34" charset="-122"/>
+                <a:cs typeface="Courier New" pitchFamily="34" charset="-120"/>
+              </a:rPr>
+              <a:t>UPDATE</a:t>
+            </a:r>
+            <a:r>
+              <a:rPr lang="en-US" sz="1600" dirty="0">
+                <a:solidFill>
+                  <a:srgbClr val="1F2937"/>
+                </a:solidFill>
+                <a:latin typeface="Arial" pitchFamily="34" charset="0"/>
+                <a:ea typeface="Arial" pitchFamily="34" charset="-122"/>
+                <a:cs typeface="Arial" pitchFamily="34" charset="-120"/>
+              </a:rPr>
+              <a:t> via </a:t>
+            </a:r>
+            <a:r>
+              <a:rPr lang="en-US" sz="1600" dirty="0" err="1">
+                <a:solidFill>
+                  <a:srgbClr val="1F2937"/>
+                </a:solidFill>
+                <a:latin typeface="Courier New" pitchFamily="34" charset="0"/>
+                <a:ea typeface="Courier New" pitchFamily="34" charset="-122"/>
+                <a:cs typeface="Courier New" pitchFamily="34" charset="-120"/>
+              </a:rPr>
+              <a:t>sqlite</a:t>
+            </a:r>
+            <a:endParaRPr lang="en-US" sz="1600" dirty="0">
+              <a:solidFill>
+                <a:srgbClr val="1F2937"/>
+              </a:solidFill>
+              <a:latin typeface="Courier New" pitchFamily="34" charset="0"/>
+              <a:ea typeface="Courier New" pitchFamily="34" charset="-122"/>
+              <a:cs typeface="Courier New" pitchFamily="34" charset="-120"/>
+            </a:endParaRPr>
           </a:p>
           <a:p>
             <a:pPr marL="342900" indent="-342900">
@@ -6217,18 +5962,14 @@
               <a:buSzPct val="100000"/>
               <a:buChar char="•"/>
             </a:pPr>
-            <a:r>
-              <a:rPr lang="en-US" sz="1600" b="1" dirty="0">
-                <a:solidFill>
-                  <a:srgbClr val="16A34A"/>
-                </a:solidFill>
-                <a:latin typeface="Arial" pitchFamily="34" charset="0"/>
-                <a:ea typeface="Arial" pitchFamily="34" charset="-122"/>
-                <a:cs typeface="Arial" pitchFamily="34" charset="-120"/>
-              </a:rPr>
-              <a:t>PROPOSES</a:t>
-            </a:r>
-            <a:endParaRPr lang="en-US" sz="1600" dirty="0"/>
+            <a:endParaRPr lang="en-US" sz="1600" b="1" dirty="0">
+              <a:solidFill>
+                <a:srgbClr val="1F2937"/>
+              </a:solidFill>
+              <a:latin typeface="Courier New" pitchFamily="34" charset="0"/>
+              <a:ea typeface="Arial" pitchFamily="34" charset="-122"/>
+              <a:cs typeface="Courier New" pitchFamily="34" charset="-120"/>
+            </a:endParaRPr>
           </a:p>
           <a:p>
             <a:pPr marL="342900" indent="-342900">
@@ -6242,191 +5983,6 @@
               <a:buChar char="•"/>
             </a:pPr>
             <a:r>
-              <a:rPr lang="en-US" sz="1600" dirty="0">
-                <a:solidFill>
-                  <a:srgbClr val="1F2937"/>
-                </a:solidFill>
-                <a:latin typeface="Arial" pitchFamily="34" charset="0"/>
-                <a:ea typeface="Arial" pitchFamily="34" charset="-122"/>
-                <a:cs typeface="Arial" pitchFamily="34" charset="-120"/>
-              </a:rPr>
-              <a:t> the call: </a:t>
-            </a:r>
-            <a:endParaRPr lang="en-US" sz="1600" dirty="0"/>
-          </a:p>
-          <a:p>
-            <a:pPr marL="342900" indent="-342900">
-              <a:lnSpc>
-                <a:spcPct val="140000"/>
-              </a:lnSpc>
-              <a:spcAft>
-                <a:spcPts val="800"/>
-              </a:spcAft>
-              <a:buSzPct val="100000"/>
-              <a:buChar char="•"/>
-            </a:pPr>
-            <a:r>
-              <a:rPr lang="en-US" sz="1600" dirty="0">
-                <a:solidFill>
-                  <a:srgbClr val="1F2937"/>
-                </a:solidFill>
-                <a:latin typeface="Courier New" pitchFamily="34" charset="0"/>
-                <a:ea typeface="Courier New" pitchFamily="34" charset="-122"/>
-                <a:cs typeface="Courier New" pitchFamily="34" charset="-120"/>
-              </a:rPr>
-              <a:t>fleet_mark_bike_fixed {"bike_id": 3}</a:t>
-            </a:r>
-            <a:endParaRPr lang="en-US" sz="1600" dirty="0"/>
-          </a:p>
-          <a:p>
-            <a:pPr marL="342900" indent="-342900">
-              <a:lnSpc>
-                <a:spcPct val="140000"/>
-              </a:lnSpc>
-              <a:spcAft>
-                <a:spcPts val="800"/>
-              </a:spcAft>
-              <a:buSzPct val="100000"/>
-              <a:buChar char="•"/>
-            </a:pPr>
-            <a:r>
-              <a:rPr lang="en-US" sz="1600" dirty="0">
-                <a:solidFill>
-                  <a:srgbClr val="1F2937"/>
-                </a:solidFill>
-                <a:latin typeface="Arial" pitchFamily="34" charset="0"/>
-                <a:ea typeface="Arial" pitchFamily="34" charset="-122"/>
-                <a:cs typeface="Arial" pitchFamily="34" charset="-120"/>
-              </a:rPr>
-              <a:t>YOUR code </a:t>
-            </a:r>
-            <a:endParaRPr lang="en-US" sz="1600" dirty="0"/>
-          </a:p>
-          <a:p>
-            <a:pPr marL="342900" indent="-342900">
-              <a:lnSpc>
-                <a:spcPct val="140000"/>
-              </a:lnSpc>
-              <a:spcAft>
-                <a:spcPts val="800"/>
-              </a:spcAft>
-              <a:buSzPct val="100000"/>
-              <a:buChar char="•"/>
-            </a:pPr>
-            <a:r>
-              <a:rPr lang="en-US" sz="1600" b="1" dirty="0">
-                <a:solidFill>
-                  <a:srgbClr val="16A34A"/>
-                </a:solidFill>
-                <a:latin typeface="Arial" pitchFamily="34" charset="0"/>
-                <a:ea typeface="Arial" pitchFamily="34" charset="-122"/>
-                <a:cs typeface="Arial" pitchFamily="34" charset="-120"/>
-              </a:rPr>
-              <a:t>executes</a:t>
-            </a:r>
-            <a:endParaRPr lang="en-US" sz="1600" dirty="0"/>
-          </a:p>
-          <a:p>
-            <a:pPr marL="342900" indent="-342900">
-              <a:lnSpc>
-                <a:spcPct val="140000"/>
-              </a:lnSpc>
-              <a:spcAft>
-                <a:spcPts val="800"/>
-              </a:spcAft>
-              <a:buSzPct val="100000"/>
-              <a:buChar char="•"/>
-            </a:pPr>
-            <a:r>
-              <a:rPr lang="en-US" sz="1600" dirty="0">
-                <a:solidFill>
-                  <a:srgbClr val="1F2937"/>
-                </a:solidFill>
-                <a:latin typeface="Arial" pitchFamily="34" charset="0"/>
-                <a:ea typeface="Arial" pitchFamily="34" charset="-122"/>
-                <a:cs typeface="Arial" pitchFamily="34" charset="-120"/>
-              </a:rPr>
-              <a:t> it — a real </a:t>
-            </a:r>
-            <a:endParaRPr lang="en-US" sz="1600" dirty="0"/>
-          </a:p>
-          <a:p>
-            <a:pPr marL="342900" indent="-342900">
-              <a:lnSpc>
-                <a:spcPct val="140000"/>
-              </a:lnSpc>
-              <a:spcAft>
-                <a:spcPts val="800"/>
-              </a:spcAft>
-              <a:buSzPct val="100000"/>
-              <a:buChar char="•"/>
-            </a:pPr>
-            <a:r>
-              <a:rPr lang="en-US" sz="1600" dirty="0">
-                <a:solidFill>
-                  <a:srgbClr val="1F2937"/>
-                </a:solidFill>
-                <a:latin typeface="Courier New" pitchFamily="34" charset="0"/>
-                <a:ea typeface="Courier New" pitchFamily="34" charset="-122"/>
-                <a:cs typeface="Courier New" pitchFamily="34" charset="-120"/>
-              </a:rPr>
-              <a:t>UPDATE</a:t>
-            </a:r>
-            <a:endParaRPr lang="en-US" sz="1600" dirty="0"/>
-          </a:p>
-          <a:p>
-            <a:pPr marL="342900" indent="-342900">
-              <a:lnSpc>
-                <a:spcPct val="140000"/>
-              </a:lnSpc>
-              <a:spcAft>
-                <a:spcPts val="800"/>
-              </a:spcAft>
-              <a:buSzPct val="100000"/>
-              <a:buChar char="•"/>
-            </a:pPr>
-            <a:r>
-              <a:rPr lang="en-US" sz="1600" dirty="0">
-                <a:solidFill>
-                  <a:srgbClr val="1F2937"/>
-                </a:solidFill>
-                <a:latin typeface="Arial" pitchFamily="34" charset="0"/>
-                <a:ea typeface="Arial" pitchFamily="34" charset="-122"/>
-                <a:cs typeface="Arial" pitchFamily="34" charset="-120"/>
-              </a:rPr>
-              <a:t> via </a:t>
-            </a:r>
-            <a:endParaRPr lang="en-US" sz="1600" dirty="0"/>
-          </a:p>
-          <a:p>
-            <a:pPr marL="342900" indent="-342900">
-              <a:lnSpc>
-                <a:spcPct val="140000"/>
-              </a:lnSpc>
-              <a:spcAft>
-                <a:spcPts val="800"/>
-              </a:spcAft>
-              <a:buSzPct val="100000"/>
-              <a:buChar char="•"/>
-            </a:pPr>
-            <a:r>
-              <a:rPr lang="en-US" sz="1600" dirty="0">
-                <a:solidFill>
-                  <a:srgbClr val="1F2937"/>
-                </a:solidFill>
-                <a:latin typeface="Courier New" pitchFamily="34" charset="0"/>
-                <a:ea typeface="Courier New" pitchFamily="34" charset="-122"/>
-                <a:cs typeface="Courier New" pitchFamily="34" charset="-120"/>
-              </a:rPr>
-              <a:t>bun:sqlite</a:t>
-            </a:r>
-            <a:pPr indent="0" marL="0">
-              <a:lnSpc>
-                <a:spcPct val="140000"/>
-              </a:lnSpc>
-              <a:buNone/>
-            </a:pPr>
-            <a:r>
               <a:rPr lang="en-US" sz="1800" b="1" dirty="0">
                 <a:solidFill>
                   <a:srgbClr val="16A34A"/>
@@ -6461,7 +6017,7 @@
           </a:prstGeom>
           <a:extLst>
             <a:ext uri="{C572A759-6A51-4108-AA02-DFA0A04FC94B}">
-              <ma14:wrappingTextBoxFlag xmlns:ma14="http://schemas.microsoft.com/office/mac/drawingml/2011/main" val="0"/>
+              <ma14:wrappingTextBoxFlag xmlns="" xmlns:ma14="http://schemas.microsoft.com/office/mac/drawingml/2011/main" val="0"/>
             </a:ext>
           </a:extLst>
         </p:spPr>
@@ -6479,7 +6035,7 @@
           <a:p>
             <a:pPr algn="l"/>
             <a:fld id="{F7021451-1387-4CA6-816F-3879F97B5CBC}" type="slidenum">
-              <a:rPr b="0" lang="en-US"/>
+              <a:rPr lang="en-US" b="0"/>
               <a:t>15</a:t>
             </a:fld>
             <a:endParaRPr lang="en-US"/>
@@ -6532,7 +6088,7 @@
           <a:bodyPr wrap="square" rtlCol="0" anchor="ctr"/>
           <a:lstStyle/>
           <a:p>
-            <a:pPr algn="r" indent="0" marL="0">
+            <a:pPr marL="0" indent="0" algn="r">
               <a:buNone/>
             </a:pPr>
             <a:r>
@@ -6546,9 +6102,6 @@
               </a:rPr>
               <a:t>x</a:t>
             </a:r>
-            <a:pPr algn="r" indent="0" marL="0">
-              <a:buNone/>
-            </a:pPr>
             <a:r>
               <a:rPr lang="en-US" sz="900" b="1" dirty="0">
                 <a:solidFill>
@@ -6560,9 +6113,6 @@
               </a:rPr>
               <a:t>P</a:t>
             </a:r>
-            <a:pPr algn="r" indent="0" marL="0">
-              <a:buNone/>
-            </a:pPr>
             <a:r>
               <a:rPr lang="en-US" sz="900" b="1" dirty="0">
                 <a:solidFill>
@@ -6599,7 +6149,7 @@
           <a:bodyPr wrap="square" rtlCol="0" anchor="ctr"/>
           <a:lstStyle/>
           <a:p>
-            <a:pPr algn="l" indent="0" marL="0">
+            <a:pPr marL="0" indent="0" algn="l">
               <a:buNone/>
             </a:pPr>
             <a:r>
@@ -6636,6 +6186,13 @@
           </a:solidFill>
           <a:ln/>
         </p:spPr>
+        <p:txBody>
+          <a:bodyPr/>
+          <a:lstStyle/>
+          <a:p>
+            <a:endParaRPr lang="en-US"/>
+          </a:p>
+        </p:txBody>
       </p:sp>
       <p:sp>
         <p:nvSpPr>
@@ -6658,21 +6215,7 @@
           <a:bodyPr wrap="square" rtlCol="0" anchor="t"/>
           <a:lstStyle/>
           <a:p>
-            <a:pPr indent="0" marL="0">
-              <a:buNone/>
-            </a:pPr>
-            <a:r>
-              <a:rPr lang="en-US" sz="1400" dirty="0">
-                <a:solidFill>
-                  <a:srgbClr val="1F2937"/>
-                </a:solidFill>
-                <a:latin typeface="Arial" pitchFamily="34" charset="0"/>
-                <a:ea typeface="Arial" pitchFamily="34" charset="-122"/>
-                <a:cs typeface="Arial" pitchFamily="34" charset="-120"/>
-              </a:rPr>
-              <a:t>Open </a:t>
-            </a:r>
-            <a:pPr indent="0" marL="0">
+            <a:pPr marL="0" indent="0">
               <a:buNone/>
             </a:pPr>
             <a:r>
@@ -6686,9 +6229,6 @@
               </a:rPr>
               <a:t>demos/m3-tools</a:t>
             </a:r>
-            <a:pPr indent="0" marL="0">
-              <a:buNone/>
-            </a:pPr>
             <a:r>
               <a:rPr lang="en-US" sz="1400" dirty="0">
                 <a:solidFill>
@@ -6700,9 +6240,6 @@
               </a:rPr>
               <a:t>  →  session  </a:t>
             </a:r>
-            <a:pPr indent="0" marL="0">
-              <a:buNone/>
-            </a:pPr>
             <a:r>
               <a:rPr lang="en-US" sz="1400" b="1" dirty="0">
                 <a:solidFill>
@@ -6744,6 +6281,13 @@
             <a:prstDash val="solid"/>
           </a:ln>
         </p:spPr>
+        <p:txBody>
+          <a:bodyPr/>
+          <a:lstStyle/>
+          <a:p>
+            <a:endParaRPr lang="en-US"/>
+          </a:p>
+        </p:txBody>
       </p:sp>
       <p:sp>
         <p:nvSpPr>
@@ -6766,7 +6310,7 @@
           <a:bodyPr wrap="square" rtlCol="0" anchor="ctr"/>
           <a:lstStyle/>
           <a:p>
-            <a:pPr algn="l" indent="0" marL="0">
+            <a:pPr marL="0" indent="0" algn="l">
               <a:lnSpc>
                 <a:spcPct val="115000"/>
               </a:lnSpc>
@@ -6829,6 +6373,28 @@
               </a:rPr>
               <a:t>One plain sentence → </a:t>
             </a:r>
+            <a:r>
+              <a:rPr lang="en-US" sz="1500" b="1" dirty="0" err="1">
+                <a:solidFill>
+                  <a:srgbClr val="16A34A"/>
+                </a:solidFill>
+                <a:latin typeface="Courier New" pitchFamily="34" charset="0"/>
+                <a:ea typeface="Courier New" pitchFamily="34" charset="-122"/>
+                <a:cs typeface="Courier New" pitchFamily="34" charset="-120"/>
+              </a:rPr>
+              <a:t>fleet_mark_bike_fixed</a:t>
+            </a:r>
+            <a:r>
+              <a:rPr lang="en-US" sz="1500" b="1" dirty="0">
+                <a:solidFill>
+                  <a:srgbClr val="16A34A"/>
+                </a:solidFill>
+                <a:latin typeface="Courier New" pitchFamily="34" charset="0"/>
+                <a:ea typeface="Courier New" pitchFamily="34" charset="-122"/>
+                <a:cs typeface="Courier New" pitchFamily="34" charset="-120"/>
+              </a:rPr>
+              <a:t> {"bike_id": 3}</a:t>
+            </a:r>
             <a:endParaRPr lang="en-US" sz="1500" dirty="0"/>
           </a:p>
           <a:p>
@@ -6843,29 +6409,27 @@
               <a:buChar char="•"/>
             </a:pPr>
             <a:r>
-              <a:rPr lang="en-US" sz="1500" b="1" dirty="0">
-                <a:solidFill>
-                  <a:srgbClr val="16A34A"/>
+              <a:rPr lang="en-US" sz="1500" dirty="0">
+                <a:solidFill>
+                  <a:srgbClr val="1F2937"/>
+                </a:solidFill>
+                <a:latin typeface="Arial" pitchFamily="34" charset="0"/>
+                <a:ea typeface="Arial" pitchFamily="34" charset="-122"/>
+                <a:cs typeface="Arial" pitchFamily="34" charset="-120"/>
+              </a:rPr>
+              <a:t>The DB actually changed: bike #3 → </a:t>
+            </a:r>
+            <a:r>
+              <a:rPr lang="en-US" sz="1500" dirty="0">
+                <a:solidFill>
+                  <a:srgbClr val="1F2937"/>
                 </a:solidFill>
                 <a:latin typeface="Courier New" pitchFamily="34" charset="0"/>
                 <a:ea typeface="Courier New" pitchFamily="34" charset="-122"/>
                 <a:cs typeface="Courier New" pitchFamily="34" charset="-120"/>
               </a:rPr>
-              <a:t>fleet_mark_bike_fixed {"bike_id": 3}</a:t>
-            </a:r>
-            <a:endParaRPr lang="en-US" sz="1500" dirty="0"/>
-          </a:p>
-          <a:p>
-            <a:pPr marL="342900" indent="-342900">
-              <a:lnSpc>
-                <a:spcPct val="135000"/>
-              </a:lnSpc>
-              <a:spcAft>
-                <a:spcPts val="800"/>
-              </a:spcAft>
-              <a:buSzPct val="100000"/>
-              <a:buChar char="•"/>
-            </a:pPr>
+              <a:t>ok</a:t>
+            </a:r>
             <a:r>
               <a:rPr lang="en-US" sz="1500" dirty="0">
                 <a:solidFill>
@@ -6875,21 +6439,8 @@
                 <a:ea typeface="Arial" pitchFamily="34" charset="-122"/>
                 <a:cs typeface="Arial" pitchFamily="34" charset="-120"/>
               </a:rPr>
-              <a:t>The DB actually changed: bike #3 → </a:t>
-            </a:r>
-            <a:endParaRPr lang="en-US" sz="1500" dirty="0"/>
-          </a:p>
-          <a:p>
-            <a:pPr marL="342900" indent="-342900">
-              <a:lnSpc>
-                <a:spcPct val="135000"/>
-              </a:lnSpc>
-              <a:spcAft>
-                <a:spcPts val="800"/>
-              </a:spcAft>
-              <a:buSzPct val="100000"/>
-              <a:buChar char="•"/>
-            </a:pPr>
+              <a:t>, its tickets → </a:t>
+            </a:r>
             <a:r>
               <a:rPr lang="en-US" sz="1500" dirty="0">
                 <a:solidFill>
@@ -6899,54 +6450,6 @@
                 <a:ea typeface="Courier New" pitchFamily="34" charset="-122"/>
                 <a:cs typeface="Courier New" pitchFamily="34" charset="-120"/>
               </a:rPr>
-              <a:t>ok</a:t>
-            </a:r>
-            <a:endParaRPr lang="en-US" sz="1500" dirty="0"/>
-          </a:p>
-          <a:p>
-            <a:pPr marL="342900" indent="-342900">
-              <a:lnSpc>
-                <a:spcPct val="135000"/>
-              </a:lnSpc>
-              <a:spcAft>
-                <a:spcPts val="800"/>
-              </a:spcAft>
-              <a:buSzPct val="100000"/>
-              <a:buChar char="•"/>
-            </a:pPr>
-            <a:r>
-              <a:rPr lang="en-US" sz="1500" dirty="0">
-                <a:solidFill>
-                  <a:srgbClr val="1F2937"/>
-                </a:solidFill>
-                <a:latin typeface="Arial" pitchFamily="34" charset="0"/>
-                <a:ea typeface="Arial" pitchFamily="34" charset="-122"/>
-                <a:cs typeface="Arial" pitchFamily="34" charset="-120"/>
-              </a:rPr>
-              <a:t>, its tickets → </a:t>
-            </a:r>
-            <a:endParaRPr lang="en-US" sz="1500" dirty="0"/>
-          </a:p>
-          <a:p>
-            <a:pPr marL="342900" indent="-342900">
-              <a:lnSpc>
-                <a:spcPct val="135000"/>
-              </a:lnSpc>
-              <a:spcAft>
-                <a:spcPts val="800"/>
-              </a:spcAft>
-              <a:buSzPct val="100000"/>
-              <a:buChar char="•"/>
-            </a:pPr>
-            <a:r>
-              <a:rPr lang="en-US" sz="1500" dirty="0">
-                <a:solidFill>
-                  <a:srgbClr val="1F2937"/>
-                </a:solidFill>
-                <a:latin typeface="Courier New" pitchFamily="34" charset="0"/>
-                <a:ea typeface="Courier New" pitchFamily="34" charset="-122"/>
-                <a:cs typeface="Courier New" pitchFamily="34" charset="-120"/>
-              </a:rPr>
               <a:t>closed</a:t>
             </a:r>
             <a:endParaRPr lang="en-US" sz="1500" dirty="0"/>
@@ -6974,7 +6477,7 @@
           <a:bodyPr wrap="square" rtlCol="0" anchor="ctr"/>
           <a:lstStyle/>
           <a:p>
-            <a:pPr indent="0" marL="0">
+            <a:pPr marL="0" indent="0">
               <a:buNone/>
             </a:pPr>
             <a:r>
@@ -6988,9 +6491,6 @@
               </a:rPr>
               <a:t>Then YOU:  </a:t>
             </a:r>
-            <a:pPr indent="0" marL="0">
-              <a:buNone/>
-            </a:pPr>
             <a:r>
               <a:rPr lang="en-US" sz="1600" b="1" dirty="0">
                 <a:solidFill>
@@ -7026,7 +6526,7 @@
           </a:prstGeom>
           <a:extLst>
             <a:ext uri="{C572A759-6A51-4108-AA02-DFA0A04FC94B}">
-              <ma14:wrappingTextBoxFlag xmlns:ma14="http://schemas.microsoft.com/office/mac/drawingml/2011/main" val="0"/>
+              <ma14:wrappingTextBoxFlag xmlns="" xmlns:ma14="http://schemas.microsoft.com/office/mac/drawingml/2011/main" val="0"/>
             </a:ext>
           </a:extLst>
         </p:spPr>
@@ -7044,7 +6544,7 @@
           <a:p>
             <a:pPr algn="l"/>
             <a:fld id="{F7021451-1387-4CA6-816F-3879F97B5CBC}" type="slidenum">
-              <a:rPr b="0" lang="en-US"/>
+              <a:rPr lang="en-US" b="0"/>
               <a:t>16</a:t>
             </a:fld>
             <a:endParaRPr lang="en-US"/>
@@ -7097,7 +6597,7 @@
           <a:bodyPr wrap="square" rtlCol="0" anchor="ctr"/>
           <a:lstStyle/>
           <a:p>
-            <a:pPr algn="r" indent="0" marL="0">
+            <a:pPr marL="0" indent="0" algn="r">
               <a:buNone/>
             </a:pPr>
             <a:r>
@@ -7111,9 +6611,6 @@
               </a:rPr>
               <a:t>x</a:t>
             </a:r>
-            <a:pPr algn="r" indent="0" marL="0">
-              <a:buNone/>
-            </a:pPr>
             <a:r>
               <a:rPr lang="en-US" sz="900" b="1" dirty="0">
                 <a:solidFill>
@@ -7125,9 +6622,6 @@
               </a:rPr>
               <a:t>P</a:t>
             </a:r>
-            <a:pPr algn="r" indent="0" marL="0">
-              <a:buNone/>
-            </a:pPr>
             <a:r>
               <a:rPr lang="en-US" sz="900" b="1" dirty="0">
                 <a:solidFill>
@@ -7164,7 +6658,7 @@
           <a:bodyPr wrap="square" rtlCol="0" anchor="ctr"/>
           <a:lstStyle/>
           <a:p>
-            <a:pPr algn="l" indent="0" marL="0">
+            <a:pPr marL="0" indent="0" algn="l">
               <a:buNone/>
             </a:pPr>
             <a:r>
@@ -7201,6 +6695,13 @@
           </a:solidFill>
           <a:ln/>
         </p:spPr>
+        <p:txBody>
+          <a:bodyPr/>
+          <a:lstStyle/>
+          <a:p>
+            <a:endParaRPr lang="en-US"/>
+          </a:p>
+        </p:txBody>
       </p:sp>
       <p:sp>
         <p:nvSpPr>
@@ -7244,7 +6745,21 @@
               </a:rPr>
               <a:t>Chatbot:</a:t>
             </a:r>
-            <a:endParaRPr lang="en-US" sz="1600" dirty="0"/>
+            <a:r>
+              <a:rPr lang="en-US" sz="1600" b="1" dirty="0"/>
+              <a:t> </a:t>
+            </a:r>
+            <a:r>
+              <a:rPr lang="en-US" sz="1600" dirty="0">
+                <a:solidFill>
+                  <a:srgbClr val="1F2937"/>
+                </a:solidFill>
+                <a:latin typeface="Arial" pitchFamily="34" charset="0"/>
+                <a:ea typeface="Arial" pitchFamily="34" charset="-122"/>
+                <a:cs typeface="Arial" pitchFamily="34" charset="-120"/>
+              </a:rPr>
+              <a:t>you talk, it answers.  </a:t>
+            </a:r>
           </a:p>
           <a:p>
             <a:pPr marL="342900" indent="-342900">
@@ -7257,17 +6772,6 @@
               <a:buSzPct val="100000"/>
               <a:buChar char="•"/>
             </a:pPr>
-            <a:r>
-              <a:rPr lang="en-US" sz="1600" dirty="0">
-                <a:solidFill>
-                  <a:srgbClr val="1F2937"/>
-                </a:solidFill>
-                <a:latin typeface="Arial" pitchFamily="34" charset="0"/>
-                <a:ea typeface="Arial" pitchFamily="34" charset="-122"/>
-                <a:cs typeface="Arial" pitchFamily="34" charset="-120"/>
-              </a:rPr>
-              <a:t> you talk, it answers.  </a:t>
-            </a:r>
             <a:endParaRPr lang="en-US" sz="1600" dirty="0"/>
           </a:p>
           <a:p>
@@ -7292,7 +6796,21 @@
               </a:rPr>
               <a:t>Agent:</a:t>
             </a:r>
-            <a:endParaRPr lang="en-US" sz="1600" dirty="0"/>
+            <a:r>
+              <a:rPr lang="en-US" sz="1600" b="1" dirty="0"/>
+              <a:t> </a:t>
+            </a:r>
+            <a:r>
+              <a:rPr lang="en-US" sz="1600" dirty="0">
+                <a:solidFill>
+                  <a:srgbClr val="1F2937"/>
+                </a:solidFill>
+                <a:latin typeface="Arial" pitchFamily="34" charset="0"/>
+                <a:ea typeface="Arial" pitchFamily="34" charset="-122"/>
+                <a:cs typeface="Arial" pitchFamily="34" charset="-120"/>
+              </a:rPr>
+              <a:t>you give a GOAL, it works</a:t>
+            </a:r>
           </a:p>
           <a:p>
             <a:pPr marL="342900" indent="-342900">
@@ -7305,17 +6823,6 @@
               <a:buSzPct val="100000"/>
               <a:buChar char="•"/>
             </a:pPr>
-            <a:r>
-              <a:rPr lang="en-US" sz="1600" dirty="0">
-                <a:solidFill>
-                  <a:srgbClr val="1F2937"/>
-                </a:solidFill>
-                <a:latin typeface="Arial" pitchFamily="34" charset="0"/>
-                <a:ea typeface="Arial" pitchFamily="34" charset="-122"/>
-                <a:cs typeface="Arial" pitchFamily="34" charset="-120"/>
-              </a:rPr>
-              <a:t> you give a GOAL, it works</a:t>
-            </a:r>
             <a:endParaRPr lang="en-US" sz="1600" dirty="0"/>
           </a:p>
           <a:p>
@@ -7340,6 +6847,80 @@
               </a:rPr>
               <a:t>The loop: </a:t>
             </a:r>
+            <a:r>
+              <a:rPr lang="en-US" sz="1600" b="1" dirty="0">
+                <a:solidFill>
+                  <a:srgbClr val="16A34A"/>
+                </a:solidFill>
+                <a:latin typeface="Arial" pitchFamily="34" charset="0"/>
+                <a:ea typeface="Arial" pitchFamily="34" charset="-122"/>
+                <a:cs typeface="Arial" pitchFamily="34" charset="-120"/>
+              </a:rPr>
+              <a:t>observe → decide → act → repeat</a:t>
+            </a:r>
+            <a:r>
+              <a:rPr lang="en-US" sz="1600" dirty="0"/>
+              <a:t> </a:t>
+            </a:r>
+          </a:p>
+          <a:p>
+            <a:pPr lvl="1">
+              <a:lnSpc>
+                <a:spcPct val="140000"/>
+              </a:lnSpc>
+              <a:spcAft>
+                <a:spcPts val="800"/>
+              </a:spcAft>
+              <a:buSzPct val="100000"/>
+            </a:pPr>
+            <a:r>
+              <a:rPr lang="en-US" sz="1600" b="1" dirty="0">
+                <a:solidFill>
+                  <a:srgbClr val="16A34A"/>
+                </a:solidFill>
+                <a:latin typeface="Courier New" pitchFamily="34" charset="0"/>
+                <a:ea typeface="Courier New" pitchFamily="34" charset="-122"/>
+                <a:cs typeface="Courier New" pitchFamily="34" charset="-120"/>
+              </a:rPr>
+              <a:t>steps: 20</a:t>
+            </a:r>
+            <a:r>
+              <a:rPr lang="en-US" sz="1600" b="1" dirty="0"/>
+              <a:t> </a:t>
+            </a:r>
+            <a:r>
+              <a:rPr lang="en-US" sz="1600" dirty="0">
+                <a:solidFill>
+                  <a:srgbClr val="1F2937"/>
+                </a:solidFill>
+                <a:latin typeface="Arial" pitchFamily="34" charset="0"/>
+                <a:ea typeface="Arial" pitchFamily="34" charset="-122"/>
+                <a:cs typeface="Arial" pitchFamily="34" charset="-120"/>
+              </a:rPr>
+              <a:t>= the safety fuse · permissions:</a:t>
+            </a:r>
+          </a:p>
+          <a:p>
+            <a:pPr lvl="1">
+              <a:lnSpc>
+                <a:spcPct val="140000"/>
+              </a:lnSpc>
+              <a:spcAft>
+                <a:spcPts val="800"/>
+              </a:spcAft>
+              <a:buSzPct val="100000"/>
+            </a:pPr>
+            <a:r>
+              <a:rPr lang="en-US" sz="1600" dirty="0">
+                <a:solidFill>
+                  <a:srgbClr val="1F2937"/>
+                </a:solidFill>
+                <a:latin typeface="Arial" pitchFamily="34" charset="0"/>
+                <a:ea typeface="Arial" pitchFamily="34" charset="-122"/>
+                <a:cs typeface="Arial" pitchFamily="34" charset="-120"/>
+              </a:rPr>
+              <a:t> </a:t>
+            </a:r>
             <a:endParaRPr lang="en-US" sz="1600" dirty="0"/>
           </a:p>
           <a:p>
@@ -7356,78 +6937,6 @@
             <a:r>
               <a:rPr lang="en-US" sz="1600" b="1" dirty="0">
                 <a:solidFill>
-                  <a:srgbClr val="16A34A"/>
-                </a:solidFill>
-                <a:latin typeface="Arial" pitchFamily="34" charset="0"/>
-                <a:ea typeface="Arial" pitchFamily="34" charset="-122"/>
-                <a:cs typeface="Arial" pitchFamily="34" charset="-120"/>
-              </a:rPr>
-              <a:t>observe → decide → act → repeat</a:t>
-            </a:r>
-            <a:endParaRPr lang="en-US" sz="1600" dirty="0"/>
-          </a:p>
-          <a:p>
-            <a:pPr marL="342900" indent="-342900">
-              <a:lnSpc>
-                <a:spcPct val="140000"/>
-              </a:lnSpc>
-              <a:spcAft>
-                <a:spcPts val="800"/>
-              </a:spcAft>
-              <a:buSzPct val="100000"/>
-              <a:buChar char="•"/>
-            </a:pPr>
-            <a:r>
-              <a:rPr lang="en-US" sz="1600" b="1" dirty="0">
-                <a:solidFill>
-                  <a:srgbClr val="16A34A"/>
-                </a:solidFill>
-                <a:latin typeface="Courier New" pitchFamily="34" charset="0"/>
-                <a:ea typeface="Courier New" pitchFamily="34" charset="-122"/>
-                <a:cs typeface="Courier New" pitchFamily="34" charset="-120"/>
-              </a:rPr>
-              <a:t>steps: 20</a:t>
-            </a:r>
-            <a:endParaRPr lang="en-US" sz="1600" dirty="0"/>
-          </a:p>
-          <a:p>
-            <a:pPr marL="342900" indent="-342900">
-              <a:lnSpc>
-                <a:spcPct val="140000"/>
-              </a:lnSpc>
-              <a:spcAft>
-                <a:spcPts val="800"/>
-              </a:spcAft>
-              <a:buSzPct val="100000"/>
-              <a:buChar char="•"/>
-            </a:pPr>
-            <a:r>
-              <a:rPr lang="en-US" sz="1600" dirty="0">
-                <a:solidFill>
-                  <a:srgbClr val="1F2937"/>
-                </a:solidFill>
-                <a:latin typeface="Arial" pitchFamily="34" charset="0"/>
-                <a:ea typeface="Arial" pitchFamily="34" charset="-122"/>
-                <a:cs typeface="Arial" pitchFamily="34" charset="-120"/>
-              </a:rPr>
-              <a:t> = the safety fuse · permissions: </a:t>
-            </a:r>
-            <a:endParaRPr lang="en-US" sz="1600" dirty="0"/>
-          </a:p>
-          <a:p>
-            <a:pPr marL="342900" indent="-342900">
-              <a:lnSpc>
-                <a:spcPct val="140000"/>
-              </a:lnSpc>
-              <a:spcAft>
-                <a:spcPts val="800"/>
-              </a:spcAft>
-              <a:buSzPct val="100000"/>
-              <a:buChar char="•"/>
-            </a:pPr>
-            <a:r>
-              <a:rPr lang="en-US" sz="1600" b="1" dirty="0">
-                <a:solidFill>
                   <a:srgbClr val="111827"/>
                 </a:solidFill>
                 <a:latin typeface="Arial" pitchFamily="34" charset="0"/>
@@ -7460,7 +6969,7 @@
           </a:prstGeom>
           <a:extLst>
             <a:ext uri="{C572A759-6A51-4108-AA02-DFA0A04FC94B}">
-              <ma14:wrappingTextBoxFlag xmlns:ma14="http://schemas.microsoft.com/office/mac/drawingml/2011/main" val="0"/>
+              <ma14:wrappingTextBoxFlag xmlns="" xmlns:ma14="http://schemas.microsoft.com/office/mac/drawingml/2011/main" val="0"/>
             </a:ext>
           </a:extLst>
         </p:spPr>
@@ -7478,7 +6987,7 @@
           <a:p>
             <a:pPr algn="l"/>
             <a:fld id="{F7021451-1387-4CA6-816F-3879F97B5CBC}" type="slidenum">
-              <a:rPr b="0" lang="en-US"/>
+              <a:rPr lang="en-US" b="0"/>
               <a:t>17</a:t>
             </a:fld>
             <a:endParaRPr lang="en-US"/>
@@ -7531,7 +7040,7 @@
           <a:bodyPr wrap="square" rtlCol="0" anchor="ctr"/>
           <a:lstStyle/>
           <a:p>
-            <a:pPr algn="r" indent="0" marL="0">
+            <a:pPr marL="0" indent="0" algn="r">
               <a:buNone/>
             </a:pPr>
             <a:r>
@@ -7545,9 +7054,6 @@
               </a:rPr>
               <a:t>x</a:t>
             </a:r>
-            <a:pPr algn="r" indent="0" marL="0">
-              <a:buNone/>
-            </a:pPr>
             <a:r>
               <a:rPr lang="en-US" sz="900" b="1" dirty="0">
                 <a:solidFill>
@@ -7559,9 +7065,6 @@
               </a:rPr>
               <a:t>P</a:t>
             </a:r>
-            <a:pPr algn="r" indent="0" marL="0">
-              <a:buNone/>
-            </a:pPr>
             <a:r>
               <a:rPr lang="en-US" sz="900" b="1" dirty="0">
                 <a:solidFill>
@@ -7598,7 +7101,7 @@
           <a:bodyPr wrap="square" rtlCol="0" anchor="ctr"/>
           <a:lstStyle/>
           <a:p>
-            <a:pPr algn="l" indent="0" marL="0">
+            <a:pPr marL="0" indent="0" algn="l">
               <a:buNone/>
             </a:pPr>
             <a:r>
@@ -7635,6 +7138,13 @@
           </a:solidFill>
           <a:ln/>
         </p:spPr>
+        <p:txBody>
+          <a:bodyPr/>
+          <a:lstStyle/>
+          <a:p>
+            <a:endParaRPr lang="en-US"/>
+          </a:p>
+        </p:txBody>
       </p:sp>
       <p:sp>
         <p:nvSpPr>
@@ -7657,21 +7167,7 @@
           <a:bodyPr wrap="square" rtlCol="0" anchor="t"/>
           <a:lstStyle/>
           <a:p>
-            <a:pPr indent="0" marL="0">
-              <a:buNone/>
-            </a:pPr>
-            <a:r>
-              <a:rPr lang="en-US" sz="1400" dirty="0">
-                <a:solidFill>
-                  <a:srgbClr val="1F2937"/>
-                </a:solidFill>
-                <a:latin typeface="Arial" pitchFamily="34" charset="0"/>
-                <a:ea typeface="Arial" pitchFamily="34" charset="-122"/>
-                <a:cs typeface="Arial" pitchFamily="34" charset="-120"/>
-              </a:rPr>
-              <a:t>Open </a:t>
-            </a:r>
-            <a:pPr indent="0" marL="0">
+            <a:pPr marL="0" indent="0">
               <a:buNone/>
             </a:pPr>
             <a:r>
@@ -7685,9 +7181,6 @@
               </a:rPr>
               <a:t>demos/m4-agent</a:t>
             </a:r>
-            <a:pPr indent="0" marL="0">
-              <a:buNone/>
-            </a:pPr>
             <a:r>
               <a:rPr lang="en-US" sz="1400" dirty="0">
                 <a:solidFill>
@@ -7699,9 +7192,6 @@
               </a:rPr>
               <a:t>  →  session  </a:t>
             </a:r>
-            <a:pPr indent="0" marL="0">
-              <a:buNone/>
-            </a:pPr>
             <a:r>
               <a:rPr lang="en-US" sz="1400" b="1" dirty="0">
                 <a:solidFill>
@@ -7743,6 +7233,13 @@
             <a:prstDash val="solid"/>
           </a:ln>
         </p:spPr>
+        <p:txBody>
+          <a:bodyPr/>
+          <a:lstStyle/>
+          <a:p>
+            <a:endParaRPr lang="en-US"/>
+          </a:p>
+        </p:txBody>
       </p:sp>
       <p:sp>
         <p:nvSpPr>
@@ -7765,7 +7262,7 @@
           <a:bodyPr wrap="square" rtlCol="0" anchor="ctr"/>
           <a:lstStyle/>
           <a:p>
-            <a:pPr algn="l" indent="0" marL="0">
+            <a:pPr marL="0" indent="0" algn="l">
               <a:lnSpc>
                 <a:spcPct val="115000"/>
               </a:lnSpc>
@@ -7828,6 +7325,28 @@
               </a:rPr>
               <a:t>The loop: </a:t>
             </a:r>
+            <a:r>
+              <a:rPr lang="en-US" sz="1500" b="1" dirty="0">
+                <a:solidFill>
+                  <a:srgbClr val="16A34A"/>
+                </a:solidFill>
+                <a:latin typeface="Arial" pitchFamily="34" charset="0"/>
+                <a:ea typeface="Arial" pitchFamily="34" charset="-122"/>
+                <a:cs typeface="Arial" pitchFamily="34" charset="-120"/>
+              </a:rPr>
+              <a:t>list → assign → fix ×3</a:t>
+            </a:r>
+            <a:r>
+              <a:rPr lang="en-US" sz="1500" dirty="0">
+                <a:solidFill>
+                  <a:srgbClr val="1F2937"/>
+                </a:solidFill>
+                <a:latin typeface="Arial" pitchFamily="34" charset="0"/>
+                <a:ea typeface="Arial" pitchFamily="34" charset="-122"/>
+                <a:cs typeface="Arial" pitchFamily="34" charset="-120"/>
+              </a:rPr>
+              <a:t> (ticket #4 closes along the way)</a:t>
+            </a:r>
             <a:endParaRPr lang="en-US" sz="1500" dirty="0"/>
           </a:p>
           <a:p>
@@ -7842,6 +7361,17 @@
               <a:buChar char="•"/>
             </a:pPr>
             <a:r>
+              <a:rPr lang="en-US" sz="1500" dirty="0">
+                <a:solidFill>
+                  <a:srgbClr val="1F2937"/>
+                </a:solidFill>
+                <a:latin typeface="Arial" pitchFamily="34" charset="0"/>
+                <a:ea typeface="Arial" pitchFamily="34" charset="-122"/>
+                <a:cs typeface="Arial" pitchFamily="34" charset="-120"/>
+              </a:rPr>
+              <a:t>It </a:t>
+            </a:r>
+            <a:r>
               <a:rPr lang="en-US" sz="1500" b="1" dirty="0">
                 <a:solidFill>
                   <a:srgbClr val="16A34A"/>
@@ -7850,21 +7380,12 @@
                 <a:ea typeface="Arial" pitchFamily="34" charset="-122"/>
                 <a:cs typeface="Arial" pitchFamily="34" charset="-120"/>
               </a:rPr>
-              <a:t>list → assign → fix ×3</a:t>
-            </a:r>
-            <a:endParaRPr lang="en-US" sz="1500" dirty="0"/>
-          </a:p>
-          <a:p>
-            <a:pPr marL="342900" indent="-342900">
-              <a:lnSpc>
-                <a:spcPct val="135000"/>
-              </a:lnSpc>
-              <a:spcAft>
-                <a:spcPts val="800"/>
-              </a:spcAft>
-              <a:buSzPct val="100000"/>
-              <a:buChar char="•"/>
-            </a:pPr>
+              <a:t>STOPS BY ITSELF</a:t>
+            </a:r>
+            <a:r>
+              <a:rPr lang="en-US" sz="1500" b="1" dirty="0"/>
+              <a:t> </a:t>
+            </a:r>
             <a:r>
               <a:rPr lang="en-US" sz="1500" dirty="0">
                 <a:solidFill>
@@ -7874,79 +7395,7 @@
                 <a:ea typeface="Arial" pitchFamily="34" charset="-122"/>
                 <a:cs typeface="Arial" pitchFamily="34" charset="-120"/>
               </a:rPr>
-              <a:t> (ticket #4 closes along the way)</a:t>
-            </a:r>
-            <a:endParaRPr lang="en-US" sz="1500" dirty="0"/>
-          </a:p>
-          <a:p>
-            <a:pPr marL="342900" indent="-342900">
-              <a:lnSpc>
-                <a:spcPct val="135000"/>
-              </a:lnSpc>
-              <a:spcAft>
-                <a:spcPts val="800"/>
-              </a:spcAft>
-              <a:buSzPct val="100000"/>
-              <a:buChar char="•"/>
-            </a:pPr>
-            <a:r>
-              <a:rPr lang="en-US" sz="1500" dirty="0">
-                <a:solidFill>
-                  <a:srgbClr val="1F2937"/>
-                </a:solidFill>
-                <a:latin typeface="Arial" pitchFamily="34" charset="0"/>
-                <a:ea typeface="Arial" pitchFamily="34" charset="-122"/>
-                <a:cs typeface="Arial" pitchFamily="34" charset="-120"/>
-              </a:rPr>
-              <a:t>It </a:t>
-            </a:r>
-            <a:endParaRPr lang="en-US" sz="1500" dirty="0"/>
-          </a:p>
-          <a:p>
-            <a:pPr marL="342900" indent="-342900">
-              <a:lnSpc>
-                <a:spcPct val="135000"/>
-              </a:lnSpc>
-              <a:spcAft>
-                <a:spcPts val="800"/>
-              </a:spcAft>
-              <a:buSzPct val="100000"/>
-              <a:buChar char="•"/>
-            </a:pPr>
-            <a:r>
-              <a:rPr lang="en-US" sz="1500" b="1" dirty="0">
-                <a:solidFill>
-                  <a:srgbClr val="16A34A"/>
-                </a:solidFill>
-                <a:latin typeface="Arial" pitchFamily="34" charset="0"/>
-                <a:ea typeface="Arial" pitchFamily="34" charset="-122"/>
-                <a:cs typeface="Arial" pitchFamily="34" charset="-120"/>
-              </a:rPr>
-              <a:t>STOPS BY ITSELF</a:t>
-            </a:r>
-            <a:endParaRPr lang="en-US" sz="1500" dirty="0"/>
-          </a:p>
-          <a:p>
-            <a:pPr marL="342900" indent="-342900">
-              <a:lnSpc>
-                <a:spcPct val="135000"/>
-              </a:lnSpc>
-              <a:spcAft>
-                <a:spcPts val="800"/>
-              </a:spcAft>
-              <a:buSzPct val="100000"/>
-              <a:buChar char="•"/>
-            </a:pPr>
-            <a:r>
-              <a:rPr lang="en-US" sz="1500" dirty="0">
-                <a:solidFill>
-                  <a:srgbClr val="1F2937"/>
-                </a:solidFill>
-                <a:latin typeface="Arial" pitchFamily="34" charset="0"/>
-                <a:ea typeface="Arial" pitchFamily="34" charset="-122"/>
-                <a:cs typeface="Arial" pitchFamily="34" charset="-120"/>
-              </a:rPr>
-              <a:t> when none remain ✅</a:t>
+              <a:t>when none remain ✅</a:t>
             </a:r>
             <a:endParaRPr lang="en-US" sz="1500" dirty="0"/>
           </a:p>
@@ -7973,7 +7422,7 @@
           <a:bodyPr wrap="square" rtlCol="0" anchor="ctr"/>
           <a:lstStyle/>
           <a:p>
-            <a:pPr indent="0" marL="0">
+            <a:pPr marL="0" indent="0">
               <a:buNone/>
             </a:pPr>
             <a:r>
@@ -7987,9 +7436,6 @@
               </a:rPr>
               <a:t>Then YOU:  </a:t>
             </a:r>
-            <a:pPr indent="0" marL="0">
-              <a:buNone/>
-            </a:pPr>
             <a:r>
               <a:rPr lang="en-US" sz="1600" b="1" dirty="0">
                 <a:solidFill>
@@ -8025,7 +7471,7 @@
           </a:prstGeom>
           <a:extLst>
             <a:ext uri="{C572A759-6A51-4108-AA02-DFA0A04FC94B}">
-              <ma14:wrappingTextBoxFlag xmlns:ma14="http://schemas.microsoft.com/office/mac/drawingml/2011/main" val="0"/>
+              <ma14:wrappingTextBoxFlag xmlns="" xmlns:ma14="http://schemas.microsoft.com/office/mac/drawingml/2011/main" val="0"/>
             </a:ext>
           </a:extLst>
         </p:spPr>
@@ -8043,7 +7489,7 @@
           <a:p>
             <a:pPr algn="l"/>
             <a:fld id="{F7021451-1387-4CA6-816F-3879F97B5CBC}" type="slidenum">
-              <a:rPr b="0" lang="en-US"/>
+              <a:rPr lang="en-US" b="0"/>
               <a:t>18</a:t>
             </a:fld>
             <a:endParaRPr lang="en-US"/>
@@ -8096,7 +7542,7 @@
           <a:bodyPr wrap="square" rtlCol="0" anchor="ctr"/>
           <a:lstStyle/>
           <a:p>
-            <a:pPr algn="r" indent="0" marL="0">
+            <a:pPr marL="0" indent="0" algn="r">
               <a:buNone/>
             </a:pPr>
             <a:r>
@@ -8110,9 +7556,6 @@
               </a:rPr>
               <a:t>x</a:t>
             </a:r>
-            <a:pPr algn="r" indent="0" marL="0">
-              <a:buNone/>
-            </a:pPr>
             <a:r>
               <a:rPr lang="en-US" sz="900" b="1" dirty="0">
                 <a:solidFill>
@@ -8124,9 +7567,6 @@
               </a:rPr>
               <a:t>P</a:t>
             </a:r>
-            <a:pPr algn="r" indent="0" marL="0">
-              <a:buNone/>
-            </a:pPr>
             <a:r>
               <a:rPr lang="en-US" sz="900" b="1" dirty="0">
                 <a:solidFill>
@@ -8163,7 +7603,7 @@
           <a:bodyPr wrap="square" rtlCol="0" anchor="ctr"/>
           <a:lstStyle/>
           <a:p>
-            <a:pPr algn="l" indent="0" marL="0">
+            <a:pPr marL="0" indent="0" algn="l">
               <a:buNone/>
             </a:pPr>
             <a:r>
@@ -8200,6 +7640,13 @@
           </a:solidFill>
           <a:ln/>
         </p:spPr>
+        <p:txBody>
+          <a:bodyPr/>
+          <a:lstStyle/>
+          <a:p>
+            <a:endParaRPr lang="en-US"/>
+          </a:p>
+        </p:txBody>
       </p:sp>
       <p:sp>
         <p:nvSpPr>
@@ -8222,7 +7669,7 @@
           <a:bodyPr wrap="square" rtlCol="0" anchor="ctr"/>
           <a:lstStyle/>
           <a:p>
-            <a:pPr indent="0" marL="0">
+            <a:pPr marL="0" indent="0">
               <a:buNone/>
             </a:pPr>
             <a:r>
@@ -8236,9 +7683,6 @@
               </a:rPr>
               <a:t>Memory</a:t>
             </a:r>
-            <a:pPr indent="0" marL="0">
-              <a:buNone/>
-            </a:pPr>
             <a:r>
               <a:rPr lang="en-US" sz="1500" dirty="0">
                 <a:solidFill>
@@ -8250,9 +7694,6 @@
               </a:rPr>
               <a:t> (context)</a:t>
             </a:r>
-            <a:pPr indent="0" marL="0">
-              <a:buNone/>
-            </a:pPr>
             <a:r>
               <a:rPr lang="en-US" sz="1800" dirty="0">
                 <a:solidFill>
@@ -8264,9 +7705,6 @@
               </a:rPr>
               <a:t>   ·   </a:t>
             </a:r>
-            <a:pPr indent="0" marL="0">
-              <a:buNone/>
-            </a:pPr>
             <a:r>
               <a:rPr lang="en-US" sz="1800" b="1" dirty="0">
                 <a:solidFill>
@@ -8278,9 +7716,6 @@
               </a:rPr>
               <a:t>Truth</a:t>
             </a:r>
-            <a:pPr indent="0" marL="0">
-              <a:buNone/>
-            </a:pPr>
             <a:r>
               <a:rPr lang="en-US" sz="1500" dirty="0">
                 <a:solidFill>
@@ -8292,9 +7727,6 @@
               </a:rPr>
               <a:t> (grounding)</a:t>
             </a:r>
-            <a:pPr indent="0" marL="0">
-              <a:buNone/>
-            </a:pPr>
             <a:r>
               <a:rPr lang="en-US" sz="1800" dirty="0">
                 <a:solidFill>
@@ -8306,9 +7738,6 @@
               </a:rPr>
               <a:t>   ·   </a:t>
             </a:r>
-            <a:pPr indent="0" marL="0">
-              <a:buNone/>
-            </a:pPr>
             <a:r>
               <a:rPr lang="en-US" sz="1800" b="1" dirty="0">
                 <a:solidFill>
@@ -8320,9 +7749,6 @@
               </a:rPr>
               <a:t>Hands</a:t>
             </a:r>
-            <a:pPr indent="0" marL="0">
-              <a:buNone/>
-            </a:pPr>
             <a:r>
               <a:rPr lang="en-US" sz="1500" dirty="0">
                 <a:solidFill>
@@ -8334,9 +7760,6 @@
               </a:rPr>
               <a:t> (tools)</a:t>
             </a:r>
-            <a:pPr indent="0" marL="0">
-              <a:buNone/>
-            </a:pPr>
             <a:r>
               <a:rPr lang="en-US" sz="1800" dirty="0">
                 <a:solidFill>
@@ -8348,9 +7771,6 @@
               </a:rPr>
               <a:t>   ·   </a:t>
             </a:r>
-            <a:pPr indent="0" marL="0">
-              <a:buNone/>
-            </a:pPr>
             <a:r>
               <a:rPr lang="en-US" sz="1800" b="1" dirty="0">
                 <a:solidFill>
@@ -8362,9 +7782,6 @@
               </a:rPr>
               <a:t>Autonomy</a:t>
             </a:r>
-            <a:pPr indent="0" marL="0">
-              <a:buNone/>
-            </a:pPr>
             <a:r>
               <a:rPr lang="en-US" sz="1500" dirty="0">
                 <a:solidFill>
@@ -8401,7 +7818,7 @@
           <a:bodyPr wrap="square" rtlCol="0" anchor="ctr"/>
           <a:lstStyle/>
           <a:p>
-            <a:pPr algn="ctr" indent="0" marL="0">
+            <a:pPr marL="0" indent="0" algn="ctr">
               <a:buNone/>
             </a:pPr>
             <a:r>
@@ -8439,7 +7856,7 @@
           </a:prstGeom>
           <a:extLst>
             <a:ext uri="{C572A759-6A51-4108-AA02-DFA0A04FC94B}">
-              <ma14:wrappingTextBoxFlag xmlns:ma14="http://schemas.microsoft.com/office/mac/drawingml/2011/main" val="0"/>
+              <ma14:wrappingTextBoxFlag xmlns="" xmlns:ma14="http://schemas.microsoft.com/office/mac/drawingml/2011/main" val="0"/>
             </a:ext>
           </a:extLst>
         </p:spPr>
@@ -8457,7 +7874,7 @@
           <a:p>
             <a:pPr algn="l"/>
             <a:fld id="{F7021451-1387-4CA6-816F-3879F97B5CBC}" type="slidenum">
-              <a:rPr b="0" lang="en-US"/>
+              <a:rPr lang="en-US" b="0"/>
               <a:t>19</a:t>
             </a:fld>
             <a:endParaRPr lang="en-US"/>
@@ -8510,7 +7927,7 @@
           <a:bodyPr wrap="square" rtlCol="0" anchor="ctr"/>
           <a:lstStyle/>
           <a:p>
-            <a:pPr algn="r" indent="0" marL="0">
+            <a:pPr marL="0" indent="0" algn="r">
               <a:buNone/>
             </a:pPr>
             <a:r>
@@ -8524,9 +7941,6 @@
               </a:rPr>
               <a:t>x</a:t>
             </a:r>
-            <a:pPr algn="r" indent="0" marL="0">
-              <a:buNone/>
-            </a:pPr>
             <a:r>
               <a:rPr lang="en-US" sz="900" b="1" dirty="0">
                 <a:solidFill>
@@ -8538,9 +7952,6 @@
               </a:rPr>
               <a:t>P</a:t>
             </a:r>
-            <a:pPr algn="r" indent="0" marL="0">
-              <a:buNone/>
-            </a:pPr>
             <a:r>
               <a:rPr lang="en-US" sz="900" b="1" dirty="0">
                 <a:solidFill>
@@ -8577,7 +7988,7 @@
           <a:bodyPr wrap="square" rtlCol="0" anchor="ctr"/>
           <a:lstStyle/>
           <a:p>
-            <a:pPr algn="l" indent="0" marL="0">
+            <a:pPr marL="0" indent="0" algn="l">
               <a:buNone/>
             </a:pPr>
             <a:r>
@@ -8614,6 +8025,13 @@
           </a:solidFill>
           <a:ln/>
         </p:spPr>
+        <p:txBody>
+          <a:bodyPr/>
+          <a:lstStyle/>
+          <a:p>
+            <a:endParaRPr lang="en-US"/>
+          </a:p>
+        </p:txBody>
       </p:sp>
       <p:sp>
         <p:nvSpPr>
@@ -8636,7 +8054,7 @@
           <a:bodyPr wrap="square" rtlCol="0" anchor="ctr"/>
           <a:lstStyle/>
           <a:p>
-            <a:pPr indent="0" marL="0">
+            <a:pPr marL="0" indent="0">
               <a:buNone/>
             </a:pPr>
             <a:r>
@@ -8696,6 +8114,177 @@
               </a:rPr>
               <a:t>Short theory block</a:t>
             </a:r>
+            <a:r>
+              <a:rPr lang="en-US" sz="1600" dirty="0">
+                <a:solidFill>
+                  <a:srgbClr val="1F2937"/>
+                </a:solidFill>
+                <a:latin typeface="Arial" pitchFamily="34" charset="0"/>
+                <a:ea typeface="Arial" pitchFamily="34" charset="-122"/>
+                <a:cs typeface="Arial" pitchFamily="34" charset="-120"/>
+              </a:rPr>
+              <a:t> (~2 min per concept)</a:t>
+            </a:r>
+            <a:r>
+              <a:rPr lang="en-US" sz="1600" dirty="0"/>
+              <a:t> </a:t>
+            </a:r>
+            <a:r>
+              <a:rPr lang="en-US" sz="1600" dirty="0">
+                <a:solidFill>
+                  <a:srgbClr val="1F2937"/>
+                </a:solidFill>
+                <a:latin typeface="Arial" pitchFamily="34" charset="0"/>
+                <a:ea typeface="Arial" pitchFamily="34" charset="-122"/>
+                <a:cs typeface="Arial" pitchFamily="34" charset="-120"/>
+              </a:rPr>
+              <a:t>I show you a </a:t>
+            </a:r>
+            <a:r>
+              <a:rPr lang="en-US" sz="1600" b="1" dirty="0">
+                <a:solidFill>
+                  <a:srgbClr val="16A34A"/>
+                </a:solidFill>
+                <a:latin typeface="Arial" pitchFamily="34" charset="0"/>
+                <a:ea typeface="Arial" pitchFamily="34" charset="-122"/>
+                <a:cs typeface="Arial" pitchFamily="34" charset="-120"/>
+              </a:rPr>
+              <a:t>recorded demo</a:t>
+            </a:r>
+            <a:r>
+              <a:rPr lang="en-US" sz="1600" b="1" dirty="0"/>
+              <a:t> </a:t>
+            </a:r>
+            <a:r>
+              <a:rPr lang="en-US" sz="1600" dirty="0">
+                <a:solidFill>
+                  <a:srgbClr val="1F2937"/>
+                </a:solidFill>
+                <a:latin typeface="Arial" pitchFamily="34" charset="0"/>
+                <a:ea typeface="Arial" pitchFamily="34" charset="-122"/>
+                <a:cs typeface="Arial" pitchFamily="34" charset="-120"/>
+              </a:rPr>
+              <a:t>— real prompts, real outputs</a:t>
+            </a:r>
+            <a:r>
+              <a:rPr lang="en-US" sz="1600" dirty="0"/>
+              <a:t> </a:t>
+            </a:r>
+            <a:r>
+              <a:rPr lang="en-US" sz="1600" b="1" dirty="0">
+                <a:solidFill>
+                  <a:srgbClr val="16A34A"/>
+                </a:solidFill>
+                <a:latin typeface="Arial" pitchFamily="34" charset="0"/>
+                <a:ea typeface="Arial" pitchFamily="34" charset="-122"/>
+                <a:cs typeface="Arial" pitchFamily="34" charset="-120"/>
+              </a:rPr>
+              <a:t>YOU do it</a:t>
+            </a:r>
+            <a:r>
+              <a:rPr lang="en-US" sz="1600" b="1" dirty="0"/>
+              <a:t> </a:t>
+            </a:r>
+            <a:r>
+              <a:rPr lang="en-US" sz="1600" dirty="0">
+                <a:solidFill>
+                  <a:srgbClr val="1F2937"/>
+                </a:solidFill>
+                <a:latin typeface="Arial" pitchFamily="34" charset="0"/>
+                <a:ea typeface="Arial" pitchFamily="34" charset="-122"/>
+                <a:cs typeface="Arial" pitchFamily="34" charset="-120"/>
+              </a:rPr>
+              <a:t>: </a:t>
+            </a:r>
+          </a:p>
+          <a:p>
+            <a:pPr>
+              <a:lnSpc>
+                <a:spcPct val="140000"/>
+              </a:lnSpc>
+              <a:spcAft>
+                <a:spcPts val="800"/>
+              </a:spcAft>
+              <a:buSzPct val="100000"/>
+            </a:pPr>
+            <a:endParaRPr lang="en-US" sz="1600" dirty="0"/>
+          </a:p>
+          <a:p>
+            <a:pPr>
+              <a:lnSpc>
+                <a:spcPct val="140000"/>
+              </a:lnSpc>
+              <a:spcAft>
+                <a:spcPts val="800"/>
+              </a:spcAft>
+              <a:buSzPct val="100000"/>
+            </a:pPr>
+            <a:r>
+              <a:rPr lang="en-US" sz="1600" b="1" dirty="0">
+                <a:solidFill>
+                  <a:srgbClr val="16A34A"/>
+                </a:solidFill>
+                <a:latin typeface="Courier New" pitchFamily="34" charset="0"/>
+                <a:ea typeface="Courier New" pitchFamily="34" charset="-122"/>
+                <a:cs typeface="Courier New" pitchFamily="34" charset="-120"/>
+              </a:rPr>
+              <a:t>	/module-1 </a:t>
+            </a:r>
+          </a:p>
+          <a:p>
+            <a:pPr>
+              <a:lnSpc>
+                <a:spcPct val="140000"/>
+              </a:lnSpc>
+              <a:spcAft>
+                <a:spcPts val="800"/>
+              </a:spcAft>
+              <a:buSzPct val="100000"/>
+            </a:pPr>
+            <a:r>
+              <a:rPr lang="en-US" sz="1600" b="1" dirty="0">
+                <a:solidFill>
+                  <a:srgbClr val="16A34A"/>
+                </a:solidFill>
+                <a:latin typeface="Courier New" pitchFamily="34" charset="0"/>
+                <a:ea typeface="Courier New" pitchFamily="34" charset="-122"/>
+                <a:cs typeface="Courier New" pitchFamily="34" charset="-120"/>
+              </a:rPr>
+              <a:t>	… </a:t>
+            </a:r>
+          </a:p>
+          <a:p>
+            <a:pPr>
+              <a:lnSpc>
+                <a:spcPct val="140000"/>
+              </a:lnSpc>
+              <a:spcAft>
+                <a:spcPts val="800"/>
+              </a:spcAft>
+              <a:buSzPct val="100000"/>
+            </a:pPr>
+            <a:r>
+              <a:rPr lang="en-US" sz="1600" b="1" dirty="0">
+                <a:solidFill>
+                  <a:srgbClr val="16A34A"/>
+                </a:solidFill>
+                <a:latin typeface="Courier New" pitchFamily="34" charset="0"/>
+                <a:ea typeface="Courier New" pitchFamily="34" charset="-122"/>
+                <a:cs typeface="Courier New" pitchFamily="34" charset="-120"/>
+              </a:rPr>
+              <a:t>	/module-4</a:t>
+            </a:r>
+          </a:p>
+          <a:p>
+            <a:pPr>
+              <a:lnSpc>
+                <a:spcPct val="140000"/>
+              </a:lnSpc>
+              <a:spcAft>
+                <a:spcPts val="800"/>
+              </a:spcAft>
+              <a:buSzPct val="100000"/>
+            </a:pPr>
             <a:endParaRPr lang="en-US" sz="1600" dirty="0"/>
           </a:p>
           <a:p>
@@ -8718,189 +8307,8 @@
                 <a:ea typeface="Arial" pitchFamily="34" charset="-122"/>
                 <a:cs typeface="Arial" pitchFamily="34" charset="-120"/>
               </a:rPr>
-              <a:t> (~2 min per concept)</a:t>
-            </a:r>
-            <a:endParaRPr lang="en-US" sz="1600" dirty="0"/>
-          </a:p>
-          <a:p>
-            <a:pPr marL="342900" indent="-342900">
-              <a:lnSpc>
-                <a:spcPct val="140000"/>
-              </a:lnSpc>
-              <a:spcAft>
-                <a:spcPts val="800"/>
-              </a:spcAft>
-              <a:buSzPct val="100000"/>
-              <a:buChar char="•"/>
-            </a:pPr>
-            <a:r>
-              <a:rPr lang="en-US" sz="1600" dirty="0">
-                <a:solidFill>
-                  <a:srgbClr val="1F2937"/>
-                </a:solidFill>
-                <a:latin typeface="Arial" pitchFamily="34" charset="0"/>
-                <a:ea typeface="Arial" pitchFamily="34" charset="-122"/>
-                <a:cs typeface="Arial" pitchFamily="34" charset="-120"/>
-              </a:rPr>
-              <a:t>I show you a </a:t>
-            </a:r>
-            <a:endParaRPr lang="en-US" sz="1600" dirty="0"/>
-          </a:p>
-          <a:p>
-            <a:pPr marL="342900" indent="-342900">
-              <a:lnSpc>
-                <a:spcPct val="140000"/>
-              </a:lnSpc>
-              <a:spcAft>
-                <a:spcPts val="800"/>
-              </a:spcAft>
-              <a:buSzPct val="100000"/>
-              <a:buChar char="•"/>
-            </a:pPr>
-            <a:r>
-              <a:rPr lang="en-US" sz="1600" b="1" dirty="0">
-                <a:solidFill>
-                  <a:srgbClr val="16A34A"/>
-                </a:solidFill>
-                <a:latin typeface="Arial" pitchFamily="34" charset="0"/>
-                <a:ea typeface="Arial" pitchFamily="34" charset="-122"/>
-                <a:cs typeface="Arial" pitchFamily="34" charset="-120"/>
-              </a:rPr>
-              <a:t>recorded demo</a:t>
-            </a:r>
-            <a:endParaRPr lang="en-US" sz="1600" dirty="0"/>
-          </a:p>
-          <a:p>
-            <a:pPr marL="342900" indent="-342900">
-              <a:lnSpc>
-                <a:spcPct val="140000"/>
-              </a:lnSpc>
-              <a:spcAft>
-                <a:spcPts val="800"/>
-              </a:spcAft>
-              <a:buSzPct val="100000"/>
-              <a:buChar char="•"/>
-            </a:pPr>
-            <a:r>
-              <a:rPr lang="en-US" sz="1600" dirty="0">
-                <a:solidFill>
-                  <a:srgbClr val="1F2937"/>
-                </a:solidFill>
-                <a:latin typeface="Arial" pitchFamily="34" charset="0"/>
-                <a:ea typeface="Arial" pitchFamily="34" charset="-122"/>
-                <a:cs typeface="Arial" pitchFamily="34" charset="-120"/>
-              </a:rPr>
-              <a:t> — real prompts, real outputs</a:t>
-            </a:r>
-            <a:endParaRPr lang="en-US" sz="1600" dirty="0"/>
-          </a:p>
-          <a:p>
-            <a:pPr marL="342900" indent="-342900">
-              <a:lnSpc>
-                <a:spcPct val="140000"/>
-              </a:lnSpc>
-              <a:spcAft>
-                <a:spcPts val="800"/>
-              </a:spcAft>
-              <a:buSzPct val="100000"/>
-              <a:buChar char="•"/>
-            </a:pPr>
-            <a:r>
-              <a:rPr lang="en-US" sz="1600" b="1" dirty="0">
-                <a:solidFill>
-                  <a:srgbClr val="16A34A"/>
-                </a:solidFill>
-                <a:latin typeface="Arial" pitchFamily="34" charset="0"/>
-                <a:ea typeface="Arial" pitchFamily="34" charset="-122"/>
-                <a:cs typeface="Arial" pitchFamily="34" charset="-120"/>
-              </a:rPr>
-              <a:t>YOU do it</a:t>
-            </a:r>
-            <a:endParaRPr lang="en-US" sz="1600" dirty="0"/>
-          </a:p>
-          <a:p>
-            <a:pPr marL="342900" indent="-342900">
-              <a:lnSpc>
-                <a:spcPct val="140000"/>
-              </a:lnSpc>
-              <a:spcAft>
-                <a:spcPts val="800"/>
-              </a:spcAft>
-              <a:buSzPct val="100000"/>
-              <a:buChar char="•"/>
-            </a:pPr>
-            <a:r>
-              <a:rPr lang="en-US" sz="1600" dirty="0">
-                <a:solidFill>
-                  <a:srgbClr val="1F2937"/>
-                </a:solidFill>
-                <a:latin typeface="Arial" pitchFamily="34" charset="0"/>
-                <a:ea typeface="Arial" pitchFamily="34" charset="-122"/>
-                <a:cs typeface="Arial" pitchFamily="34" charset="-120"/>
-              </a:rPr>
-              <a:t> — an AI tutor guides you: </a:t>
-            </a:r>
-            <a:endParaRPr lang="en-US" sz="1600" dirty="0"/>
-          </a:p>
-          <a:p>
-            <a:pPr marL="342900" indent="-342900">
-              <a:lnSpc>
-                <a:spcPct val="140000"/>
-              </a:lnSpc>
-              <a:spcAft>
-                <a:spcPts val="800"/>
-              </a:spcAft>
-              <a:buSzPct val="100000"/>
-              <a:buChar char="•"/>
-            </a:pPr>
-            <a:r>
-              <a:rPr lang="en-US" sz="1600" b="1" dirty="0">
-                <a:solidFill>
-                  <a:srgbClr val="16A34A"/>
-                </a:solidFill>
-                <a:latin typeface="Courier New" pitchFamily="34" charset="0"/>
-                <a:ea typeface="Courier New" pitchFamily="34" charset="-122"/>
-                <a:cs typeface="Courier New" pitchFamily="34" charset="-120"/>
-              </a:rPr>
-              <a:t>/module-1 … /module-4</a:t>
-            </a:r>
-            <a:endParaRPr lang="en-US" sz="1600" dirty="0"/>
-          </a:p>
-          <a:p>
-            <a:pPr marL="342900" indent="-342900">
-              <a:lnSpc>
-                <a:spcPct val="140000"/>
-              </a:lnSpc>
-              <a:spcAft>
-                <a:spcPts val="800"/>
-              </a:spcAft>
-              <a:buSzPct val="100000"/>
-              <a:buChar char="•"/>
-            </a:pPr>
-            <a:r>
-              <a:rPr lang="en-US" sz="1600" dirty="0">
-                <a:solidFill>
-                  <a:srgbClr val="1F2937"/>
-                </a:solidFill>
-                <a:latin typeface="Arial" pitchFamily="34" charset="0"/>
-                <a:ea typeface="Arial" pitchFamily="34" charset="-122"/>
-                <a:cs typeface="Arial" pitchFamily="34" charset="-120"/>
-              </a:rPr>
               <a:t>No compiling, no SDKs — </a:t>
             </a:r>
-            <a:endParaRPr lang="en-US" sz="1600" dirty="0"/>
-          </a:p>
-          <a:p>
-            <a:pPr marL="342900" indent="-342900">
-              <a:lnSpc>
-                <a:spcPct val="140000"/>
-              </a:lnSpc>
-              <a:spcAft>
-                <a:spcPts val="800"/>
-              </a:spcAft>
-              <a:buSzPct val="100000"/>
-              <a:buChar char="•"/>
-            </a:pPr>
             <a:r>
               <a:rPr lang="en-US" sz="1600" b="1" dirty="0">
                 <a:solidFill>
@@ -8936,7 +8344,7 @@
           </a:prstGeom>
           <a:extLst>
             <a:ext uri="{C572A759-6A51-4108-AA02-DFA0A04FC94B}">
-              <ma14:wrappingTextBoxFlag xmlns:ma14="http://schemas.microsoft.com/office/mac/drawingml/2011/main" val="0"/>
+              <ma14:wrappingTextBoxFlag xmlns="" xmlns:ma14="http://schemas.microsoft.com/office/mac/drawingml/2011/main" val="0"/>
             </a:ext>
           </a:extLst>
         </p:spPr>
@@ -8954,7 +8362,7 @@
           <a:p>
             <a:pPr algn="l"/>
             <a:fld id="{F7021451-1387-4CA6-816F-3879F97B5CBC}" type="slidenum">
-              <a:rPr b="0" lang="en-US"/>
+              <a:rPr lang="en-US" b="0"/>
               <a:t>2</a:t>
             </a:fld>
             <a:endParaRPr lang="en-US"/>
@@ -9007,7 +8415,7 @@
           <a:bodyPr wrap="square" rtlCol="0" anchor="ctr"/>
           <a:lstStyle/>
           <a:p>
-            <a:pPr algn="r" indent="0" marL="0">
+            <a:pPr marL="0" indent="0" algn="r">
               <a:buNone/>
             </a:pPr>
             <a:r>
@@ -9021,9 +8429,6 @@
               </a:rPr>
               <a:t>x</a:t>
             </a:r>
-            <a:pPr algn="r" indent="0" marL="0">
-              <a:buNone/>
-            </a:pPr>
             <a:r>
               <a:rPr lang="en-US" sz="900" b="1" dirty="0">
                 <a:solidFill>
@@ -9035,9 +8440,6 @@
               </a:rPr>
               <a:t>P</a:t>
             </a:r>
-            <a:pPr algn="r" indent="0" marL="0">
-              <a:buNone/>
-            </a:pPr>
             <a:r>
               <a:rPr lang="en-US" sz="900" b="1" dirty="0">
                 <a:solidFill>
@@ -9074,7 +8476,7 @@
           <a:bodyPr wrap="square" rtlCol="0" anchor="ctr"/>
           <a:lstStyle/>
           <a:p>
-            <a:pPr algn="ctr" indent="0" marL="0">
+            <a:pPr marL="0" indent="0" algn="ctr">
               <a:buNone/>
             </a:pPr>
             <a:r>
@@ -9113,7 +8515,7 @@
           <a:bodyPr wrap="square" rtlCol="0" anchor="ctr"/>
           <a:lstStyle/>
           <a:p>
-            <a:pPr algn="ctr" indent="0" marL="0">
+            <a:pPr marL="0" indent="0" algn="ctr">
               <a:buNone/>
             </a:pPr>
             <a:r>
@@ -9152,7 +8554,7 @@
           <a:bodyPr wrap="square" rtlCol="0" anchor="ctr"/>
           <a:lstStyle/>
           <a:p>
-            <a:pPr algn="ctr" indent="0" marL="0">
+            <a:pPr marL="0" indent="0" algn="ctr">
               <a:buNone/>
             </a:pPr>
             <a:r>
@@ -9216,7 +8618,7 @@
           <a:bodyPr wrap="square" rtlCol="0" anchor="ctr"/>
           <a:lstStyle/>
           <a:p>
-            <a:pPr algn="r" indent="0" marL="0">
+            <a:pPr marL="0" indent="0" algn="r">
               <a:buNone/>
             </a:pPr>
             <a:r>
@@ -9230,9 +8632,6 @@
               </a:rPr>
               <a:t>x</a:t>
             </a:r>
-            <a:pPr algn="r" indent="0" marL="0">
-              <a:buNone/>
-            </a:pPr>
             <a:r>
               <a:rPr lang="en-US" sz="900" b="1" dirty="0">
                 <a:solidFill>
@@ -9244,9 +8643,6 @@
               </a:rPr>
               <a:t>P</a:t>
             </a:r>
-            <a:pPr algn="r" indent="0" marL="0">
-              <a:buNone/>
-            </a:pPr>
             <a:r>
               <a:rPr lang="en-US" sz="900" b="1" dirty="0">
                 <a:solidFill>
@@ -9283,7 +8679,7 @@
           <a:bodyPr wrap="square" rtlCol="0" anchor="ctr"/>
           <a:lstStyle/>
           <a:p>
-            <a:pPr algn="l" indent="0" marL="0">
+            <a:pPr marL="0" indent="0" algn="l">
               <a:buNone/>
             </a:pPr>
             <a:r>
@@ -9320,10 +8716,17 @@
           </a:solidFill>
           <a:ln/>
         </p:spPr>
+        <p:txBody>
+          <a:bodyPr/>
+          <a:lstStyle/>
+          <a:p>
+            <a:endParaRPr lang="en-US"/>
+          </a:p>
+        </p:txBody>
       </p:sp>
       <p:graphicFrame>
         <p:nvGraphicFramePr>
-          <p:cNvPr id="4" name="Table 0"/>
+          <p:cNvPr id="5" name="Table 0"/>
           <p:cNvGraphicFramePr>
             <a:graphicFrameLocks noGrp="1"/>
           </p:cNvGraphicFramePr>
@@ -9337,16 +8740,34 @@
         </p:nvGraphicFramePr>
         <p:xfrm>
           <a:off x="457200" y="1188720"/>
-          <a:ext cx="11274552" cy="914400"/>
+          <a:ext cx="11274552" cy="2926080"/>
         </p:xfrm>
         <a:graphic>
           <a:graphicData uri="http://schemas.openxmlformats.org/drawingml/2006/table">
             <a:tbl>
               <a:tblPr/>
               <a:tblGrid>
-                <a:gridCol w="1371600"/>
-                <a:gridCol w="2926080"/>
-                <a:gridCol w="6976872"/>
+                <a:gridCol w="1371600">
+                  <a:extLst>
+                    <a:ext uri="{9D8B030D-6E8A-4147-A177-3AD203B41FA5}">
+                      <a16:colId xmlns:a16="http://schemas.microsoft.com/office/drawing/2014/main" val="20000"/>
+                    </a:ext>
+                  </a:extLst>
+                </a:gridCol>
+                <a:gridCol w="2926080">
+                  <a:extLst>
+                    <a:ext uri="{9D8B030D-6E8A-4147-A177-3AD203B41FA5}">
+                      <a16:colId xmlns:a16="http://schemas.microsoft.com/office/drawing/2014/main" val="20001"/>
+                    </a:ext>
+                  </a:extLst>
+                </a:gridCol>
+                <a:gridCol w="6976872">
+                  <a:extLst>
+                    <a:ext uri="{9D8B030D-6E8A-4147-A177-3AD203B41FA5}">
+                      <a16:colId xmlns:a16="http://schemas.microsoft.com/office/drawing/2014/main" val="20002"/>
+                    </a:ext>
+                  </a:extLst>
+                </a:gridCol>
               </a:tblGrid>
               <a:tr h="365760">
                 <a:tc>
@@ -9354,7 +8775,7 @@
                     <a:bodyPr/>
                     <a:lstStyle/>
                     <a:p>
-                      <a:pPr indent="0" marL="0">
+                      <a:pPr marL="0" indent="0">
                         <a:buNone/>
                       </a:pPr>
                       <a:r>
@@ -9422,7 +8843,7 @@
                     <a:bodyPr/>
                     <a:lstStyle/>
                     <a:p>
-                      <a:pPr indent="0" marL="0">
+                      <a:pPr marL="0" indent="0">
                         <a:buNone/>
                       </a:pPr>
                       <a:r>
@@ -9490,7 +8911,7 @@
                     <a:bodyPr/>
                     <a:lstStyle/>
                     <a:p>
-                      <a:pPr indent="0" marL="0">
+                      <a:pPr marL="0" indent="0">
                         <a:buNone/>
                       </a:pPr>
                       <a:r>
@@ -9553,6 +8974,11 @@
                     </a:solidFill>
                   </a:tcPr>
                 </a:tc>
+                <a:extLst>
+                  <a:ext uri="{0D108BD9-81ED-4DB2-BD59-A6C34878D82A}">
+                    <a16:rowId xmlns:a16="http://schemas.microsoft.com/office/drawing/2014/main" val="10000"/>
+                  </a:ext>
+                </a:extLst>
               </a:tr>
               <a:tr h="365760">
                 <a:tc>
@@ -9560,7 +8986,7 @@
                     <a:bodyPr/>
                     <a:lstStyle/>
                     <a:p>
-                      <a:pPr indent="0" marL="0">
+                      <a:pPr marL="0" indent="0">
                         <a:buNone/>
                       </a:pPr>
                       <a:r>
@@ -9628,7 +9054,7 @@
                     <a:bodyPr/>
                     <a:lstStyle/>
                     <a:p>
-                      <a:pPr indent="0" marL="0">
+                      <a:pPr marL="0" indent="0">
                         <a:buNone/>
                       </a:pPr>
                       <a:r>
@@ -9696,7 +9122,7 @@
                     <a:bodyPr/>
                     <a:lstStyle/>
                     <a:p>
-                      <a:pPr indent="0" marL="0">
+                      <a:pPr marL="0" indent="0">
                         <a:buNone/>
                       </a:pPr>
                       <a:r>
@@ -9759,6 +9185,11 @@
                     </a:solidFill>
                   </a:tcPr>
                 </a:tc>
+                <a:extLst>
+                  <a:ext uri="{0D108BD9-81ED-4DB2-BD59-A6C34878D82A}">
+                    <a16:rowId xmlns:a16="http://schemas.microsoft.com/office/drawing/2014/main" val="10001"/>
+                  </a:ext>
+                </a:extLst>
               </a:tr>
               <a:tr h="365760">
                 <a:tc>
@@ -9766,7 +9197,7 @@
                     <a:bodyPr/>
                     <a:lstStyle/>
                     <a:p>
-                      <a:pPr indent="0" marL="0">
+                      <a:pPr marL="0" indent="0">
                         <a:buNone/>
                       </a:pPr>
                       <a:r>
@@ -9834,7 +9265,7 @@
                     <a:bodyPr/>
                     <a:lstStyle/>
                     <a:p>
-                      <a:pPr indent="0" marL="0">
+                      <a:pPr marL="0" indent="0">
                         <a:buNone/>
                       </a:pPr>
                       <a:r>
@@ -9902,7 +9333,7 @@
                     <a:bodyPr/>
                     <a:lstStyle/>
                     <a:p>
-                      <a:pPr indent="0" marL="0">
+                      <a:pPr marL="0" indent="0">
                         <a:buNone/>
                       </a:pPr>
                       <a:r>
@@ -9965,6 +9396,11 @@
                     </a:solidFill>
                   </a:tcPr>
                 </a:tc>
+                <a:extLst>
+                  <a:ext uri="{0D108BD9-81ED-4DB2-BD59-A6C34878D82A}">
+                    <a16:rowId xmlns:a16="http://schemas.microsoft.com/office/drawing/2014/main" val="10002"/>
+                  </a:ext>
+                </a:extLst>
               </a:tr>
               <a:tr h="365760">
                 <a:tc>
@@ -9972,7 +9408,7 @@
                     <a:bodyPr/>
                     <a:lstStyle/>
                     <a:p>
-                      <a:pPr indent="0" marL="0">
+                      <a:pPr marL="0" indent="0">
                         <a:buNone/>
                       </a:pPr>
                       <a:r>
@@ -10040,7 +9476,7 @@
                     <a:bodyPr/>
                     <a:lstStyle/>
                     <a:p>
-                      <a:pPr indent="0" marL="0">
+                      <a:pPr marL="0" indent="0">
                         <a:buNone/>
                       </a:pPr>
                       <a:r>
@@ -10108,7 +9544,7 @@
                     <a:bodyPr/>
                     <a:lstStyle/>
                     <a:p>
-                      <a:pPr indent="0" marL="0">
+                      <a:pPr marL="0" indent="0">
                         <a:buNone/>
                       </a:pPr>
                       <a:r>
@@ -10171,6 +9607,11 @@
                     </a:solidFill>
                   </a:tcPr>
                 </a:tc>
+                <a:extLst>
+                  <a:ext uri="{0D108BD9-81ED-4DB2-BD59-A6C34878D82A}">
+                    <a16:rowId xmlns:a16="http://schemas.microsoft.com/office/drawing/2014/main" val="10003"/>
+                  </a:ext>
+                </a:extLst>
               </a:tr>
               <a:tr h="365760">
                 <a:tc>
@@ -10178,7 +9619,7 @@
                     <a:bodyPr/>
                     <a:lstStyle/>
                     <a:p>
-                      <a:pPr indent="0" marL="0">
+                      <a:pPr marL="0" indent="0">
                         <a:buNone/>
                       </a:pPr>
                       <a:r>
@@ -10246,7 +9687,7 @@
                     <a:bodyPr/>
                     <a:lstStyle/>
                     <a:p>
-                      <a:pPr indent="0" marL="0">
+                      <a:pPr marL="0" indent="0">
                         <a:buNone/>
                       </a:pPr>
                       <a:r>
@@ -10314,7 +9755,7 @@
                     <a:bodyPr/>
                     <a:lstStyle/>
                     <a:p>
-                      <a:pPr indent="0" marL="0">
+                      <a:pPr marL="0" indent="0">
                         <a:buNone/>
                       </a:pPr>
                       <a:r>
@@ -10377,6 +9818,11 @@
                     </a:solidFill>
                   </a:tcPr>
                 </a:tc>
+                <a:extLst>
+                  <a:ext uri="{0D108BD9-81ED-4DB2-BD59-A6C34878D82A}">
+                    <a16:rowId xmlns:a16="http://schemas.microsoft.com/office/drawing/2014/main" val="10004"/>
+                  </a:ext>
+                </a:extLst>
               </a:tr>
               <a:tr h="365760">
                 <a:tc>
@@ -10384,7 +9830,7 @@
                     <a:bodyPr/>
                     <a:lstStyle/>
                     <a:p>
-                      <a:pPr indent="0" marL="0">
+                      <a:pPr marL="0" indent="0">
                         <a:buNone/>
                       </a:pPr>
                       <a:r>
@@ -10452,7 +9898,7 @@
                     <a:bodyPr/>
                     <a:lstStyle/>
                     <a:p>
-                      <a:pPr indent="0" marL="0">
+                      <a:pPr marL="0" indent="0">
                         <a:buNone/>
                       </a:pPr>
                       <a:r>
@@ -10520,7 +9966,7 @@
                     <a:bodyPr/>
                     <a:lstStyle/>
                     <a:p>
-                      <a:pPr indent="0" marL="0">
+                      <a:pPr marL="0" indent="0">
                         <a:buNone/>
                       </a:pPr>
                       <a:r>
@@ -10583,6 +10029,11 @@
                     </a:solidFill>
                   </a:tcPr>
                 </a:tc>
+                <a:extLst>
+                  <a:ext uri="{0D108BD9-81ED-4DB2-BD59-A6C34878D82A}">
+                    <a16:rowId xmlns:a16="http://schemas.microsoft.com/office/drawing/2014/main" val="10005"/>
+                  </a:ext>
+                </a:extLst>
               </a:tr>
               <a:tr h="365760">
                 <a:tc>
@@ -10590,7 +10041,7 @@
                     <a:bodyPr/>
                     <a:lstStyle/>
                     <a:p>
-                      <a:pPr indent="0" marL="0">
+                      <a:pPr marL="0" indent="0">
                         <a:buNone/>
                       </a:pPr>
                       <a:r>
@@ -10658,7 +10109,7 @@
                     <a:bodyPr/>
                     <a:lstStyle/>
                     <a:p>
-                      <a:pPr indent="0" marL="0">
+                      <a:pPr marL="0" indent="0">
                         <a:buNone/>
                       </a:pPr>
                       <a:r>
@@ -10726,7 +10177,7 @@
                     <a:bodyPr/>
                     <a:lstStyle/>
                     <a:p>
-                      <a:pPr indent="0" marL="0">
+                      <a:pPr marL="0" indent="0">
                         <a:buNone/>
                       </a:pPr>
                       <a:r>
@@ -10789,6 +10240,11 @@
                     </a:solidFill>
                   </a:tcPr>
                 </a:tc>
+                <a:extLst>
+                  <a:ext uri="{0D108BD9-81ED-4DB2-BD59-A6C34878D82A}">
+                    <a16:rowId xmlns:a16="http://schemas.microsoft.com/office/drawing/2014/main" val="10006"/>
+                  </a:ext>
+                </a:extLst>
               </a:tr>
               <a:tr h="365760">
                 <a:tc>
@@ -10796,7 +10252,7 @@
                     <a:bodyPr/>
                     <a:lstStyle/>
                     <a:p>
-                      <a:pPr indent="0" marL="0">
+                      <a:pPr marL="0" indent="0">
                         <a:buNone/>
                       </a:pPr>
                       <a:r>
@@ -10864,7 +10320,7 @@
                     <a:bodyPr/>
                     <a:lstStyle/>
                     <a:p>
-                      <a:pPr indent="0" marL="0">
+                      <a:pPr marL="0" indent="0">
                         <a:buNone/>
                       </a:pPr>
                       <a:r>
@@ -10932,7 +10388,7 @@
                     <a:bodyPr/>
                     <a:lstStyle/>
                     <a:p>
-                      <a:pPr indent="0" marL="0">
+                      <a:pPr marL="0" indent="0">
                         <a:buNone/>
                       </a:pPr>
                       <a:r>
@@ -10995,6 +10451,11 @@
                     </a:solidFill>
                   </a:tcPr>
                 </a:tc>
+                <a:extLst>
+                  <a:ext uri="{0D108BD9-81ED-4DB2-BD59-A6C34878D82A}">
+                    <a16:rowId xmlns:a16="http://schemas.microsoft.com/office/drawing/2014/main" val="10007"/>
+                  </a:ext>
+                </a:extLst>
               </a:tr>
             </a:tbl>
           </a:graphicData>
@@ -11020,7 +10481,7 @@
           </a:prstGeom>
           <a:extLst>
             <a:ext uri="{C572A759-6A51-4108-AA02-DFA0A04FC94B}">
-              <ma14:wrappingTextBoxFlag xmlns:ma14="http://schemas.microsoft.com/office/mac/drawingml/2011/main" val="0"/>
+              <ma14:wrappingTextBoxFlag xmlns="" xmlns:ma14="http://schemas.microsoft.com/office/mac/drawingml/2011/main" val="0"/>
             </a:ext>
           </a:extLst>
         </p:spPr>
@@ -11038,7 +10499,7 @@
           <a:p>
             <a:pPr algn="l"/>
             <a:fld id="{F7021451-1387-4CA6-816F-3879F97B5CBC}" type="slidenum">
-              <a:rPr b="0" lang="en-US"/>
+              <a:rPr lang="en-US" b="0"/>
               <a:t>3</a:t>
             </a:fld>
             <a:endParaRPr lang="en-US"/>
@@ -11091,7 +10552,7 @@
           <a:bodyPr wrap="square" rtlCol="0" anchor="ctr"/>
           <a:lstStyle/>
           <a:p>
-            <a:pPr algn="r" indent="0" marL="0">
+            <a:pPr marL="0" indent="0" algn="r">
               <a:buNone/>
             </a:pPr>
             <a:r>
@@ -11105,9 +10566,6 @@
               </a:rPr>
               <a:t>x</a:t>
             </a:r>
-            <a:pPr algn="r" indent="0" marL="0">
-              <a:buNone/>
-            </a:pPr>
             <a:r>
               <a:rPr lang="en-US" sz="900" b="1" dirty="0">
                 <a:solidFill>
@@ -11119,9 +10577,6 @@
               </a:rPr>
               <a:t>P</a:t>
             </a:r>
-            <a:pPr algn="r" indent="0" marL="0">
-              <a:buNone/>
-            </a:pPr>
             <a:r>
               <a:rPr lang="en-US" sz="900" b="1" dirty="0">
                 <a:solidFill>
@@ -11158,7 +10613,7 @@
           <a:bodyPr wrap="square" rtlCol="0" anchor="ctr"/>
           <a:lstStyle/>
           <a:p>
-            <a:pPr algn="l" indent="0" marL="0">
+            <a:pPr marL="0" indent="0" algn="l">
               <a:buNone/>
             </a:pPr>
             <a:r>
@@ -11195,6 +10650,13 @@
           </a:solidFill>
           <a:ln/>
         </p:spPr>
+        <p:txBody>
+          <a:bodyPr/>
+          <a:lstStyle/>
+          <a:p>
+            <a:endParaRPr lang="en-US"/>
+          </a:p>
+        </p:txBody>
       </p:sp>
       <p:sp>
         <p:nvSpPr>
@@ -11217,7 +10679,7 @@
           <a:bodyPr wrap="square" rtlCol="0" anchor="t"/>
           <a:lstStyle/>
           <a:p>
-            <a:pPr indent="0" marL="0">
+            <a:pPr marL="0" indent="0">
               <a:lnSpc>
                 <a:spcPct val="130000"/>
               </a:lnSpc>
@@ -11240,7 +10702,125 @@
             <a:endParaRPr lang="en-US" sz="1700" dirty="0"/>
           </a:p>
           <a:p>
-            <a:pPr indent="0" marL="0">
+            <a:pPr marL="342900" indent="-342900">
+              <a:lnSpc>
+                <a:spcPct val="130000"/>
+              </a:lnSpc>
+              <a:spcAft>
+                <a:spcPts val="800"/>
+              </a:spcAft>
+              <a:buAutoNum type="arabicPeriod"/>
+            </a:pPr>
+            <a:r>
+              <a:rPr lang="en-US" sz="1600" b="1" dirty="0" err="1">
+                <a:solidFill>
+                  <a:srgbClr val="111827"/>
+                </a:solidFill>
+                <a:latin typeface="Arial" pitchFamily="34" charset="0"/>
+                <a:ea typeface="Arial" pitchFamily="34" charset="-122"/>
+                <a:cs typeface="Arial" pitchFamily="34" charset="-120"/>
+              </a:rPr>
+              <a:t>OpenCode</a:t>
+            </a:r>
+            <a:r>
+              <a:rPr lang="en-US" sz="1600" b="1" dirty="0">
+                <a:solidFill>
+                  <a:srgbClr val="111827"/>
+                </a:solidFill>
+                <a:latin typeface="Arial" pitchFamily="34" charset="0"/>
+                <a:ea typeface="Arial" pitchFamily="34" charset="-122"/>
+                <a:cs typeface="Arial" pitchFamily="34" charset="-120"/>
+              </a:rPr>
+              <a:t> Desktop — Windows (x64)</a:t>
+            </a:r>
+            <a:r>
+              <a:rPr lang="en-US" sz="1600" dirty="0">
+                <a:solidFill>
+                  <a:srgbClr val="1F2937"/>
+                </a:solidFill>
+                <a:latin typeface="Arial" pitchFamily="34" charset="0"/>
+                <a:ea typeface="Arial" pitchFamily="34" charset="-122"/>
+                <a:cs typeface="Arial" pitchFamily="34" charset="-120"/>
+              </a:rPr>
+              <a:t>  →  </a:t>
+            </a:r>
+            <a:r>
+              <a:rPr lang="en-US" sz="1600" dirty="0">
+                <a:solidFill>
+                  <a:srgbClr val="1F2937"/>
+                </a:solidFill>
+                <a:latin typeface="Courier New" pitchFamily="34" charset="0"/>
+                <a:ea typeface="Courier New" pitchFamily="34" charset="-122"/>
+                <a:cs typeface="Courier New" pitchFamily="34" charset="-120"/>
+              </a:rPr>
+              <a:t>opencode.ai/download</a:t>
+            </a:r>
+          </a:p>
+          <a:p>
+            <a:pPr marL="342900" indent="-342900">
+              <a:lnSpc>
+                <a:spcPct val="130000"/>
+              </a:lnSpc>
+              <a:spcAft>
+                <a:spcPts val="800"/>
+              </a:spcAft>
+              <a:buAutoNum type="arabicPeriod"/>
+            </a:pPr>
+            <a:r>
+              <a:rPr lang="en-US" sz="1600" b="1" dirty="0" err="1">
+                <a:solidFill>
+                  <a:srgbClr val="111827"/>
+                </a:solidFill>
+                <a:latin typeface="Arial" pitchFamily="34" charset="0"/>
+                <a:cs typeface="Arial" pitchFamily="34" charset="-120"/>
+              </a:rPr>
+              <a:t>Url</a:t>
+            </a:r>
+            <a:r>
+              <a:rPr lang="en-US" sz="1600" dirty="0">
+                <a:solidFill>
+                  <a:srgbClr val="1F2937"/>
+                </a:solidFill>
+                <a:latin typeface="Arial" pitchFamily="34" charset="0"/>
+                <a:ea typeface="Arial" pitchFamily="34" charset="-122"/>
+                <a:cs typeface="Arial" pitchFamily="34" charset="-120"/>
+              </a:rPr>
+              <a:t> →</a:t>
+            </a:r>
+            <a:r>
+              <a:rPr lang="en-US" sz="1600" dirty="0">
+                <a:solidFill>
+                  <a:srgbClr val="1F2937"/>
+                </a:solidFill>
+                <a:latin typeface="Courier New" pitchFamily="34" charset="0"/>
+                <a:cs typeface="Courier New" pitchFamily="34" charset="-120"/>
+              </a:rPr>
+              <a:t> http://</a:t>
+            </a:r>
+            <a:r>
+              <a:rPr lang="en-US" sz="1600" dirty="0" err="1">
+                <a:solidFill>
+                  <a:srgbClr val="1F2937"/>
+                </a:solidFill>
+                <a:latin typeface="Courier New" pitchFamily="34" charset="0"/>
+                <a:cs typeface="Courier New" pitchFamily="34" charset="-120"/>
+              </a:rPr>
+              <a:t>bit.ly</a:t>
+            </a:r>
+            <a:r>
+              <a:rPr lang="en-US" sz="1600" dirty="0">
+                <a:solidFill>
+                  <a:srgbClr val="1F2937"/>
+                </a:solidFill>
+                <a:latin typeface="Courier New" pitchFamily="34" charset="0"/>
+                <a:cs typeface="Courier New" pitchFamily="34" charset="-120"/>
+              </a:rPr>
+              <a:t>/4bcO6xk</a:t>
+            </a:r>
+            <a:endParaRPr lang="en-US" sz="1700" dirty="0"/>
+          </a:p>
+          <a:p>
+            <a:pPr marL="0" indent="0">
               <a:lnSpc>
                 <a:spcPct val="130000"/>
               </a:lnSpc>
@@ -11258,17 +10838,8 @@
                 <a:ea typeface="Arial" pitchFamily="34" charset="-122"/>
                 <a:cs typeface="Arial" pitchFamily="34" charset="-120"/>
               </a:rPr>
-              <a:t>1.  </a:t>
-            </a:r>
-            <a:pPr indent="0" marL="0">
-              <a:lnSpc>
-                <a:spcPct val="130000"/>
-              </a:lnSpc>
-              <a:spcAft>
-                <a:spcPts val="800"/>
-              </a:spcAft>
-              <a:buNone/>
-            </a:pPr>
+              <a:t>3.   </a:t>
+            </a:r>
             <a:r>
               <a:rPr lang="en-US" sz="1600" b="1" dirty="0">
                 <a:solidFill>
@@ -11278,17 +10849,8 @@
                 <a:ea typeface="Arial" pitchFamily="34" charset="-122"/>
                 <a:cs typeface="Arial" pitchFamily="34" charset="-120"/>
               </a:rPr>
-              <a:t>OpenCode Desktop — Windows (x64)</a:t>
-            </a:r>
-            <a:pPr indent="0" marL="0">
-              <a:lnSpc>
-                <a:spcPct val="130000"/>
-              </a:lnSpc>
-              <a:spcAft>
-                <a:spcPts val="800"/>
-              </a:spcAft>
-              <a:buNone/>
-            </a:pPr>
+              <a:t>This repo</a:t>
+            </a:r>
             <a:r>
               <a:rPr lang="en-US" sz="1600" dirty="0">
                 <a:solidFill>
@@ -11300,15 +10862,6 @@
               </a:rPr>
               <a:t>  →  </a:t>
             </a:r>
-            <a:pPr indent="0" marL="0">
-              <a:lnSpc>
-                <a:spcPct val="130000"/>
-              </a:lnSpc>
-              <a:spcAft>
-                <a:spcPts val="800"/>
-              </a:spcAft>
-              <a:buNone/>
-            </a:pPr>
             <a:r>
               <a:rPr lang="en-US" sz="1600" dirty="0">
                 <a:solidFill>
@@ -11318,82 +10871,10 @@
                 <a:ea typeface="Courier New" pitchFamily="34" charset="-122"/>
                 <a:cs typeface="Courier New" pitchFamily="34" charset="-120"/>
               </a:rPr>
-              <a:t>opencode.ai/download</a:t>
-            </a:r>
-            <a:endParaRPr lang="en-US" sz="1700" dirty="0"/>
-          </a:p>
-          <a:p>
-            <a:pPr indent="0" marL="0">
-              <a:lnSpc>
-                <a:spcPct val="130000"/>
-              </a:lnSpc>
-              <a:spcAft>
-                <a:spcPts val="800"/>
-              </a:spcAft>
-              <a:buNone/>
-            </a:pPr>
-            <a:r>
-              <a:rPr lang="en-US" sz="1600" b="1" dirty="0">
-                <a:solidFill>
-                  <a:srgbClr val="16A34A"/>
-                </a:solidFill>
-                <a:latin typeface="Arial" pitchFamily="34" charset="0"/>
-                <a:ea typeface="Arial" pitchFamily="34" charset="-122"/>
-                <a:cs typeface="Arial" pitchFamily="34" charset="-120"/>
-              </a:rPr>
-              <a:t>2.  </a:t>
-            </a:r>
-            <a:pPr indent="0" marL="0">
-              <a:lnSpc>
-                <a:spcPct val="130000"/>
-              </a:lnSpc>
-              <a:spcAft>
-                <a:spcPts val="800"/>
-              </a:spcAft>
-              <a:buNone/>
-            </a:pPr>
-            <a:r>
-              <a:rPr lang="en-US" sz="1600" b="1" dirty="0">
-                <a:solidFill>
-                  <a:srgbClr val="111827"/>
-                </a:solidFill>
-                <a:latin typeface="Arial" pitchFamily="34" charset="0"/>
-                <a:ea typeface="Arial" pitchFamily="34" charset="-122"/>
-                <a:cs typeface="Arial" pitchFamily="34" charset="-120"/>
-              </a:rPr>
-              <a:t>This repo</a:t>
-            </a:r>
-            <a:pPr indent="0" marL="0">
-              <a:lnSpc>
-                <a:spcPct val="130000"/>
-              </a:lnSpc>
-              <a:spcAft>
-                <a:spcPts val="800"/>
-              </a:spcAft>
-              <a:buNone/>
-            </a:pPr>
-            <a:r>
-              <a:rPr lang="en-US" sz="1600" dirty="0">
-                <a:solidFill>
-                  <a:srgbClr val="1F2937"/>
-                </a:solidFill>
-                <a:latin typeface="Arial" pitchFamily="34" charset="0"/>
-                <a:ea typeface="Arial" pitchFamily="34" charset="-122"/>
-                <a:cs typeface="Arial" pitchFamily="34" charset="-120"/>
-              </a:rPr>
-              <a:t>  →  </a:t>
-            </a:r>
-            <a:pPr indent="0" marL="0">
-              <a:lnSpc>
-                <a:spcPct val="130000"/>
-              </a:lnSpc>
-              <a:spcAft>
-                <a:spcPts val="800"/>
-              </a:spcAft>
-              <a:buNone/>
-            </a:pPr>
-            <a:r>
-              <a:rPr lang="en-US" sz="1600" dirty="0">
+              <a:t>git clone https://</a:t>
+            </a:r>
+            <a:r>
+              <a:rPr lang="en-US" sz="1600" dirty="0" err="1">
                 <a:solidFill>
                   <a:srgbClr val="1F2937"/>
                 </a:solidFill>
@@ -11401,32 +10882,56 @@
                 <a:ea typeface="Courier New" pitchFamily="34" charset="-122"/>
                 <a:cs typeface="Courier New" pitchFamily="34" charset="-120"/>
               </a:rPr>
-              <a:t>git clone &lt;repo-url&gt;</a:t>
-            </a:r>
-            <a:pPr indent="0" marL="0">
-              <a:lnSpc>
-                <a:spcPct val="130000"/>
-              </a:lnSpc>
-              <a:spcAft>
-                <a:spcPts val="800"/>
-              </a:spcAft>
-              <a:buNone/>
-            </a:pPr>
+              <a:t>github.com</a:t>
+            </a:r>
             <a:r>
               <a:rPr lang="en-US" sz="1600" dirty="0">
                 <a:solidFill>
                   <a:srgbClr val="1F2937"/>
                 </a:solidFill>
-                <a:latin typeface="Arial" pitchFamily="34" charset="0"/>
-                <a:ea typeface="Arial" pitchFamily="34" charset="-122"/>
-                <a:cs typeface="Arial" pitchFamily="34" charset="-120"/>
-              </a:rPr>
-              <a:t>  ·  or  ·  GitHub → Code → Download ZIP</a:t>
+                <a:latin typeface="Courier New" pitchFamily="34" charset="0"/>
+                <a:ea typeface="Courier New" pitchFamily="34" charset="-122"/>
+                <a:cs typeface="Courier New" pitchFamily="34" charset="-120"/>
+              </a:rPr>
+              <a:t>/</a:t>
+            </a:r>
+            <a:r>
+              <a:rPr lang="en-US" sz="1600" dirty="0" err="1">
+                <a:solidFill>
+                  <a:srgbClr val="1F2937"/>
+                </a:solidFill>
+                <a:latin typeface="Courier New" pitchFamily="34" charset="0"/>
+                <a:ea typeface="Courier New" pitchFamily="34" charset="-122"/>
+                <a:cs typeface="Courier New" pitchFamily="34" charset="-120"/>
+              </a:rPr>
+              <a:t>JaviPege</a:t>
+            </a:r>
+            <a:r>
+              <a:rPr lang="en-US" sz="1600" dirty="0">
+                <a:solidFill>
+                  <a:srgbClr val="1F2937"/>
+                </a:solidFill>
+                <a:latin typeface="Courier New" pitchFamily="34" charset="0"/>
+                <a:ea typeface="Courier New" pitchFamily="34" charset="-122"/>
+                <a:cs typeface="Courier New" pitchFamily="34" charset="-120"/>
+              </a:rPr>
+              <a:t>/mundus-ai-programming-course</a:t>
+            </a:r>
+            <a:r>
+              <a:rPr lang="en-US" sz="1600" dirty="0">
+                <a:solidFill>
+                  <a:srgbClr val="1F2937"/>
+                </a:solidFill>
+                <a:latin typeface="Arial" pitchFamily="34" charset="0"/>
+                <a:ea typeface="Arial" pitchFamily="34" charset="-122"/>
+                <a:cs typeface="Arial" pitchFamily="34" charset="-120"/>
+              </a:rPr>
+              <a:t>  or   GitHub → Code → Download ZIP</a:t>
             </a:r>
             <a:endParaRPr lang="en-US" sz="1700" dirty="0"/>
           </a:p>
           <a:p>
-            <a:pPr indent="0" marL="0">
+            <a:pPr marL="0" indent="0">
               <a:lnSpc>
                 <a:spcPct val="130000"/>
               </a:lnSpc>
@@ -11443,12 +10948,6 @@
               </a:rPr>
               <a:t>Then: open </a:t>
             </a:r>
-            <a:pPr indent="0" marL="0">
-              <a:lnSpc>
-                <a:spcPct val="130000"/>
-              </a:lnSpc>
-              <a:buNone/>
-            </a:pPr>
             <a:r>
               <a:rPr lang="en-US" sz="1600" dirty="0">
                 <a:solidFill>
@@ -11460,12 +10959,6 @@
               </a:rPr>
               <a:t>starter/</a:t>
             </a:r>
-            <a:pPr indent="0" marL="0">
-              <a:lnSpc>
-                <a:spcPct val="130000"/>
-              </a:lnSpc>
-              <a:buNone/>
-            </a:pPr>
             <a:r>
               <a:rPr lang="en-US" sz="1600" dirty="0">
                 <a:solidFill>
@@ -11477,12 +10970,6 @@
               </a:rPr>
               <a:t> in OpenCode · pick a free model (</a:t>
             </a:r>
-            <a:pPr indent="0" marL="0">
-              <a:lnSpc>
-                <a:spcPct val="130000"/>
-              </a:lnSpc>
-              <a:buNone/>
-            </a:pPr>
             <a:r>
               <a:rPr lang="en-US" sz="1600" b="1" dirty="0">
                 <a:solidFill>
@@ -11494,12 +10981,6 @@
               </a:rPr>
               <a:t>Big Pickle</a:t>
             </a:r>
-            <a:pPr indent="0" marL="0">
-              <a:lnSpc>
-                <a:spcPct val="130000"/>
-              </a:lnSpc>
-              <a:buNone/>
-            </a:pPr>
             <a:r>
               <a:rPr lang="en-US" sz="1600" dirty="0">
                 <a:solidFill>
@@ -11536,6 +11017,13 @@
           </a:solidFill>
           <a:ln/>
         </p:spPr>
+        <p:txBody>
+          <a:bodyPr/>
+          <a:lstStyle/>
+          <a:p>
+            <a:endParaRPr lang="en-US"/>
+          </a:p>
+        </p:txBody>
       </p:sp>
       <p:sp>
         <p:nvSpPr>
@@ -11558,7 +11046,7 @@
           <a:bodyPr wrap="square" rtlCol="0" anchor="ctr"/>
           <a:lstStyle/>
           <a:p>
-            <a:pPr algn="l" indent="0" marL="0">
+            <a:pPr marL="0" indent="0" algn="l">
               <a:buNone/>
             </a:pPr>
             <a:r>
@@ -11597,7 +11085,7 @@
           <a:bodyPr wrap="square" rtlCol="0" anchor="ctr"/>
           <a:lstStyle/>
           <a:p>
-            <a:pPr algn="ctr" indent="0" marL="0">
+            <a:pPr marL="0" indent="0" algn="ctr">
               <a:buNone/>
             </a:pPr>
             <a:r>
@@ -11635,7 +11123,7 @@
           </a:prstGeom>
           <a:extLst>
             <a:ext uri="{C572A759-6A51-4108-AA02-DFA0A04FC94B}">
-              <ma14:wrappingTextBoxFlag xmlns:ma14="http://schemas.microsoft.com/office/mac/drawingml/2011/main" val="0"/>
+              <ma14:wrappingTextBoxFlag xmlns="" xmlns:ma14="http://schemas.microsoft.com/office/mac/drawingml/2011/main" val="0"/>
             </a:ext>
           </a:extLst>
         </p:spPr>
@@ -11653,7 +11141,7 @@
           <a:p>
             <a:pPr algn="l"/>
             <a:fld id="{F7021451-1387-4CA6-816F-3879F97B5CBC}" type="slidenum">
-              <a:rPr b="0" lang="en-US"/>
+              <a:rPr lang="en-US" b="0"/>
               <a:t>4</a:t>
             </a:fld>
             <a:endParaRPr lang="en-US"/>
@@ -11706,7 +11194,7 @@
           <a:bodyPr wrap="square" rtlCol="0" anchor="ctr"/>
           <a:lstStyle/>
           <a:p>
-            <a:pPr algn="r" indent="0" marL="0">
+            <a:pPr marL="0" indent="0" algn="r">
               <a:buNone/>
             </a:pPr>
             <a:r>
@@ -11720,9 +11208,6 @@
               </a:rPr>
               <a:t>x</a:t>
             </a:r>
-            <a:pPr algn="r" indent="0" marL="0">
-              <a:buNone/>
-            </a:pPr>
             <a:r>
               <a:rPr lang="en-US" sz="900" b="1" dirty="0">
                 <a:solidFill>
@@ -11734,9 +11219,6 @@
               </a:rPr>
               <a:t>P</a:t>
             </a:r>
-            <a:pPr algn="r" indent="0" marL="0">
-              <a:buNone/>
-            </a:pPr>
             <a:r>
               <a:rPr lang="en-US" sz="900" b="1" dirty="0">
                 <a:solidFill>
@@ -11773,7 +11255,7 @@
           <a:bodyPr wrap="square" rtlCol="0" anchor="ctr"/>
           <a:lstStyle/>
           <a:p>
-            <a:pPr algn="l" indent="0" marL="0">
+            <a:pPr marL="0" indent="0" algn="l">
               <a:buNone/>
             </a:pPr>
             <a:r>
@@ -11810,6 +11292,13 @@
           </a:solidFill>
           <a:ln/>
         </p:spPr>
+        <p:txBody>
+          <a:bodyPr/>
+          <a:lstStyle/>
+          <a:p>
+            <a:endParaRPr lang="en-US"/>
+          </a:p>
+        </p:txBody>
       </p:sp>
       <p:sp>
         <p:nvSpPr>
@@ -11832,7 +11321,7 @@
           <a:bodyPr wrap="square" rtlCol="0" anchor="t"/>
           <a:lstStyle/>
           <a:p>
-            <a:pPr indent="0" marL="0">
+            <a:pPr marL="0" indent="0">
               <a:lnSpc>
                 <a:spcPct val="135000"/>
               </a:lnSpc>
@@ -11852,7 +11341,54 @@
               </a:rPr>
               <a:t>1.  Open </a:t>
             </a:r>
-            <a:pPr indent="0" marL="0">
+            <a:r>
+              <a:rPr lang="en-US" sz="1600" dirty="0">
+                <a:solidFill>
+                  <a:srgbClr val="1F2937"/>
+                </a:solidFill>
+                <a:latin typeface="Courier New" pitchFamily="34" charset="0"/>
+                <a:ea typeface="Courier New" pitchFamily="34" charset="-122"/>
+                <a:cs typeface="Courier New" pitchFamily="34" charset="-120"/>
+              </a:rPr>
+              <a:t>starter/</a:t>
+            </a:r>
+            <a:r>
+              <a:rPr lang="en-US" sz="1600" dirty="0">
+                <a:solidFill>
+                  <a:srgbClr val="1F2937"/>
+                </a:solidFill>
+                <a:latin typeface="Arial" pitchFamily="34" charset="0"/>
+                <a:ea typeface="Arial" pitchFamily="34" charset="-122"/>
+                <a:cs typeface="Arial" pitchFamily="34" charset="-120"/>
+              </a:rPr>
+              <a:t> → new session → send </a:t>
+            </a:r>
+            <a:r>
+              <a:rPr lang="en-US" sz="1600" dirty="0">
+                <a:solidFill>
+                  <a:srgbClr val="1F2937"/>
+                </a:solidFill>
+                <a:latin typeface="Courier New" pitchFamily="34" charset="0"/>
+                <a:ea typeface="Courier New" pitchFamily="34" charset="-122"/>
+                <a:cs typeface="Courier New" pitchFamily="34" charset="-120"/>
+              </a:rPr>
+              <a:t>Hello</a:t>
+            </a:r>
+            <a:r>
+              <a:rPr lang="en-US" sz="1600" dirty="0">
+                <a:solidFill>
+                  <a:srgbClr val="1F2937"/>
+                </a:solidFill>
+                <a:latin typeface="Arial" pitchFamily="34" charset="0"/>
+                <a:ea typeface="Arial" pitchFamily="34" charset="-122"/>
+                <a:cs typeface="Arial" pitchFamily="34" charset="-120"/>
+              </a:rPr>
+              <a:t> → it answers ✅</a:t>
+            </a:r>
+            <a:endParaRPr lang="en-US" sz="1600" dirty="0"/>
+          </a:p>
+          <a:p>
+            <a:pPr marL="0" indent="0">
               <a:lnSpc>
                 <a:spcPct val="135000"/>
               </a:lnSpc>
@@ -11866,21 +11402,23 @@
                 <a:solidFill>
                   <a:srgbClr val="1F2937"/>
                 </a:solidFill>
+                <a:latin typeface="Arial" pitchFamily="34" charset="0"/>
+                <a:ea typeface="Arial" pitchFamily="34" charset="-122"/>
+                <a:cs typeface="Arial" pitchFamily="34" charset="-120"/>
+              </a:rPr>
+              <a:t>2.  Stuck later? Type </a:t>
+            </a:r>
+            <a:r>
+              <a:rPr lang="en-US" sz="1600" b="1" dirty="0">
+                <a:solidFill>
+                  <a:srgbClr val="16A34A"/>
+                </a:solidFill>
                 <a:latin typeface="Courier New" pitchFamily="34" charset="0"/>
                 <a:ea typeface="Courier New" pitchFamily="34" charset="-122"/>
                 <a:cs typeface="Courier New" pitchFamily="34" charset="-120"/>
               </a:rPr>
-              <a:t>starter/</a:t>
-            </a:r>
-            <a:pPr indent="0" marL="0">
-              <a:lnSpc>
-                <a:spcPct val="135000"/>
-              </a:lnSpc>
-              <a:spcAft>
-                <a:spcPts val="1400"/>
-              </a:spcAft>
-              <a:buNone/>
-            </a:pPr>
+              <a:t>/module-1 … /module-4</a:t>
+            </a:r>
             <a:r>
               <a:rPr lang="en-US" sz="1600" dirty="0">
                 <a:solidFill>
@@ -11890,115 +11428,12 @@
                 <a:ea typeface="Arial" pitchFamily="34" charset="-122"/>
                 <a:cs typeface="Arial" pitchFamily="34" charset="-120"/>
               </a:rPr>
-              <a:t> → new session → send </a:t>
-            </a:r>
-            <a:pPr indent="0" marL="0">
-              <a:lnSpc>
-                <a:spcPct val="135000"/>
-              </a:lnSpc>
-              <a:spcAft>
-                <a:spcPts val="1400"/>
-              </a:spcAft>
-              <a:buNone/>
-            </a:pPr>
-            <a:r>
-              <a:rPr lang="en-US" sz="1600" dirty="0">
-                <a:solidFill>
-                  <a:srgbClr val="1F2937"/>
-                </a:solidFill>
-                <a:latin typeface="Courier New" pitchFamily="34" charset="0"/>
-                <a:ea typeface="Courier New" pitchFamily="34" charset="-122"/>
-                <a:cs typeface="Courier New" pitchFamily="34" charset="-120"/>
-              </a:rPr>
-              <a:t>Hello</a:t>
-            </a:r>
-            <a:pPr indent="0" marL="0">
-              <a:lnSpc>
-                <a:spcPct val="135000"/>
-              </a:lnSpc>
-              <a:spcAft>
-                <a:spcPts val="1400"/>
-              </a:spcAft>
-              <a:buNone/>
-            </a:pPr>
-            <a:r>
-              <a:rPr lang="en-US" sz="1600" dirty="0">
-                <a:solidFill>
-                  <a:srgbClr val="1F2937"/>
-                </a:solidFill>
-                <a:latin typeface="Arial" pitchFamily="34" charset="0"/>
-                <a:ea typeface="Arial" pitchFamily="34" charset="-122"/>
-                <a:cs typeface="Arial" pitchFamily="34" charset="-120"/>
-              </a:rPr>
-              <a:t> → it answers ✅</a:t>
+              <a:t> — the AI tutors you step by step</a:t>
             </a:r>
             <a:endParaRPr lang="en-US" sz="1600" dirty="0"/>
           </a:p>
           <a:p>
-            <a:pPr indent="0" marL="0">
-              <a:lnSpc>
-                <a:spcPct val="135000"/>
-              </a:lnSpc>
-              <a:spcAft>
-                <a:spcPts val="1400"/>
-              </a:spcAft>
-              <a:buNone/>
-            </a:pPr>
-            <a:r>
-              <a:rPr lang="en-US" sz="1600" dirty="0">
-                <a:solidFill>
-                  <a:srgbClr val="1F2937"/>
-                </a:solidFill>
-                <a:latin typeface="Arial" pitchFamily="34" charset="0"/>
-                <a:ea typeface="Arial" pitchFamily="34" charset="-122"/>
-                <a:cs typeface="Arial" pitchFamily="34" charset="-120"/>
-              </a:rPr>
-              <a:t>2.  Stuck later? Type </a:t>
-            </a:r>
-            <a:pPr indent="0" marL="0">
-              <a:lnSpc>
-                <a:spcPct val="135000"/>
-              </a:lnSpc>
-              <a:spcAft>
-                <a:spcPts val="1400"/>
-              </a:spcAft>
-              <a:buNone/>
-            </a:pPr>
-            <a:r>
-              <a:rPr lang="en-US" sz="1600" b="1" dirty="0">
-                <a:solidFill>
-                  <a:srgbClr val="16A34A"/>
-                </a:solidFill>
-                <a:latin typeface="Courier New" pitchFamily="34" charset="0"/>
-                <a:ea typeface="Courier New" pitchFamily="34" charset="-122"/>
-                <a:cs typeface="Courier New" pitchFamily="34" charset="-120"/>
-              </a:rPr>
-              <a:t>/module-1 … /module-4</a:t>
-            </a:r>
-            <a:pPr indent="0" marL="0">
-              <a:lnSpc>
-                <a:spcPct val="135000"/>
-              </a:lnSpc>
-              <a:spcAft>
-                <a:spcPts val="1400"/>
-              </a:spcAft>
-              <a:buNone/>
-            </a:pPr>
-            <a:r>
-              <a:rPr lang="en-US" sz="1600" dirty="0">
-                <a:solidFill>
-                  <a:srgbClr val="1F2937"/>
-                </a:solidFill>
-                <a:latin typeface="Arial" pitchFamily="34" charset="0"/>
-                <a:ea typeface="Arial" pitchFamily="34" charset="-122"/>
-                <a:cs typeface="Arial" pitchFamily="34" charset="-120"/>
-              </a:rPr>
-              <a:t> — the AI tutors you step by step</a:t>
-            </a:r>
-            <a:endParaRPr lang="en-US" sz="1600" dirty="0"/>
-          </a:p>
-          <a:p>
-            <a:pPr indent="0" marL="0">
+            <a:pPr marL="0" indent="0">
               <a:lnSpc>
                 <a:spcPct val="135000"/>
               </a:lnSpc>
@@ -12015,12 +11450,6 @@
               </a:rPr>
               <a:t>3.  The </a:t>
             </a:r>
-            <a:pPr indent="0" marL="0">
-              <a:lnSpc>
-                <a:spcPct val="135000"/>
-              </a:lnSpc>
-              <a:buNone/>
-            </a:pPr>
             <a:r>
               <a:rPr lang="en-US" sz="1600" dirty="0">
                 <a:solidFill>
@@ -12032,12 +11461,6 @@
               </a:rPr>
               <a:t>demos/</a:t>
             </a:r>
-            <a:pPr indent="0" marL="0">
-              <a:lnSpc>
-                <a:spcPct val="135000"/>
-              </a:lnSpc>
-              <a:buNone/>
-            </a:pPr>
             <a:r>
               <a:rPr lang="en-US" sz="1600" dirty="0">
                 <a:solidFill>
@@ -12073,7 +11496,7 @@
           </a:prstGeom>
           <a:extLst>
             <a:ext uri="{C572A759-6A51-4108-AA02-DFA0A04FC94B}">
-              <ma14:wrappingTextBoxFlag xmlns:ma14="http://schemas.microsoft.com/office/mac/drawingml/2011/main" val="0"/>
+              <ma14:wrappingTextBoxFlag xmlns="" xmlns:ma14="http://schemas.microsoft.com/office/mac/drawingml/2011/main" val="0"/>
             </a:ext>
           </a:extLst>
         </p:spPr>
@@ -12091,7 +11514,7 @@
           <a:p>
             <a:pPr algn="l"/>
             <a:fld id="{F7021451-1387-4CA6-816F-3879F97B5CBC}" type="slidenum">
-              <a:rPr b="0" lang="en-US"/>
+              <a:rPr lang="en-US" b="0"/>
               <a:t>5</a:t>
             </a:fld>
             <a:endParaRPr lang="en-US"/>
@@ -12144,7 +11567,7 @@
           <a:bodyPr wrap="square" rtlCol="0" anchor="ctr"/>
           <a:lstStyle/>
           <a:p>
-            <a:pPr algn="r" indent="0" marL="0">
+            <a:pPr marL="0" indent="0" algn="r">
               <a:buNone/>
             </a:pPr>
             <a:r>
@@ -12158,9 +11581,6 @@
               </a:rPr>
               <a:t>x</a:t>
             </a:r>
-            <a:pPr algn="r" indent="0" marL="0">
-              <a:buNone/>
-            </a:pPr>
             <a:r>
               <a:rPr lang="en-US" sz="900" b="1" dirty="0">
                 <a:solidFill>
@@ -12172,9 +11592,6 @@
               </a:rPr>
               <a:t>P</a:t>
             </a:r>
-            <a:pPr algn="r" indent="0" marL="0">
-              <a:buNone/>
-            </a:pPr>
             <a:r>
               <a:rPr lang="en-US" sz="900" b="1" dirty="0">
                 <a:solidFill>
@@ -12211,7 +11628,7 @@
           <a:bodyPr wrap="square" rtlCol="0" anchor="ctr"/>
           <a:lstStyle/>
           <a:p>
-            <a:pPr algn="l" indent="0" marL="0">
+            <a:pPr marL="0" indent="0" algn="l">
               <a:buNone/>
             </a:pPr>
             <a:r>
@@ -12248,6 +11665,13 @@
           </a:solidFill>
           <a:ln/>
         </p:spPr>
+        <p:txBody>
+          <a:bodyPr/>
+          <a:lstStyle/>
+          <a:p>
+            <a:endParaRPr lang="en-US"/>
+          </a:p>
+        </p:txBody>
       </p:sp>
       <p:sp>
         <p:nvSpPr>
@@ -12270,6 +11694,13 @@
           </a:solidFill>
           <a:ln/>
         </p:spPr>
+        <p:txBody>
+          <a:bodyPr/>
+          <a:lstStyle/>
+          <a:p>
+            <a:endParaRPr lang="en-US"/>
+          </a:p>
+        </p:txBody>
       </p:sp>
       <p:sp>
         <p:nvSpPr>
@@ -12292,7 +11723,7 @@
           <a:bodyPr wrap="square" rtlCol="0" anchor="ctr"/>
           <a:lstStyle/>
           <a:p>
-            <a:pPr algn="ctr" indent="0" marL="0">
+            <a:pPr marL="0" indent="0" algn="ctr">
               <a:buNone/>
             </a:pPr>
             <a:r>
@@ -12424,7 +11855,7 @@
           </a:prstGeom>
           <a:extLst>
             <a:ext uri="{C572A759-6A51-4108-AA02-DFA0A04FC94B}">
-              <ma14:wrappingTextBoxFlag xmlns:ma14="http://schemas.microsoft.com/office/mac/drawingml/2011/main" val="0"/>
+              <ma14:wrappingTextBoxFlag xmlns="" xmlns:ma14="http://schemas.microsoft.com/office/mac/drawingml/2011/main" val="0"/>
             </a:ext>
           </a:extLst>
         </p:spPr>
@@ -12442,7 +11873,7 @@
           <a:p>
             <a:pPr algn="l"/>
             <a:fld id="{F7021451-1387-4CA6-816F-3879F97B5CBC}" type="slidenum">
-              <a:rPr b="0" lang="en-US"/>
+              <a:rPr lang="en-US" b="0"/>
               <a:t>6</a:t>
             </a:fld>
             <a:endParaRPr lang="en-US"/>
@@ -12495,7 +11926,7 @@
           <a:bodyPr wrap="square" rtlCol="0" anchor="ctr"/>
           <a:lstStyle/>
           <a:p>
-            <a:pPr algn="r" indent="0" marL="0">
+            <a:pPr marL="0" indent="0" algn="r">
               <a:buNone/>
             </a:pPr>
             <a:r>
@@ -12509,9 +11940,6 @@
               </a:rPr>
               <a:t>x</a:t>
             </a:r>
-            <a:pPr algn="r" indent="0" marL="0">
-              <a:buNone/>
-            </a:pPr>
             <a:r>
               <a:rPr lang="en-US" sz="900" b="1" dirty="0">
                 <a:solidFill>
@@ -12523,9 +11951,6 @@
               </a:rPr>
               <a:t>P</a:t>
             </a:r>
-            <a:pPr algn="r" indent="0" marL="0">
-              <a:buNone/>
-            </a:pPr>
             <a:r>
               <a:rPr lang="en-US" sz="900" b="1" dirty="0">
                 <a:solidFill>
@@ -12562,7 +11987,7 @@
           <a:bodyPr wrap="square" rtlCol="0" anchor="ctr"/>
           <a:lstStyle/>
           <a:p>
-            <a:pPr algn="l" indent="0" marL="0">
+            <a:pPr marL="0" indent="0" algn="l">
               <a:buNone/>
             </a:pPr>
             <a:r>
@@ -12599,6 +12024,13 @@
           </a:solidFill>
           <a:ln/>
         </p:spPr>
+        <p:txBody>
+          <a:bodyPr/>
+          <a:lstStyle/>
+          <a:p>
+            <a:endParaRPr lang="en-US"/>
+          </a:p>
+        </p:txBody>
       </p:sp>
       <p:sp>
         <p:nvSpPr>
@@ -12621,7 +12053,7 @@
           <a:bodyPr wrap="square" rtlCol="0" anchor="t"/>
           <a:lstStyle/>
           <a:p>
-            <a:pPr indent="0" marL="0">
+            <a:pPr marL="0" indent="0">
               <a:lnSpc>
                 <a:spcPct val="140000"/>
               </a:lnSpc>
@@ -12713,6 +12145,17 @@
               </a:rPr>
               <a:t>Big Pickle</a:t>
             </a:r>
+            <a:r>
+              <a:rPr lang="en-US" sz="1600" dirty="0">
+                <a:solidFill>
+                  <a:srgbClr val="1F2937"/>
+                </a:solidFill>
+                <a:latin typeface="Arial" pitchFamily="34" charset="0"/>
+                <a:ea typeface="Arial" pitchFamily="34" charset="-122"/>
+                <a:cs typeface="Arial" pitchFamily="34" charset="-120"/>
+              </a:rPr>
+              <a:t> &amp; friends</a:t>
+            </a:r>
             <a:endParaRPr lang="en-US" sz="1700" dirty="0"/>
           </a:p>
           <a:p>
@@ -12735,21 +12178,23 @@
                 <a:ea typeface="Arial" pitchFamily="34" charset="-122"/>
                 <a:cs typeface="Arial" pitchFamily="34" charset="-120"/>
               </a:rPr>
-              <a:t> &amp; friends</a:t>
-            </a:r>
-            <a:endParaRPr lang="en-US" sz="1700" dirty="0"/>
-          </a:p>
-          <a:p>
-            <a:pPr marL="342900" indent="-342900">
-              <a:lnSpc>
-                <a:spcPct val="140000"/>
-              </a:lnSpc>
-              <a:spcAft>
-                <a:spcPts val="800"/>
-              </a:spcAft>
-              <a:buSzPct val="100000"/>
-              <a:buChar char="•"/>
-            </a:pPr>
+              <a:t>Pick yours in the </a:t>
+            </a:r>
+            <a:r>
+              <a:rPr lang="en-US" sz="1600" b="1" dirty="0">
+                <a:solidFill>
+                  <a:srgbClr val="16A34A"/>
+                </a:solidFill>
+                <a:latin typeface="Arial" pitchFamily="34" charset="0"/>
+                <a:ea typeface="Arial" pitchFamily="34" charset="-122"/>
+                <a:cs typeface="Arial" pitchFamily="34" charset="-120"/>
+              </a:rPr>
+              <a:t>model selector</a:t>
+            </a:r>
+            <a:r>
+              <a:rPr lang="en-US" sz="1700" b="1" dirty="0"/>
+              <a:t> </a:t>
+            </a:r>
             <a:r>
               <a:rPr lang="en-US" sz="1600" dirty="0">
                 <a:solidFill>
@@ -12759,55 +12204,7 @@
                 <a:ea typeface="Arial" pitchFamily="34" charset="-122"/>
                 <a:cs typeface="Arial" pitchFamily="34" charset="-120"/>
               </a:rPr>
-              <a:t>Pick yours in the </a:t>
-            </a:r>
-            <a:endParaRPr lang="en-US" sz="1700" dirty="0"/>
-          </a:p>
-          <a:p>
-            <a:pPr marL="342900" indent="-342900">
-              <a:lnSpc>
-                <a:spcPct val="140000"/>
-              </a:lnSpc>
-              <a:spcAft>
-                <a:spcPts val="800"/>
-              </a:spcAft>
-              <a:buSzPct val="100000"/>
-              <a:buChar char="•"/>
-            </a:pPr>
-            <a:r>
-              <a:rPr lang="en-US" sz="1600" b="1" dirty="0">
-                <a:solidFill>
-                  <a:srgbClr val="16A34A"/>
-                </a:solidFill>
-                <a:latin typeface="Arial" pitchFamily="34" charset="0"/>
-                <a:ea typeface="Arial" pitchFamily="34" charset="-122"/>
-                <a:cs typeface="Arial" pitchFamily="34" charset="-120"/>
-              </a:rPr>
-              <a:t>model selector</a:t>
-            </a:r>
-            <a:endParaRPr lang="en-US" sz="1700" dirty="0"/>
-          </a:p>
-          <a:p>
-            <a:pPr marL="342900" indent="-342900">
-              <a:lnSpc>
-                <a:spcPct val="140000"/>
-              </a:lnSpc>
-              <a:spcAft>
-                <a:spcPts val="800"/>
-              </a:spcAft>
-              <a:buSzPct val="100000"/>
-              <a:buChar char="•"/>
-            </a:pPr>
-            <a:r>
-              <a:rPr lang="en-US" sz="1600" dirty="0">
-                <a:solidFill>
-                  <a:srgbClr val="1F2937"/>
-                </a:solidFill>
-                <a:latin typeface="Arial" pitchFamily="34" charset="0"/>
-                <a:ea typeface="Arial" pitchFamily="34" charset="-122"/>
-                <a:cs typeface="Arial" pitchFamily="34" charset="-120"/>
-              </a:rPr>
-              <a:t> (bottom of the window)</a:t>
+              <a:t>(bottom of the window)</a:t>
             </a:r>
             <a:endParaRPr lang="en-US" sz="1700" dirty="0"/>
           </a:p>
@@ -12833,7 +12230,7 @@
           </a:prstGeom>
           <a:extLst>
             <a:ext uri="{C572A759-6A51-4108-AA02-DFA0A04FC94B}">
-              <ma14:wrappingTextBoxFlag xmlns:ma14="http://schemas.microsoft.com/office/mac/drawingml/2011/main" val="0"/>
+              <ma14:wrappingTextBoxFlag xmlns="" xmlns:ma14="http://schemas.microsoft.com/office/mac/drawingml/2011/main" val="0"/>
             </a:ext>
           </a:extLst>
         </p:spPr>
@@ -12851,7 +12248,7 @@
           <a:p>
             <a:pPr algn="l"/>
             <a:fld id="{F7021451-1387-4CA6-816F-3879F97B5CBC}" type="slidenum">
-              <a:rPr b="0" lang="en-US"/>
+              <a:rPr lang="en-US" b="0"/>
               <a:t>7</a:t>
             </a:fld>
             <a:endParaRPr lang="en-US"/>
@@ -12904,7 +12301,7 @@
           <a:bodyPr wrap="square" rtlCol="0" anchor="ctr"/>
           <a:lstStyle/>
           <a:p>
-            <a:pPr algn="r" indent="0" marL="0">
+            <a:pPr marL="0" indent="0" algn="r">
               <a:buNone/>
             </a:pPr>
             <a:r>
@@ -12918,9 +12315,6 @@
               </a:rPr>
               <a:t>x</a:t>
             </a:r>
-            <a:pPr algn="r" indent="0" marL="0">
-              <a:buNone/>
-            </a:pPr>
             <a:r>
               <a:rPr lang="en-US" sz="900" b="1" dirty="0">
                 <a:solidFill>
@@ -12932,9 +12326,6 @@
               </a:rPr>
               <a:t>P</a:t>
             </a:r>
-            <a:pPr algn="r" indent="0" marL="0">
-              <a:buNone/>
-            </a:pPr>
             <a:r>
               <a:rPr lang="en-US" sz="900" b="1" dirty="0">
                 <a:solidFill>
@@ -12971,7 +12362,7 @@
           <a:bodyPr wrap="square" rtlCol="0" anchor="ctr"/>
           <a:lstStyle/>
           <a:p>
-            <a:pPr algn="l" indent="0" marL="0">
+            <a:pPr marL="0" indent="0" algn="l">
               <a:buNone/>
             </a:pPr>
             <a:r>
@@ -13008,6 +12399,13 @@
           </a:solidFill>
           <a:ln/>
         </p:spPr>
+        <p:txBody>
+          <a:bodyPr/>
+          <a:lstStyle/>
+          <a:p>
+            <a:endParaRPr lang="en-US"/>
+          </a:p>
+        </p:txBody>
       </p:sp>
       <p:sp>
         <p:nvSpPr>
@@ -13030,7 +12428,7 @@
           <a:bodyPr wrap="square" rtlCol="0" anchor="t"/>
           <a:lstStyle/>
           <a:p>
-            <a:pPr indent="0" marL="0">
+            <a:pPr marL="0" indent="0">
               <a:lnSpc>
                 <a:spcPct val="130000"/>
               </a:lnSpc>
@@ -13050,15 +12448,6 @@
               </a:rPr>
               <a:t>Models don't read words — they read </a:t>
             </a:r>
-            <a:pPr indent="0" marL="0">
-              <a:lnSpc>
-                <a:spcPct val="130000"/>
-              </a:lnSpc>
-              <a:spcAft>
-                <a:spcPts val="1000"/>
-              </a:spcAft>
-              <a:buNone/>
-            </a:pPr>
             <a:r>
               <a:rPr lang="en-US" sz="1600" b="1" dirty="0">
                 <a:solidFill>
@@ -13172,6 +12561,13 @@
             <a:prstDash val="solid"/>
           </a:ln>
         </p:spPr>
+        <p:txBody>
+          <a:bodyPr/>
+          <a:lstStyle/>
+          <a:p>
+            <a:endParaRPr lang="en-US"/>
+          </a:p>
+        </p:txBody>
       </p:sp>
       <p:sp>
         <p:nvSpPr>
@@ -13194,7 +12590,7 @@
           <a:bodyPr wrap="square" rtlCol="0" anchor="ctr"/>
           <a:lstStyle/>
           <a:p>
-            <a:pPr algn="l" indent="0" marL="0">
+            <a:pPr marL="0" indent="0" algn="l">
               <a:lnSpc>
                 <a:spcPct val="115000"/>
               </a:lnSpc>
@@ -13235,7 +12631,7 @@
           </a:prstGeom>
           <a:extLst>
             <a:ext uri="{C572A759-6A51-4108-AA02-DFA0A04FC94B}">
-              <ma14:wrappingTextBoxFlag xmlns:ma14="http://schemas.microsoft.com/office/mac/drawingml/2011/main" val="0"/>
+              <ma14:wrappingTextBoxFlag xmlns="" xmlns:ma14="http://schemas.microsoft.com/office/mac/drawingml/2011/main" val="0"/>
             </a:ext>
           </a:extLst>
         </p:spPr>
@@ -13253,7 +12649,7 @@
           <a:p>
             <a:pPr algn="l"/>
             <a:fld id="{F7021451-1387-4CA6-816F-3879F97B5CBC}" type="slidenum">
-              <a:rPr b="0" lang="en-US"/>
+              <a:rPr lang="en-US" b="0"/>
               <a:t>8</a:t>
             </a:fld>
             <a:endParaRPr lang="en-US"/>
@@ -13306,7 +12702,7 @@
           <a:bodyPr wrap="square" rtlCol="0" anchor="ctr"/>
           <a:lstStyle/>
           <a:p>
-            <a:pPr algn="r" indent="0" marL="0">
+            <a:pPr marL="0" indent="0" algn="r">
               <a:buNone/>
             </a:pPr>
             <a:r>
@@ -13320,9 +12716,6 @@
               </a:rPr>
               <a:t>x</a:t>
             </a:r>
-            <a:pPr algn="r" indent="0" marL="0">
-              <a:buNone/>
-            </a:pPr>
             <a:r>
               <a:rPr lang="en-US" sz="900" b="1" dirty="0">
                 <a:solidFill>
@@ -13334,9 +12727,6 @@
               </a:rPr>
               <a:t>P</a:t>
             </a:r>
-            <a:pPr algn="r" indent="0" marL="0">
-              <a:buNone/>
-            </a:pPr>
             <a:r>
               <a:rPr lang="en-US" sz="900" b="1" dirty="0">
                 <a:solidFill>
@@ -13373,7 +12763,7 @@
           <a:bodyPr wrap="square" rtlCol="0" anchor="ctr"/>
           <a:lstStyle/>
           <a:p>
-            <a:pPr algn="l" indent="0" marL="0">
+            <a:pPr marL="0" indent="0" algn="l">
               <a:buNone/>
             </a:pPr>
             <a:r>
@@ -13410,6 +12800,13 @@
           </a:solidFill>
           <a:ln/>
         </p:spPr>
+        <p:txBody>
+          <a:bodyPr/>
+          <a:lstStyle/>
+          <a:p>
+            <a:endParaRPr lang="en-US"/>
+          </a:p>
+        </p:txBody>
       </p:sp>
       <p:sp>
         <p:nvSpPr>
@@ -13432,7 +12829,7 @@
           <a:bodyPr wrap="square" rtlCol="0" anchor="t"/>
           <a:lstStyle/>
           <a:p>
-            <a:pPr indent="0" marL="0">
+            <a:pPr marL="0" indent="0">
               <a:lnSpc>
                 <a:spcPct val="140000"/>
               </a:lnSpc>
@@ -13452,15 +12849,6 @@
               </a:rPr>
               <a:t>The context window = </a:t>
             </a:r>
-            <a:pPr indent="0" marL="0">
-              <a:lnSpc>
-                <a:spcPct val="140000"/>
-              </a:lnSpc>
-              <a:spcAft>
-                <a:spcPts val="1200"/>
-              </a:spcAft>
-              <a:buNone/>
-            </a:pPr>
             <a:r>
               <a:rPr lang="en-US" sz="1600" b="1" dirty="0">
                 <a:solidFill>
@@ -13568,7 +12956,7 @@
           </a:prstGeom>
           <a:extLst>
             <a:ext uri="{C572A759-6A51-4108-AA02-DFA0A04FC94B}">
-              <ma14:wrappingTextBoxFlag xmlns:ma14="http://schemas.microsoft.com/office/mac/drawingml/2011/main" val="0"/>
+              <ma14:wrappingTextBoxFlag xmlns="" xmlns:ma14="http://schemas.microsoft.com/office/mac/drawingml/2011/main" val="0"/>
             </a:ext>
           </a:extLst>
         </p:spPr>
@@ -13586,7 +12974,7 @@
           <a:p>
             <a:pPr algn="l"/>
             <a:fld id="{F7021451-1387-4CA6-816F-3879F97B5CBC}" type="slidenum">
-              <a:rPr b="0" lang="en-US"/>
+              <a:rPr lang="en-US" b="0"/>
               <a:t>9</a:t>
             </a:fld>
             <a:endParaRPr lang="en-US"/>
@@ -13894,4 +13282,319 @@
     </a:ext>
   </a:extLst>
 </a:theme>
+</file>
+
+<file path=ppt/theme/theme2.xml><?xml version="1.0" encoding="utf-8"?>
+<a:theme xmlns:a="http://schemas.openxmlformats.org/drawingml/2006/main" name="Office Theme">
+  <a:themeElements>
+    <a:clrScheme name="Office">
+      <a:dk1>
+        <a:sysClr val="windowText" lastClr="000000"/>
+      </a:dk1>
+      <a:lt1>
+        <a:sysClr val="window" lastClr="FFFFFF"/>
+      </a:lt1>
+      <a:dk2>
+        <a:srgbClr val="0E2841"/>
+      </a:dk2>
+      <a:lt2>
+        <a:srgbClr val="E8E8E8"/>
+      </a:lt2>
+      <a:accent1>
+        <a:srgbClr val="156082"/>
+      </a:accent1>
+      <a:accent2>
+        <a:srgbClr val="E97132"/>
+      </a:accent2>
+      <a:accent3>
+        <a:srgbClr val="196B24"/>
+      </a:accent3>
+      <a:accent4>
+        <a:srgbClr val="0F9ED5"/>
+      </a:accent4>
+      <a:accent5>
+        <a:srgbClr val="A02B93"/>
+      </a:accent5>
+      <a:accent6>
+        <a:srgbClr val="4EA72E"/>
+      </a:accent6>
+      <a:hlink>
+        <a:srgbClr val="467886"/>
+      </a:hlink>
+      <a:folHlink>
+        <a:srgbClr val="96607D"/>
+      </a:folHlink>
+    </a:clrScheme>
+    <a:fontScheme name="Office">
+      <a:majorFont>
+        <a:latin typeface="Aptos Display" panose="02110004020202020204"/>
+        <a:ea typeface=""/>
+        <a:cs typeface=""/>
+        <a:font script="Jpan" typeface="游ゴシック Light"/>
+        <a:font script="Hang" typeface="맑은 고딕"/>
+        <a:font script="Hans" typeface="等线 Light"/>
+        <a:font script="Hant" typeface="新細明體"/>
+        <a:font script="Arab" typeface="Times New Roman"/>
+        <a:font script="Hebr" typeface="Times New Roman"/>
+        <a:font script="Thai" typeface="Angsana New"/>
+        <a:font script="Ethi" typeface="Nyala"/>
+        <a:font script="Beng" typeface="Vrinda"/>
+        <a:font script="Gujr" typeface="Shruti"/>
+        <a:font script="Khmr" typeface="MoolBoran"/>
+        <a:font script="Knda" typeface="Tunga"/>
+        <a:font script="Guru" typeface="Raavi"/>
+        <a:font script="Cans" typeface="Euphemia"/>
+        <a:font script="Cher" typeface="Plantagenet Cherokee"/>
+        <a:font script="Yiii" typeface="Microsoft Yi Baiti"/>
+        <a:font script="Tibt" typeface="Microsoft Himalaya"/>
+        <a:font script="Thaa" typeface="MV Boli"/>
+        <a:font script="Deva" typeface="Mangal"/>
+        <a:font script="Telu" typeface="Gautami"/>
+        <a:font script="Taml" typeface="Latha"/>
+        <a:font script="Syrc" typeface="Estrangelo Edessa"/>
+        <a:font script="Orya" typeface="Kalinga"/>
+        <a:font script="Mlym" typeface="Kartika"/>
+        <a:font script="Laoo" typeface="DokChampa"/>
+        <a:font script="Sinh" typeface="Iskoola Pota"/>
+        <a:font script="Mong" typeface="Mongolian Baiti"/>
+        <a:font script="Viet" typeface="Times New Roman"/>
+        <a:font script="Uigh" typeface="Microsoft Uighur"/>
+        <a:font script="Geor" typeface="Sylfaen"/>
+        <a:font script="Armn" typeface="Arial"/>
+        <a:font script="Bugi" typeface="Leelawadee UI"/>
+        <a:font script="Bopo" typeface="Microsoft JhengHei"/>
+        <a:font script="Java" typeface="Javanese Text"/>
+        <a:font script="Lisu" typeface="Segoe UI"/>
+        <a:font script="Mymr" typeface="Myanmar Text"/>
+        <a:font script="Nkoo" typeface="Ebrima"/>
+        <a:font script="Olck" typeface="Nirmala UI"/>
+        <a:font script="Osma" typeface="Ebrima"/>
+        <a:font script="Phag" typeface="Phagspa"/>
+        <a:font script="Syrn" typeface="Estrangelo Edessa"/>
+        <a:font script="Syrj" typeface="Estrangelo Edessa"/>
+        <a:font script="Syre" typeface="Estrangelo Edessa"/>
+        <a:font script="Sora" typeface="Nirmala UI"/>
+        <a:font script="Tale" typeface="Microsoft Tai Le"/>
+        <a:font script="Talu" typeface="Microsoft New Tai Lue"/>
+        <a:font script="Tfng" typeface="Ebrima"/>
+      </a:majorFont>
+      <a:minorFont>
+        <a:latin typeface="Aptos" panose="02110004020202020204"/>
+        <a:ea typeface=""/>
+        <a:cs typeface=""/>
+        <a:font script="Jpan" typeface="游ゴシック"/>
+        <a:font script="Hang" typeface="맑은 고딕"/>
+        <a:font script="Hans" typeface="等线"/>
+        <a:font script="Hant" typeface="新細明體"/>
+        <a:font script="Arab" typeface="Arial"/>
+        <a:font script="Hebr" typeface="Arial"/>
+        <a:font script="Thai" typeface="Cordia New"/>
+        <a:font script="Ethi" typeface="Nyala"/>
+        <a:font script="Beng" typeface="Vrinda"/>
+        <a:font script="Gujr" typeface="Shruti"/>
+        <a:font script="Khmr" typeface="DaunPenh"/>
+        <a:font script="Knda" typeface="Tunga"/>
+        <a:font script="Guru" typeface="Raavi"/>
+        <a:font script="Cans" typeface="Euphemia"/>
+        <a:font script="Cher" typeface="Plantagenet Cherokee"/>
+        <a:font script="Yiii" typeface="Microsoft Yi Baiti"/>
+        <a:font script="Tibt" typeface="Microsoft Himalaya"/>
+        <a:font script="Thaa" typeface="MV Boli"/>
+        <a:font script="Deva" typeface="Mangal"/>
+        <a:font script="Telu" typeface="Gautami"/>
+        <a:font script="Taml" typeface="Latha"/>
+        <a:font script="Syrc" typeface="Estrangelo Edessa"/>
+        <a:font script="Orya" typeface="Kalinga"/>
+        <a:font script="Mlym" typeface="Kartika"/>
+        <a:font script="Laoo" typeface="DokChampa"/>
+        <a:font script="Sinh" typeface="Iskoola Pota"/>
+        <a:font script="Mong" typeface="Mongolian Baiti"/>
+        <a:font script="Viet" typeface="Arial"/>
+        <a:font script="Uigh" typeface="Microsoft Uighur"/>
+        <a:font script="Geor" typeface="Sylfaen"/>
+        <a:font script="Armn" typeface="Arial"/>
+        <a:font script="Bugi" typeface="Leelawadee UI"/>
+        <a:font script="Bopo" typeface="Microsoft JhengHei"/>
+        <a:font script="Java" typeface="Javanese Text"/>
+        <a:font script="Lisu" typeface="Segoe UI"/>
+        <a:font script="Mymr" typeface="Myanmar Text"/>
+        <a:font script="Nkoo" typeface="Ebrima"/>
+        <a:font script="Olck" typeface="Nirmala UI"/>
+        <a:font script="Osma" typeface="Ebrima"/>
+        <a:font script="Phag" typeface="Phagspa"/>
+        <a:font script="Syrn" typeface="Estrangelo Edessa"/>
+        <a:font script="Syrj" typeface="Estrangelo Edessa"/>
+        <a:font script="Syre" typeface="Estrangelo Edessa"/>
+        <a:font script="Sora" typeface="Nirmala UI"/>
+        <a:font script="Tale" typeface="Microsoft Tai Le"/>
+        <a:font script="Talu" typeface="Microsoft New Tai Lue"/>
+        <a:font script="Tfng" typeface="Ebrima"/>
+      </a:minorFont>
+    </a:fontScheme>
+    <a:fmtScheme name="Office">
+      <a:fillStyleLst>
+        <a:solidFill>
+          <a:schemeClr val="phClr"/>
+        </a:solidFill>
+        <a:gradFill rotWithShape="1">
+          <a:gsLst>
+            <a:gs pos="0">
+              <a:schemeClr val="phClr">
+                <a:lumMod val="110000"/>
+                <a:satMod val="105000"/>
+                <a:tint val="67000"/>
+              </a:schemeClr>
+            </a:gs>
+            <a:gs pos="50000">
+              <a:schemeClr val="phClr">
+                <a:lumMod val="105000"/>
+                <a:satMod val="103000"/>
+                <a:tint val="73000"/>
+              </a:schemeClr>
+            </a:gs>
+            <a:gs pos="100000">
+              <a:schemeClr val="phClr">
+                <a:lumMod val="105000"/>
+                <a:satMod val="109000"/>
+                <a:tint val="81000"/>
+              </a:schemeClr>
+            </a:gs>
+          </a:gsLst>
+          <a:lin ang="5400000" scaled="0"/>
+        </a:gradFill>
+        <a:gradFill rotWithShape="1">
+          <a:gsLst>
+            <a:gs pos="0">
+              <a:schemeClr val="phClr">
+                <a:satMod val="103000"/>
+                <a:lumMod val="102000"/>
+                <a:tint val="94000"/>
+              </a:schemeClr>
+            </a:gs>
+            <a:gs pos="50000">
+              <a:schemeClr val="phClr">
+                <a:satMod val="110000"/>
+                <a:lumMod val="100000"/>
+                <a:shade val="100000"/>
+              </a:schemeClr>
+            </a:gs>
+            <a:gs pos="100000">
+              <a:schemeClr val="phClr">
+                <a:lumMod val="99000"/>
+                <a:satMod val="120000"/>
+                <a:shade val="78000"/>
+              </a:schemeClr>
+            </a:gs>
+          </a:gsLst>
+          <a:lin ang="5400000" scaled="0"/>
+        </a:gradFill>
+      </a:fillStyleLst>
+      <a:lnStyleLst>
+        <a:ln w="12700" cap="flat" cmpd="sng" algn="ctr">
+          <a:solidFill>
+            <a:schemeClr val="phClr"/>
+          </a:solidFill>
+          <a:prstDash val="solid"/>
+          <a:miter lim="800000"/>
+        </a:ln>
+        <a:ln w="19050" cap="flat" cmpd="sng" algn="ctr">
+          <a:solidFill>
+            <a:schemeClr val="phClr"/>
+          </a:solidFill>
+          <a:prstDash val="solid"/>
+          <a:miter lim="800000"/>
+        </a:ln>
+        <a:ln w="25400" cap="flat" cmpd="sng" algn="ctr">
+          <a:solidFill>
+            <a:schemeClr val="phClr"/>
+          </a:solidFill>
+          <a:prstDash val="solid"/>
+          <a:miter lim="800000"/>
+        </a:ln>
+      </a:lnStyleLst>
+      <a:effectStyleLst>
+        <a:effectStyle>
+          <a:effectLst/>
+        </a:effectStyle>
+        <a:effectStyle>
+          <a:effectLst/>
+        </a:effectStyle>
+        <a:effectStyle>
+          <a:effectLst>
+            <a:outerShdw blurRad="57150" dist="19050" dir="5400000" algn="ctr" rotWithShape="0">
+              <a:srgbClr val="000000">
+                <a:alpha val="63000"/>
+              </a:srgbClr>
+            </a:outerShdw>
+          </a:effectLst>
+        </a:effectStyle>
+      </a:effectStyleLst>
+      <a:bgFillStyleLst>
+        <a:solidFill>
+          <a:schemeClr val="phClr"/>
+        </a:solidFill>
+        <a:solidFill>
+          <a:schemeClr val="phClr">
+            <a:tint val="95000"/>
+            <a:satMod val="170000"/>
+          </a:schemeClr>
+        </a:solidFill>
+        <a:gradFill rotWithShape="1">
+          <a:gsLst>
+            <a:gs pos="0">
+              <a:schemeClr val="phClr">
+                <a:tint val="93000"/>
+                <a:satMod val="150000"/>
+                <a:shade val="98000"/>
+                <a:lumMod val="102000"/>
+              </a:schemeClr>
+            </a:gs>
+            <a:gs pos="50000">
+              <a:schemeClr val="phClr">
+                <a:tint val="98000"/>
+                <a:satMod val="130000"/>
+                <a:shade val="90000"/>
+                <a:lumMod val="103000"/>
+              </a:schemeClr>
+            </a:gs>
+            <a:gs pos="100000">
+              <a:schemeClr val="phClr">
+                <a:shade val="63000"/>
+                <a:satMod val="120000"/>
+              </a:schemeClr>
+            </a:gs>
+          </a:gsLst>
+          <a:lin ang="5400000" scaled="0"/>
+        </a:gradFill>
+      </a:bgFillStyleLst>
+    </a:fmtScheme>
+  </a:themeElements>
+  <a:objectDefaults>
+    <a:lnDef>
+      <a:spPr/>
+      <a:bodyPr/>
+      <a:lstStyle/>
+      <a:style>
+        <a:lnRef idx="2">
+          <a:schemeClr val="accent1"/>
+        </a:lnRef>
+        <a:fillRef idx="0">
+          <a:schemeClr val="accent1"/>
+        </a:fillRef>
+        <a:effectRef idx="1">
+          <a:schemeClr val="accent1"/>
+        </a:effectRef>
+        <a:fontRef idx="minor">
+          <a:schemeClr val="tx1"/>
+        </a:fontRef>
+      </a:style>
+    </a:lnDef>
+  </a:objectDefaults>
+  <a:extraClrSchemeLst/>
+  <a:extLst>
+    <a:ext uri="{05A4C25C-085E-4340-85A3-A5531E510DB2}">
+      <thm15:themeFamily xmlns:thm15="http://schemas.microsoft.com/office/thememl/2012/main" name="Office Theme" id="{2E142A2C-CD16-42D6-873A-C26D2A0506FA}" vid="{1BDDFF52-6CD6-40A5-AB3C-68EB2F1E4D0A}"/>
+    </a:ext>
+  </a:extLst>
+</a:theme>
 </file>